--- a/docs/LifeLine_Pitch_Deck_v4_FINAL.pptx
+++ b/docs/LifeLine_Pitch_Deck_v4_FINAL.pptx
@@ -2,22 +2,22 @@
 <file path=ppt/presentation.xml><?xml version="1.0" encoding="utf-8"?>
 <p:presentation xmlns:p="http://schemas.openxmlformats.org/presentationml/2006/main" xmlns:r="http://schemas.openxmlformats.org/officeDocument/2006/relationships" xmlns:a="http://schemas.openxmlformats.org/drawingml/2006/main" autoCompressPictures="0" saveSubsetFonts="1" strictFirstAndLastChars="0">
   <p:sldMasterIdLst>
-    <p:sldMasterId id="2147483648" r:id="rId1"/>
+    <p:sldMasterId id="2147483650" r:id="rId1"/>
   </p:sldMasterIdLst>
   <p:notesMasterIdLst>
     <p:notesMasterId r:id="rId2"/>
   </p:notesMasterIdLst>
   <p:sldIdLst>
-    <p:sldId id="257" r:id="rId3"/>
-    <p:sldId id="258" r:id="rId4"/>
-    <p:sldId id="259" r:id="rId5"/>
-    <p:sldId id="260" r:id="rId6"/>
-    <p:sldId id="261" r:id="rId7"/>
-    <p:sldId id="262" r:id="rId8"/>
-    <p:sldId id="263" r:id="rId9"/>
-    <p:sldId id="264" r:id="rId10"/>
-    <p:sldId id="265" r:id="rId11"/>
-    <p:sldId id="266" r:id="rId12"/>
+    <p:sldId id="278" r:id="rId3"/>
+    <p:sldId id="279" r:id="rId4"/>
+    <p:sldId id="280" r:id="rId5"/>
+    <p:sldId id="281" r:id="rId6"/>
+    <p:sldId id="282" r:id="rId7"/>
+    <p:sldId id="283" r:id="rId8"/>
+    <p:sldId id="284" r:id="rId9"/>
+    <p:sldId id="285" r:id="rId10"/>
+    <p:sldId id="286" r:id="rId11"/>
+    <p:sldId id="287" r:id="rId12"/>
   </p:sldIdLst>
   <p:sldSz cy="5143500" cx="9144000"/>
   <p:notesSz cx="5143500" cy="9144000"/>
@@ -452,7 +452,7 @@
   <p:cSld>
     <p:spTree>
       <p:nvGrpSpPr>
-        <p:cNvPr id="17" name=""/>
+        <p:cNvPr id="35" name=""/>
         <p:cNvGrpSpPr/>
         <p:nvPr/>
       </p:nvGrpSpPr>
@@ -466,7 +466,7 @@
       </p:grpSpPr>
       <p:sp>
         <p:nvSpPr>
-          <p:cNvPr id="1048582" name="Slide Image Placeholder 1"/>
+          <p:cNvPr id="1048746" name="Slide Image Placeholder 1"/>
           <p:cNvSpPr>
             <a:spLocks noChangeAspect="1" noRot="1" noGrp="1"/>
           </p:cNvSpPr>
@@ -478,7 +478,7 @@
       </p:sp>
       <p:sp>
         <p:nvSpPr>
-          <p:cNvPr id="1048583" name="Notes Placeholder 2"/>
+          <p:cNvPr id="1048747" name="Notes Placeholder 2"/>
           <p:cNvSpPr>
             <a:spLocks noGrp="1"/>
           </p:cNvSpPr>
@@ -500,7 +500,7 @@
       </p:sp>
       <p:sp>
         <p:nvSpPr>
-          <p:cNvPr id="1048584" name="Slide Number Placeholder 3"/>
+          <p:cNvPr id="1048748" name="Slide Number Placeholder 3"/>
           <p:cNvSpPr>
             <a:spLocks noGrp="1"/>
           </p:cNvSpPr>
@@ -614,7 +614,7 @@
   <p:cSld>
     <p:spTree>
       <p:nvGrpSpPr>
-        <p:cNvPr id="20" name=""/>
+        <p:cNvPr id="29" name=""/>
         <p:cNvGrpSpPr/>
         <p:nvPr/>
       </p:nvGrpSpPr>
@@ -628,7 +628,7 @@
       </p:grpSpPr>
       <p:sp>
         <p:nvSpPr>
-          <p:cNvPr id="1048603" name="Slide Image Placeholder 1"/>
+          <p:cNvPr id="1048692" name="Slide Image Placeholder 1"/>
           <p:cNvSpPr>
             <a:spLocks noChangeAspect="1" noRot="1" noGrp="1"/>
           </p:cNvSpPr>
@@ -640,7 +640,7 @@
       </p:sp>
       <p:sp>
         <p:nvSpPr>
-          <p:cNvPr id="1048604" name="Notes Placeholder 2"/>
+          <p:cNvPr id="1048693" name="Notes Placeholder 2"/>
           <p:cNvSpPr>
             <a:spLocks noGrp="1"/>
           </p:cNvSpPr>
@@ -662,7 +662,7 @@
       </p:sp>
       <p:sp>
         <p:nvSpPr>
-          <p:cNvPr id="1048605" name="Slide Number Placeholder 3"/>
+          <p:cNvPr id="1048694" name="Slide Number Placeholder 3"/>
           <p:cNvSpPr>
             <a:spLocks noGrp="1"/>
           </p:cNvSpPr>
@@ -709,7 +709,7 @@
       </p:grpSpPr>
       <p:sp>
         <p:nvSpPr>
-          <p:cNvPr id="1048621" name="Slide Image Placeholder 1"/>
+          <p:cNvPr id="1048638" name="Slide Image Placeholder 1"/>
           <p:cNvSpPr>
             <a:spLocks noChangeAspect="1" noRot="1" noGrp="1"/>
           </p:cNvSpPr>
@@ -721,7 +721,7 @@
       </p:sp>
       <p:sp>
         <p:nvSpPr>
-          <p:cNvPr id="1048622" name="Notes Placeholder 2"/>
+          <p:cNvPr id="1048639" name="Notes Placeholder 2"/>
           <p:cNvSpPr>
             <a:spLocks noGrp="1"/>
           </p:cNvSpPr>
@@ -743,7 +743,7 @@
       </p:sp>
       <p:sp>
         <p:nvSpPr>
-          <p:cNvPr id="1048623" name="Slide Number Placeholder 3"/>
+          <p:cNvPr id="1048640" name="Slide Number Placeholder 3"/>
           <p:cNvSpPr>
             <a:spLocks noGrp="1"/>
           </p:cNvSpPr>
@@ -772,6 +772,168 @@
 </file>
 
 <file path=ppt/notesSlides/notesSlide4.xml><?xml version="1.0" encoding="utf-8"?>
+<p:notes xmlns:a="http://schemas.openxmlformats.org/drawingml/2006/main" xmlns:r="http://schemas.openxmlformats.org/officeDocument/2006/relationships" xmlns:p="http://schemas.openxmlformats.org/presentationml/2006/main">
+  <p:cSld>
+    <p:spTree>
+      <p:nvGrpSpPr>
+        <p:cNvPr id="17" name=""/>
+        <p:cNvGrpSpPr/>
+        <p:nvPr/>
+      </p:nvGrpSpPr>
+      <p:grpSpPr>
+        <a:xfrm>
+          <a:off x="0" y="0"/>
+          <a:ext cx="0" cy="0"/>
+          <a:chOff x="0" y="0"/>
+          <a:chExt cx="0" cy="0"/>
+        </a:xfrm>
+      </p:grpSpPr>
+      <p:sp>
+        <p:nvSpPr>
+          <p:cNvPr id="1048593" name="Slide Image Placeholder 1"/>
+          <p:cNvSpPr>
+            <a:spLocks noChangeAspect="1" noRot="1" noGrp="1"/>
+          </p:cNvSpPr>
+          <p:nvPr>
+            <p:ph type="sldImg"/>
+          </p:nvPr>
+        </p:nvSpPr>
+        <p:spPr/>
+      </p:sp>
+      <p:sp>
+        <p:nvSpPr>
+          <p:cNvPr id="1048594" name="Notes Placeholder 2"/>
+          <p:cNvSpPr>
+            <a:spLocks noGrp="1"/>
+          </p:cNvSpPr>
+          <p:nvPr>
+            <p:ph type="body" idx="1"/>
+          </p:nvPr>
+        </p:nvSpPr>
+        <p:spPr/>
+        <p:txBody>
+          <a:bodyPr/>
+          <a:p>
+            <a:r>
+              <a:rPr dirty="0" lang="en-US"/>
+              <a:t>Ada is our primary persona. She is not a fictional construct — she represents the composite of 6 real users we interviewed, all of whom shared the same core pattern: they move alone at night on campus, they have invented manual safety systems, and they are anxious not because emergencies happen daily, but because they have no reliable check-in mechanism. Ada's decision to stay in the library late is directly affected by the anxiety of the walk home — that is the opportunity LifeLine addresses.</a:t>
+            </a:r>
+            <a:endParaRPr dirty="0" lang="en-US"/>
+          </a:p>
+        </p:txBody>
+      </p:sp>
+      <p:sp>
+        <p:nvSpPr>
+          <p:cNvPr id="1048595" name="Slide Number Placeholder 3"/>
+          <p:cNvSpPr>
+            <a:spLocks noGrp="1"/>
+          </p:cNvSpPr>
+          <p:nvPr>
+            <p:ph type="sldNum" sz="quarter" idx="10"/>
+          </p:nvPr>
+        </p:nvSpPr>
+        <p:spPr/>
+        <p:txBody>
+          <a:bodyPr/>
+          <a:p>
+            <a:fld id="{F7021451-1387-4CA6-816F-3879F97B5CBC}" type="slidenum">
+              <a:rPr lang="en-US"/>
+              <a:t>4</a:t>
+            </a:fld>
+            <a:endParaRPr lang="en-US"/>
+          </a:p>
+        </p:txBody>
+      </p:sp>
+    </p:spTree>
+  </p:cSld>
+  <p:clrMapOvr>
+    <a:masterClrMapping/>
+  </p:clrMapOvr>
+</p:notes>
+</file>
+
+<file path=ppt/notesSlides/notesSlide5.xml><?xml version="1.0" encoding="utf-8"?>
+<p:notes xmlns:a="http://schemas.openxmlformats.org/drawingml/2006/main" xmlns:r="http://schemas.openxmlformats.org/officeDocument/2006/relationships" xmlns:p="http://schemas.openxmlformats.org/presentationml/2006/main">
+  <p:cSld>
+    <p:spTree>
+      <p:nvGrpSpPr>
+        <p:cNvPr id="20" name=""/>
+        <p:cNvGrpSpPr/>
+        <p:nvPr/>
+      </p:nvGrpSpPr>
+      <p:grpSpPr>
+        <a:xfrm>
+          <a:off x="0" y="0"/>
+          <a:ext cx="0" cy="0"/>
+          <a:chOff x="0" y="0"/>
+          <a:chExt cx="0" cy="0"/>
+        </a:xfrm>
+      </p:grpSpPr>
+      <p:sp>
+        <p:nvSpPr>
+          <p:cNvPr id="1048620" name="Slide Image Placeholder 1"/>
+          <p:cNvSpPr>
+            <a:spLocks noChangeAspect="1" noRot="1" noGrp="1"/>
+          </p:cNvSpPr>
+          <p:nvPr>
+            <p:ph type="sldImg"/>
+          </p:nvPr>
+        </p:nvSpPr>
+        <p:spPr/>
+      </p:sp>
+      <p:sp>
+        <p:nvSpPr>
+          <p:cNvPr id="1048621" name="Notes Placeholder 2"/>
+          <p:cNvSpPr>
+            <a:spLocks noGrp="1"/>
+          </p:cNvSpPr>
+          <p:nvPr>
+            <p:ph type="body" idx="1"/>
+          </p:nvPr>
+        </p:nvSpPr>
+        <p:spPr/>
+        <p:txBody>
+          <a:bodyPr/>
+          <a:p>
+            <a:r>
+              <a:rPr dirty="0" lang="en-US"/>
+              <a:t>LifeLine delivers exactly two core flows. Safe Arrival is the daily-habit flow — it handles the routine 'let mum know I'm home' automatically. SOS is the safety net — it rarely fires, but when it does it must be flawless: 3-second deliberate hold to prevent accidental triggers, a 2:45 cancellation window, and automatic escalation if the user cannot respond. Demo OTP code for today is 8484.</a:t>
+            </a:r>
+            <a:endParaRPr dirty="0" lang="en-US"/>
+          </a:p>
+        </p:txBody>
+      </p:sp>
+      <p:sp>
+        <p:nvSpPr>
+          <p:cNvPr id="1048622" name="Slide Number Placeholder 3"/>
+          <p:cNvSpPr>
+            <a:spLocks noGrp="1"/>
+          </p:cNvSpPr>
+          <p:nvPr>
+            <p:ph type="sldNum" sz="quarter" idx="10"/>
+          </p:nvPr>
+        </p:nvSpPr>
+        <p:spPr/>
+        <p:txBody>
+          <a:bodyPr/>
+          <a:p>
+            <a:fld id="{F7021451-1387-4CA6-816F-3879F97B5CBC}" type="slidenum">
+              <a:rPr lang="en-US"/>
+              <a:t>5</a:t>
+            </a:fld>
+            <a:endParaRPr lang="en-US"/>
+          </a:p>
+        </p:txBody>
+      </p:sp>
+    </p:spTree>
+  </p:cSld>
+  <p:clrMapOvr>
+    <a:masterClrMapping/>
+  </p:clrMapOvr>
+</p:notes>
+</file>
+
+<file path=ppt/notesSlides/notesSlide6.xml><?xml version="1.0" encoding="utf-8"?>
 <p:notes xmlns:a="http://schemas.openxmlformats.org/drawingml/2006/main" xmlns:r="http://schemas.openxmlformats.org/officeDocument/2006/relationships" xmlns:p="http://schemas.openxmlformats.org/presentationml/2006/main">
   <p:cSld>
     <p:spTree>
@@ -790,7 +952,7 @@
       </p:grpSpPr>
       <p:sp>
         <p:nvSpPr>
-          <p:cNvPr id="1048641" name="Slide Image Placeholder 1"/>
+          <p:cNvPr id="1048671" name="Slide Image Placeholder 1"/>
           <p:cNvSpPr>
             <a:spLocks noChangeAspect="1" noRot="1" noGrp="1"/>
           </p:cNvSpPr>
@@ -802,7 +964,7 @@
       </p:sp>
       <p:sp>
         <p:nvSpPr>
-          <p:cNvPr id="1048642" name="Notes Placeholder 2"/>
+          <p:cNvPr id="1048672" name="Notes Placeholder 2"/>
           <p:cNvSpPr>
             <a:spLocks noGrp="1"/>
           </p:cNvSpPr>
@@ -816,7 +978,7 @@
           <a:p>
             <a:r>
               <a:rPr dirty="0" lang="en-US"/>
-              <a:t>Ada is our primary persona. She is not a fictional construct — she represents the composite of 6 real users we interviewed, all of whom shared the same core pattern: they move alone at night on campus, they have invented manual safety systems, and they are anxious not because emergencies happen daily, but because they have no reliable check-in mechanism. Ada's decision to stay in the library late is directly affected by the anxiety of the walk home — that is the opportunity LifeLine addresses.</a:t>
+              <a:t>Open the app on your phone or laptop: tsa-phoenix-safetytech-39.github.io/lifeline/lifelineapp. Walk through: (1) OTP screen — enter 8484. (2) Add a trusted contact. (3) Start a Safe Arrival trip — pick destination, set 30-min ETA, share with contacts. (4) Show the live map and countdown. (5) Tap 'I've arrived safely' — watch the confetti. (6) Return to home screen, hold the SOS button for 3 seconds — show the escalation timer and cancel. If network is slow: the app is a single file with Leaflet embedded — it works offline. OSM tiles are the only network dependency and degrade gracefully to grey.</a:t>
             </a:r>
             <a:endParaRPr dirty="0" lang="en-US"/>
           </a:p>
@@ -824,7 +986,7 @@
       </p:sp>
       <p:sp>
         <p:nvSpPr>
-          <p:cNvPr id="1048643" name="Slide Number Placeholder 3"/>
+          <p:cNvPr id="1048673" name="Slide Number Placeholder 3"/>
           <p:cNvSpPr>
             <a:spLocks noGrp="1"/>
           </p:cNvSpPr>
@@ -838,7 +1000,7 @@
           <a:p>
             <a:fld id="{F7021451-1387-4CA6-816F-3879F97B5CBC}" type="slidenum">
               <a:rPr lang="en-US"/>
-              <a:t>4</a:t>
+              <a:t>6</a:t>
             </a:fld>
             <a:endParaRPr lang="en-US"/>
           </a:p>
@@ -852,88 +1014,7 @@
 </p:notes>
 </file>
 
-<file path=ppt/notesSlides/notesSlide5.xml><?xml version="1.0" encoding="utf-8"?>
-<p:notes xmlns:a="http://schemas.openxmlformats.org/drawingml/2006/main" xmlns:r="http://schemas.openxmlformats.org/officeDocument/2006/relationships" xmlns:p="http://schemas.openxmlformats.org/presentationml/2006/main">
-  <p:cSld>
-    <p:spTree>
-      <p:nvGrpSpPr>
-        <p:cNvPr id="29" name=""/>
-        <p:cNvGrpSpPr/>
-        <p:nvPr/>
-      </p:nvGrpSpPr>
-      <p:grpSpPr>
-        <a:xfrm>
-          <a:off x="0" y="0"/>
-          <a:ext cx="0" cy="0"/>
-          <a:chOff x="0" y="0"/>
-          <a:chExt cx="0" cy="0"/>
-        </a:xfrm>
-      </p:grpSpPr>
-      <p:sp>
-        <p:nvSpPr>
-          <p:cNvPr id="1048668" name="Slide Image Placeholder 1"/>
-          <p:cNvSpPr>
-            <a:spLocks noChangeAspect="1" noRot="1" noGrp="1"/>
-          </p:cNvSpPr>
-          <p:nvPr>
-            <p:ph type="sldImg"/>
-          </p:nvPr>
-        </p:nvSpPr>
-        <p:spPr/>
-      </p:sp>
-      <p:sp>
-        <p:nvSpPr>
-          <p:cNvPr id="1048669" name="Notes Placeholder 2"/>
-          <p:cNvSpPr>
-            <a:spLocks noGrp="1"/>
-          </p:cNvSpPr>
-          <p:nvPr>
-            <p:ph type="body" idx="1"/>
-          </p:nvPr>
-        </p:nvSpPr>
-        <p:spPr/>
-        <p:txBody>
-          <a:bodyPr/>
-          <a:p>
-            <a:r>
-              <a:rPr dirty="0" lang="en-US"/>
-              <a:t>LifeLine delivers exactly two core flows. Safe Arrival is the daily-habit flow — it handles the routine 'let mum know I'm home' automatically. SOS is the safety net — it rarely fires, but when it does it must be flawless: 3-second deliberate hold to prevent accidental triggers, a 2:45 cancellation window, and automatic escalation if the user cannot respond. Demo OTP code for today is 8484.</a:t>
-            </a:r>
-            <a:endParaRPr dirty="0" lang="en-US"/>
-          </a:p>
-        </p:txBody>
-      </p:sp>
-      <p:sp>
-        <p:nvSpPr>
-          <p:cNvPr id="1048670" name="Slide Number Placeholder 3"/>
-          <p:cNvSpPr>
-            <a:spLocks noGrp="1"/>
-          </p:cNvSpPr>
-          <p:nvPr>
-            <p:ph type="sldNum" sz="quarter" idx="10"/>
-          </p:nvPr>
-        </p:nvSpPr>
-        <p:spPr/>
-        <p:txBody>
-          <a:bodyPr/>
-          <a:p>
-            <a:fld id="{F7021451-1387-4CA6-816F-3879F97B5CBC}" type="slidenum">
-              <a:rPr lang="en-US"/>
-              <a:t>5</a:t>
-            </a:fld>
-            <a:endParaRPr lang="en-US"/>
-          </a:p>
-        </p:txBody>
-      </p:sp>
-    </p:spTree>
-  </p:cSld>
-  <p:clrMapOvr>
-    <a:masterClrMapping/>
-  </p:clrMapOvr>
-</p:notes>
-</file>
-
-<file path=ppt/notesSlides/notesSlide6.xml><?xml version="1.0" encoding="utf-8"?>
+<file path=ppt/notesSlides/notesSlide7.xml><?xml version="1.0" encoding="utf-8"?>
 <p:notes xmlns:a="http://schemas.openxmlformats.org/drawingml/2006/main" xmlns:r="http://schemas.openxmlformats.org/officeDocument/2006/relationships" xmlns:p="http://schemas.openxmlformats.org/presentationml/2006/main">
   <p:cSld>
     <p:spTree>
@@ -952,7 +1033,7 @@
       </p:grpSpPr>
       <p:sp>
         <p:nvSpPr>
-          <p:cNvPr id="1048701" name="Slide Image Placeholder 1"/>
+          <p:cNvPr id="1048737" name="Slide Image Placeholder 1"/>
           <p:cNvSpPr>
             <a:spLocks noChangeAspect="1" noRot="1" noGrp="1"/>
           </p:cNvSpPr>
@@ -964,7 +1045,7 @@
       </p:sp>
       <p:sp>
         <p:nvSpPr>
-          <p:cNvPr id="1048702" name="Notes Placeholder 2"/>
+          <p:cNvPr id="1048738" name="Notes Placeholder 2"/>
           <p:cNvSpPr>
             <a:spLocks noGrp="1"/>
           </p:cNvSpPr>
@@ -978,7 +1059,7 @@
           <a:p>
             <a:r>
               <a:rPr dirty="0" lang="en-US"/>
-              <a:t>Open the app on your phone or laptop: tsa-phoenix-safetytech-39.github.io/lifeline/lifelineapp. Walk through: (1) OTP screen — enter 8484. (2) Add a trusted contact. (3) Start a Safe Arrival trip — pick destination, set 30-min ETA, share with contacts. (4) Show the live map and countdown. (5) Tap 'I've arrived safely' — watch the confetti. (6) Return to home screen, hold the SOS button for 3 seconds — show the escalation timer and cancel. If network is slow: the app is a single file with Leaflet embedded — it works offline. OSM tiles are the only network dependency and degrade gracefully to grey.</a:t>
+              <a:t>The defining technical decision was to embed Leaflet (the map library) directly into the HTML file rather than loading it from a CDN. This was not laziness — it was an explicit network-resilience design choice after discovering that CDNs are frequently blocked or throttled on MTN 3G in Nigeria. The result: the app loads from a single 210KB file with no external dependencies at load time. Known limitations are honest — no backend persistence in MVP (planned for V2 via Supabase), and tiles still require network (they degrade gracefully).</a:t>
             </a:r>
             <a:endParaRPr dirty="0" lang="en-US"/>
           </a:p>
@@ -986,88 +1067,7 @@
       </p:sp>
       <p:sp>
         <p:nvSpPr>
-          <p:cNvPr id="1048703" name="Slide Number Placeholder 3"/>
-          <p:cNvSpPr>
-            <a:spLocks noGrp="1"/>
-          </p:cNvSpPr>
-          <p:nvPr>
-            <p:ph type="sldNum" sz="quarter" idx="10"/>
-          </p:nvPr>
-        </p:nvSpPr>
-        <p:spPr/>
-        <p:txBody>
-          <a:bodyPr/>
-          <a:p>
-            <a:fld id="{F7021451-1387-4CA6-816F-3879F97B5CBC}" type="slidenum">
-              <a:rPr lang="en-US"/>
-              <a:t>6</a:t>
-            </a:fld>
-            <a:endParaRPr lang="en-US"/>
-          </a:p>
-        </p:txBody>
-      </p:sp>
-    </p:spTree>
-  </p:cSld>
-  <p:clrMapOvr>
-    <a:masterClrMapping/>
-  </p:clrMapOvr>
-</p:notes>
-</file>
-
-<file path=ppt/notesSlides/notesSlide7.xml><?xml version="1.0" encoding="utf-8"?>
-<p:notes xmlns:a="http://schemas.openxmlformats.org/drawingml/2006/main" xmlns:r="http://schemas.openxmlformats.org/officeDocument/2006/relationships" xmlns:p="http://schemas.openxmlformats.org/presentationml/2006/main">
-  <p:cSld>
-    <p:spTree>
-      <p:nvGrpSpPr>
-        <p:cNvPr id="35" name=""/>
-        <p:cNvGrpSpPr/>
-        <p:nvPr/>
-      </p:nvGrpSpPr>
-      <p:grpSpPr>
-        <a:xfrm>
-          <a:off x="0" y="0"/>
-          <a:ext cx="0" cy="0"/>
-          <a:chOff x="0" y="0"/>
-          <a:chExt cx="0" cy="0"/>
-        </a:xfrm>
-      </p:grpSpPr>
-      <p:sp>
-        <p:nvSpPr>
-          <p:cNvPr id="1048746" name="Slide Image Placeholder 1"/>
-          <p:cNvSpPr>
-            <a:spLocks noChangeAspect="1" noRot="1" noGrp="1"/>
-          </p:cNvSpPr>
-          <p:nvPr>
-            <p:ph type="sldImg"/>
-          </p:nvPr>
-        </p:nvSpPr>
-        <p:spPr/>
-      </p:sp>
-      <p:sp>
-        <p:nvSpPr>
-          <p:cNvPr id="1048747" name="Notes Placeholder 2"/>
-          <p:cNvSpPr>
-            <a:spLocks noGrp="1"/>
-          </p:cNvSpPr>
-          <p:nvPr>
-            <p:ph type="body" idx="1"/>
-          </p:nvPr>
-        </p:nvSpPr>
-        <p:spPr/>
-        <p:txBody>
-          <a:bodyPr/>
-          <a:p>
-            <a:r>
-              <a:rPr dirty="0" lang="en-US"/>
-              <a:t>The defining technical decision was to embed Leaflet (the map library) directly into the HTML file rather than loading it from a CDN. This was not laziness — it was an explicit network-resilience design choice after discovering that CDNs are frequently blocked or throttled on MTN 3G in Nigeria. The result: the app loads from a single 210KB file with no external dependencies at load time. Known limitations are honest — no backend persistence in MVP (planned for V2 via Supabase), and tiles still require network (they degrade gracefully).</a:t>
-            </a:r>
-            <a:endParaRPr dirty="0" lang="en-US"/>
-          </a:p>
-        </p:txBody>
-      </p:sp>
-      <p:sp>
-        <p:nvSpPr>
-          <p:cNvPr id="1048748" name="Slide Number Placeholder 3"/>
+          <p:cNvPr id="1048739" name="Slide Number Placeholder 3"/>
           <p:cNvSpPr>
             <a:spLocks noGrp="1"/>
           </p:cNvSpPr>
@@ -1308,7 +1308,7 @@
   </p:cSld>
   <p:clrMap accent1="accent1" accent2="accent2" accent3="accent3" accent4="accent4" accent5="accent5" accent6="accent6" bg1="lt1" bg2="lt2" tx1="dk1" tx2="dk2" hlink="hlink" folHlink="folHlink"/>
   <p:sldLayoutIdLst>
-    <p:sldLayoutId id="2147483649" r:id="rId1"/>
+    <p:sldLayoutId id="2147483651" r:id="rId1"/>
   </p:sldLayoutIdLst>
   <p:hf dt="0" ftr="0" hdr="0" sldNum="0"/>
   <p:txStyles>
@@ -1576,7 +1576,7 @@
     </p:bg>
     <p:spTree>
       <p:nvGrpSpPr>
-        <p:cNvPr id="15" name="Shape 50"/>
+        <p:cNvPr id="33" name="Shape 50"/>
         <p:cNvGrpSpPr/>
         <p:nvPr/>
       </p:nvGrpSpPr>
@@ -1590,7 +1590,7 @@
       </p:grpSpPr>
       <p:pic>
         <p:nvPicPr>
-          <p:cNvPr id="2097152" name="Google Shape;51;p1" descr="/mnt/user-data/uploads/IMG-20260517-WA0000-removebg-preview.png"/>
+          <p:cNvPr id="2097158" name="Google Shape;51;p1" descr="/mnt/user-data/uploads/IMG-20260517-WA0000-removebg-preview.png"/>
           <p:cNvPicPr preferRelativeResize="0">
             <a:picLocks/>
           </p:cNvPicPr>
@@ -1619,7 +1619,7 @@
       </p:pic>
       <p:sp>
         <p:nvSpPr>
-          <p:cNvPr id="1048576" name="Google Shape;52;p1"/>
+          <p:cNvPr id="1048740" name="Google Shape;52;p1"/>
           <p:cNvSpPr/>
           <p:nvPr/>
         </p:nvSpPr>
@@ -1691,7 +1691,7 @@
       </p:sp>
       <p:sp>
         <p:nvSpPr>
-          <p:cNvPr id="1048577" name="Google Shape;53;p1"/>
+          <p:cNvPr id="1048741" name="Google Shape;53;p1"/>
           <p:cNvSpPr/>
           <p:nvPr/>
         </p:nvSpPr>
@@ -1751,7 +1751,7 @@
       </p:sp>
       <p:sp>
         <p:nvSpPr>
-          <p:cNvPr id="1048578" name="Google Shape;54;p1"/>
+          <p:cNvPr id="1048742" name="Google Shape;54;p1"/>
           <p:cNvSpPr/>
           <p:nvPr/>
         </p:nvSpPr>
@@ -1811,7 +1811,7 @@
       </p:sp>
       <p:sp>
         <p:nvSpPr>
-          <p:cNvPr id="1048579" name="Google Shape;55;p1"/>
+          <p:cNvPr id="1048743" name="Google Shape;55;p1"/>
           <p:cNvSpPr/>
           <p:nvPr/>
         </p:nvSpPr>
@@ -1856,7 +1856,7 @@
       </p:sp>
       <p:sp>
         <p:nvSpPr>
-          <p:cNvPr id="1048580" name="Google Shape;56;p1"/>
+          <p:cNvPr id="1048744" name="Google Shape;56;p1"/>
           <p:cNvSpPr/>
           <p:nvPr/>
         </p:nvSpPr>
@@ -1916,7 +1916,7 @@
       </p:sp>
       <p:sp>
         <p:nvSpPr>
-          <p:cNvPr id="1048581" name="Google Shape;57;p1"/>
+          <p:cNvPr id="1048745" name="Google Shape;57;p1"/>
           <p:cNvSpPr/>
           <p:nvPr/>
         </p:nvSpPr>
@@ -3269,7 +3269,7 @@
     </p:bg>
     <p:spTree>
       <p:nvGrpSpPr>
-        <p:cNvPr id="18" name=""/>
+        <p:cNvPr id="27" name=""/>
         <p:cNvGrpSpPr/>
         <p:nvPr/>
       </p:nvGrpSpPr>
@@ -3283,7 +3283,7 @@
       </p:grpSpPr>
       <p:pic>
         <p:nvPicPr>
-          <p:cNvPr id="2097153" name="Image 0" descr="/mnt/user-data/uploads/IMG-20260517-WA0000.jpg"/>
+          <p:cNvPr id="2097156" name="Image 0" descr="/mnt/user-data/uploads/IMG-20260517-WA0000.jpg"/>
           <p:cNvPicPr>
             <a:picLocks noChangeAspect="1"/>
           </p:cNvPicPr>
@@ -3305,7 +3305,7 @@
       </p:pic>
       <p:sp>
         <p:nvSpPr>
-          <p:cNvPr id="1048585" name="Text 0"/>
+          <p:cNvPr id="1048674" name="Text 0"/>
           <p:cNvSpPr/>
           <p:nvPr/>
         </p:nvSpPr>
@@ -3340,7 +3340,7 @@
       </p:sp>
       <p:sp>
         <p:nvSpPr>
-          <p:cNvPr id="1048586" name="Text 1"/>
+          <p:cNvPr id="1048675" name="Text 1"/>
           <p:cNvSpPr/>
           <p:nvPr/>
         </p:nvSpPr>
@@ -3375,7 +3375,7 @@
       </p:sp>
       <p:sp>
         <p:nvSpPr>
-          <p:cNvPr id="1048587" name="Shape 2"/>
+          <p:cNvPr id="1048676" name="Shape 2"/>
           <p:cNvSpPr/>
           <p:nvPr/>
         </p:nvSpPr>
@@ -3398,7 +3398,7 @@
       </p:sp>
       <p:sp>
         <p:nvSpPr>
-          <p:cNvPr id="1048588" name="Shape 3"/>
+          <p:cNvPr id="1048677" name="Shape 3"/>
           <p:cNvSpPr/>
           <p:nvPr/>
         </p:nvSpPr>
@@ -3421,7 +3421,7 @@
       </p:sp>
       <p:sp>
         <p:nvSpPr>
-          <p:cNvPr id="1048589" name="Text 4"/>
+          <p:cNvPr id="1048678" name="Text 4"/>
           <p:cNvSpPr/>
           <p:nvPr/>
         </p:nvSpPr>
@@ -3456,7 +3456,7 @@
       </p:sp>
       <p:sp>
         <p:nvSpPr>
-          <p:cNvPr id="1048590" name="Text 5"/>
+          <p:cNvPr id="1048679" name="Text 5"/>
           <p:cNvSpPr/>
           <p:nvPr/>
         </p:nvSpPr>
@@ -3491,7 +3491,7 @@
       </p:sp>
       <p:sp>
         <p:nvSpPr>
-          <p:cNvPr id="1048591" name="Text 6"/>
+          <p:cNvPr id="1048680" name="Text 6"/>
           <p:cNvSpPr/>
           <p:nvPr/>
         </p:nvSpPr>
@@ -3526,7 +3526,7 @@
       </p:sp>
       <p:sp>
         <p:nvSpPr>
-          <p:cNvPr id="1048592" name="Text 7"/>
+          <p:cNvPr id="1048681" name="Text 7"/>
           <p:cNvSpPr/>
           <p:nvPr/>
         </p:nvSpPr>
@@ -3561,7 +3561,7 @@
       </p:sp>
       <p:sp>
         <p:nvSpPr>
-          <p:cNvPr id="1048593" name="Shape 8"/>
+          <p:cNvPr id="1048682" name="Shape 8"/>
           <p:cNvSpPr/>
           <p:nvPr/>
         </p:nvSpPr>
@@ -3584,7 +3584,7 @@
       </p:sp>
       <p:sp>
         <p:nvSpPr>
-          <p:cNvPr id="1048594" name="Text 9"/>
+          <p:cNvPr id="1048683" name="Text 9"/>
           <p:cNvSpPr/>
           <p:nvPr/>
         </p:nvSpPr>
@@ -3619,7 +3619,7 @@
       </p:sp>
       <p:sp>
         <p:nvSpPr>
-          <p:cNvPr id="1048595" name="Text 10"/>
+          <p:cNvPr id="1048684" name="Text 10"/>
           <p:cNvSpPr/>
           <p:nvPr/>
         </p:nvSpPr>
@@ -3671,7 +3671,7 @@
       </p:sp>
       <p:sp>
         <p:nvSpPr>
-          <p:cNvPr id="1048596" name="Shape 11"/>
+          <p:cNvPr id="1048685" name="Shape 11"/>
           <p:cNvSpPr/>
           <p:nvPr/>
         </p:nvSpPr>
@@ -3694,7 +3694,7 @@
       </p:sp>
       <p:sp>
         <p:nvSpPr>
-          <p:cNvPr id="1048597" name="Text 12"/>
+          <p:cNvPr id="1048686" name="Text 12"/>
           <p:cNvSpPr/>
           <p:nvPr/>
         </p:nvSpPr>
@@ -3729,7 +3729,7 @@
       </p:sp>
       <p:sp>
         <p:nvSpPr>
-          <p:cNvPr id="1048598" name="Text 13"/>
+          <p:cNvPr id="1048687" name="Text 13"/>
           <p:cNvSpPr/>
           <p:nvPr/>
         </p:nvSpPr>
@@ -3781,7 +3781,7 @@
       </p:sp>
       <p:sp>
         <p:nvSpPr>
-          <p:cNvPr id="1048599" name="Shape 14"/>
+          <p:cNvPr id="1048688" name="Shape 14"/>
           <p:cNvSpPr/>
           <p:nvPr/>
         </p:nvSpPr>
@@ -3804,7 +3804,7 @@
       </p:sp>
       <p:sp>
         <p:nvSpPr>
-          <p:cNvPr id="1048600" name="Text 15"/>
+          <p:cNvPr id="1048689" name="Text 15"/>
           <p:cNvSpPr/>
           <p:nvPr/>
         </p:nvSpPr>
@@ -3839,7 +3839,7 @@
       </p:sp>
       <p:sp>
         <p:nvSpPr>
-          <p:cNvPr id="1048601" name="Text 16"/>
+          <p:cNvPr id="1048690" name="Text 16"/>
           <p:cNvSpPr/>
           <p:nvPr/>
         </p:nvSpPr>
@@ -3891,7 +3891,7 @@
       </p:sp>
       <p:sp>
         <p:nvSpPr>
-          <p:cNvPr id="1048602" name="Text 17"/>
+          <p:cNvPr id="1048691" name="Text 17"/>
           <p:cNvSpPr/>
           <p:nvPr/>
         </p:nvSpPr>
@@ -3980,7 +3980,7 @@
       </p:pic>
       <p:sp>
         <p:nvSpPr>
-          <p:cNvPr id="1048606" name="Text 0"/>
+          <p:cNvPr id="1048623" name="Text 0"/>
           <p:cNvSpPr/>
           <p:nvPr/>
         </p:nvSpPr>
@@ -4015,7 +4015,7 @@
       </p:sp>
       <p:sp>
         <p:nvSpPr>
-          <p:cNvPr id="1048607" name="Text 1"/>
+          <p:cNvPr id="1048624" name="Text 1"/>
           <p:cNvSpPr/>
           <p:nvPr/>
         </p:nvSpPr>
@@ -4050,7 +4050,7 @@
       </p:sp>
       <p:sp>
         <p:nvSpPr>
-          <p:cNvPr id="1048608" name="Shape 2"/>
+          <p:cNvPr id="1048625" name="Shape 2"/>
           <p:cNvSpPr/>
           <p:nvPr/>
         </p:nvSpPr>
@@ -4073,7 +4073,7 @@
       </p:sp>
       <p:sp>
         <p:nvSpPr>
-          <p:cNvPr id="1048609" name="Text 3"/>
+          <p:cNvPr id="1048626" name="Text 3"/>
           <p:cNvSpPr/>
           <p:nvPr/>
         </p:nvSpPr>
@@ -4108,7 +4108,7 @@
       </p:sp>
       <p:sp>
         <p:nvSpPr>
-          <p:cNvPr id="1048610" name="Text 4"/>
+          <p:cNvPr id="1048627" name="Text 4"/>
           <p:cNvSpPr/>
           <p:nvPr/>
         </p:nvSpPr>
@@ -4143,7 +4143,7 @@
       </p:sp>
       <p:sp>
         <p:nvSpPr>
-          <p:cNvPr id="1048611" name="Text 5"/>
+          <p:cNvPr id="1048628" name="Text 5"/>
           <p:cNvSpPr/>
           <p:nvPr/>
         </p:nvSpPr>
@@ -4212,7 +4212,7 @@
       </p:sp>
       <p:sp>
         <p:nvSpPr>
-          <p:cNvPr id="1048612" name="Text 6"/>
+          <p:cNvPr id="1048629" name="Text 6"/>
           <p:cNvSpPr/>
           <p:nvPr/>
         </p:nvSpPr>
@@ -4264,7 +4264,7 @@
       </p:sp>
       <p:sp>
         <p:nvSpPr>
-          <p:cNvPr id="1048613" name="Shape 7"/>
+          <p:cNvPr id="1048630" name="Shape 7"/>
           <p:cNvSpPr/>
           <p:nvPr/>
         </p:nvSpPr>
@@ -4287,7 +4287,7 @@
       </p:sp>
       <p:sp>
         <p:nvSpPr>
-          <p:cNvPr id="1048614" name="Text 8"/>
+          <p:cNvPr id="1048631" name="Text 8"/>
           <p:cNvSpPr/>
           <p:nvPr/>
         </p:nvSpPr>
@@ -4322,7 +4322,7 @@
       </p:sp>
       <p:sp>
         <p:nvSpPr>
-          <p:cNvPr id="1048615" name="Text 9"/>
+          <p:cNvPr id="1048632" name="Text 9"/>
           <p:cNvSpPr/>
           <p:nvPr/>
         </p:nvSpPr>
@@ -4374,7 +4374,7 @@
       </p:sp>
       <p:sp>
         <p:nvSpPr>
-          <p:cNvPr id="1048616" name="Shape 10"/>
+          <p:cNvPr id="1048633" name="Shape 10"/>
           <p:cNvSpPr/>
           <p:nvPr/>
         </p:nvSpPr>
@@ -4397,7 +4397,7 @@
       </p:sp>
       <p:sp>
         <p:nvSpPr>
-          <p:cNvPr id="1048617" name="Text 11"/>
+          <p:cNvPr id="1048634" name="Text 11"/>
           <p:cNvSpPr/>
           <p:nvPr/>
         </p:nvSpPr>
@@ -4432,7 +4432,7 @@
       </p:sp>
       <p:sp>
         <p:nvSpPr>
-          <p:cNvPr id="1048618" name="Text 12"/>
+          <p:cNvPr id="1048635" name="Text 12"/>
           <p:cNvSpPr/>
           <p:nvPr/>
         </p:nvSpPr>
@@ -4467,7 +4467,7 @@
       </p:sp>
       <p:sp>
         <p:nvSpPr>
-          <p:cNvPr id="1048619" name="Text 13"/>
+          <p:cNvPr id="1048636" name="Text 13"/>
           <p:cNvSpPr/>
           <p:nvPr/>
         </p:nvSpPr>
@@ -4536,7 +4536,7 @@
       </p:sp>
       <p:sp>
         <p:nvSpPr>
-          <p:cNvPr id="1048620" name="Text 14"/>
+          <p:cNvPr id="1048637" name="Text 14"/>
           <p:cNvSpPr/>
           <p:nvPr/>
         </p:nvSpPr>
@@ -4597,6 +4597,1573 @@
 <file path=ppt/slides/slide4.xml><?xml version="1.0" encoding="utf-8"?>
 <p:sld xmlns:a="http://schemas.openxmlformats.org/drawingml/2006/main" xmlns:r="http://schemas.openxmlformats.org/officeDocument/2006/relationships" xmlns:p="http://schemas.openxmlformats.org/presentationml/2006/main">
   <p:cSld name="Slide 4">
+    <p:bg>
+      <p:bgPr>
+        <a:solidFill>
+          <a:srgbClr val="F8FAFC"/>
+        </a:solidFill>
+      </p:bgPr>
+    </p:bg>
+    <p:spTree>
+      <p:nvGrpSpPr>
+        <p:cNvPr id="15" name=""/>
+        <p:cNvGrpSpPr/>
+        <p:nvPr/>
+      </p:nvGrpSpPr>
+      <p:grpSpPr>
+        <a:xfrm>
+          <a:off x="0" y="0"/>
+          <a:ext cx="0" cy="0"/>
+          <a:chOff x="0" y="0"/>
+          <a:chExt cx="0" cy="0"/>
+        </a:xfrm>
+      </p:grpSpPr>
+      <p:pic>
+        <p:nvPicPr>
+          <p:cNvPr id="2097152" name="Image 0" descr="/mnt/user-data/uploads/IMG-20260517-WA0000.jpg"/>
+          <p:cNvPicPr>
+            <a:picLocks noChangeAspect="1"/>
+          </p:cNvPicPr>
+          <p:nvPr/>
+        </p:nvPicPr>
+        <p:blipFill>
+          <a:blip xmlns:r="http://schemas.openxmlformats.org/officeDocument/2006/relationships" r:embed="rId1"/>
+          <a:stretch>
+            <a:fillRect/>
+          </a:stretch>
+        </p:blipFill>
+        <p:spPr>
+          <a:xfrm>
+            <a:off x="7955280" y="91440"/>
+            <a:ext cx="1005840" cy="1005840"/>
+          </a:xfrm>
+          <a:prstGeom prst="rect"/>
+        </p:spPr>
+      </p:pic>
+      <p:sp>
+        <p:nvSpPr>
+          <p:cNvPr id="1048576" name="Text 0"/>
+          <p:cNvSpPr/>
+          <p:nvPr/>
+        </p:nvSpPr>
+        <p:spPr>
+          <a:xfrm>
+            <a:off x="411480" y="201168"/>
+            <a:ext cx="2743200" cy="228600"/>
+          </a:xfrm>
+          <a:prstGeom prst="rect"/>
+          <a:noFill/>
+        </p:spPr>
+        <p:txBody>
+          <a:bodyPr anchor="ctr" bIns="0" lIns="0" rIns="0" rtlCol="0" tIns="0" wrap="square"/>
+          <a:p>
+            <a:pPr indent="0" marL="0">
+              <a:buNone/>
+            </a:pPr>
+            <a:r>
+              <a:rPr dirty="0" sz="900" kern="0" lang="en-US" spc="400">
+                <a:solidFill>
+                  <a:srgbClr val="94A3B8"/>
+                </a:solidFill>
+                <a:latin typeface="Calibri" pitchFamily="34" charset="0"/>
+                <a:ea typeface="Calibri" pitchFamily="34" charset="-122"/>
+                <a:cs typeface="Calibri" pitchFamily="34" charset="-120"/>
+              </a:rPr>
+              <a:t>THE USER</a:t>
+            </a:r>
+            <a:endParaRPr dirty="0" sz="900" lang="en-US"/>
+          </a:p>
+        </p:txBody>
+      </p:sp>
+      <p:sp>
+        <p:nvSpPr>
+          <p:cNvPr id="1048577" name="Shape 1"/>
+          <p:cNvSpPr/>
+          <p:nvPr/>
+        </p:nvSpPr>
+        <p:spPr>
+          <a:xfrm>
+            <a:off x="411480" y="530352"/>
+            <a:ext cx="8321040" cy="4297680"/>
+          </a:xfrm>
+          <a:prstGeom prst="rect"/>
+          <a:solidFill>
+            <a:srgbClr val="0A1E3F"/>
+          </a:solidFill>
+          <a:ln w="12700">
+            <a:solidFill>
+              <a:srgbClr val="0A1E3F"/>
+            </a:solidFill>
+            <a:prstDash val="solid"/>
+          </a:ln>
+        </p:spPr>
+      </p:sp>
+      <p:sp>
+        <p:nvSpPr>
+          <p:cNvPr id="1048578" name="Text 2"/>
+          <p:cNvSpPr/>
+          <p:nvPr/>
+        </p:nvSpPr>
+        <p:spPr>
+          <a:xfrm>
+            <a:off x="594360" y="658368"/>
+            <a:ext cx="4572000" cy="594360"/>
+          </a:xfrm>
+          <a:prstGeom prst="rect"/>
+          <a:noFill/>
+        </p:spPr>
+        <p:txBody>
+          <a:bodyPr anchor="ctr" bIns="0" lIns="0" rIns="0" rtlCol="0" tIns="0" wrap="square"/>
+          <a:p>
+            <a:pPr indent="0" marL="0">
+              <a:buNone/>
+            </a:pPr>
+            <a:r>
+              <a:rPr b="1" dirty="0" sz="3400" lang="en-US">
+                <a:solidFill>
+                  <a:srgbClr val="FFFFFF"/>
+                </a:solidFill>
+                <a:latin typeface="Calibri" pitchFamily="34" charset="0"/>
+                <a:ea typeface="Calibri" pitchFamily="34" charset="-122"/>
+                <a:cs typeface="Calibri" pitchFamily="34" charset="-120"/>
+              </a:rPr>
+              <a:t>Ada Umeh</a:t>
+            </a:r>
+            <a:endParaRPr dirty="0" sz="3400" lang="en-US"/>
+          </a:p>
+        </p:txBody>
+      </p:sp>
+      <p:sp>
+        <p:nvSpPr>
+          <p:cNvPr id="1048579" name="Text 3"/>
+          <p:cNvSpPr/>
+          <p:nvPr/>
+        </p:nvSpPr>
+        <p:spPr>
+          <a:xfrm>
+            <a:off x="594360" y="1243584"/>
+            <a:ext cx="7589520" cy="274320"/>
+          </a:xfrm>
+          <a:prstGeom prst="rect"/>
+          <a:noFill/>
+        </p:spPr>
+        <p:txBody>
+          <a:bodyPr anchor="ctr" bIns="0" lIns="0" rIns="0" rtlCol="0" tIns="0" wrap="square"/>
+          <a:p>
+            <a:pPr indent="0" marL="0">
+              <a:buNone/>
+            </a:pPr>
+            <a:r>
+              <a:rPr dirty="0" sz="1300" lang="en-US">
+                <a:solidFill>
+                  <a:srgbClr val="2DD4BF"/>
+                </a:solidFill>
+                <a:latin typeface="Calibri" pitchFamily="34" charset="0"/>
+                <a:ea typeface="Calibri" pitchFamily="34" charset="-122"/>
+                <a:cs typeface="Calibri" pitchFamily="34" charset="-120"/>
+              </a:rPr>
+              <a:t>20 years old  ·  300-level Biochemistry  ·  University of Nigeria, Nsukka</a:t>
+            </a:r>
+            <a:endParaRPr dirty="0" sz="1300" lang="en-US"/>
+          </a:p>
+        </p:txBody>
+      </p:sp>
+      <p:sp>
+        <p:nvSpPr>
+          <p:cNvPr id="1048580" name="Shape 4"/>
+          <p:cNvSpPr/>
+          <p:nvPr/>
+        </p:nvSpPr>
+        <p:spPr>
+          <a:xfrm>
+            <a:off x="594360" y="1572768"/>
+            <a:ext cx="7955280" cy="13716"/>
+          </a:xfrm>
+          <a:prstGeom prst="rect"/>
+          <a:solidFill>
+            <a:srgbClr val="1D3A5F"/>
+          </a:solidFill>
+          <a:ln w="12700">
+            <a:solidFill>
+              <a:srgbClr val="1D3A5F"/>
+            </a:solidFill>
+            <a:prstDash val="solid"/>
+          </a:ln>
+        </p:spPr>
+      </p:sp>
+      <p:sp>
+        <p:nvSpPr>
+          <p:cNvPr id="1048581" name="Text 5"/>
+          <p:cNvSpPr/>
+          <p:nvPr/>
+        </p:nvSpPr>
+        <p:spPr>
+          <a:xfrm>
+            <a:off x="594360" y="1719072"/>
+            <a:ext cx="2560320" cy="201168"/>
+          </a:xfrm>
+          <a:prstGeom prst="rect"/>
+          <a:noFill/>
+        </p:spPr>
+        <p:txBody>
+          <a:bodyPr anchor="ctr" bIns="0" lIns="0" rIns="0" rtlCol="0" tIns="0" wrap="square"/>
+          <a:p>
+            <a:pPr indent="0" marL="0">
+              <a:buNone/>
+            </a:pPr>
+            <a:r>
+              <a:rPr dirty="0" sz="850" kern="0" lang="en-US" spc="200">
+                <a:solidFill>
+                  <a:srgbClr val="2DD4BF"/>
+                </a:solidFill>
+                <a:latin typeface="Calibri" pitchFamily="34" charset="0"/>
+                <a:ea typeface="Calibri" pitchFamily="34" charset="-122"/>
+                <a:cs typeface="Calibri" pitchFamily="34" charset="-120"/>
+              </a:rPr>
+              <a:t>DAILY ROUTINE</a:t>
+            </a:r>
+            <a:endParaRPr dirty="0" sz="850" lang="en-US"/>
+          </a:p>
+        </p:txBody>
+      </p:sp>
+      <p:sp>
+        <p:nvSpPr>
+          <p:cNvPr id="1048582" name="Text 6"/>
+          <p:cNvSpPr/>
+          <p:nvPr/>
+        </p:nvSpPr>
+        <p:spPr>
+          <a:xfrm>
+            <a:off x="594360" y="1920240"/>
+            <a:ext cx="2560320" cy="411480"/>
+          </a:xfrm>
+          <a:prstGeom prst="rect"/>
+          <a:noFill/>
+        </p:spPr>
+        <p:txBody>
+          <a:bodyPr anchor="ctr" bIns="0" lIns="0" rIns="0" rtlCol="0" tIns="0" wrap="square"/>
+          <a:p>
+            <a:pPr indent="0" marL="0">
+              <a:buNone/>
+            </a:pPr>
+            <a:r>
+              <a:rPr b="1" dirty="0" sz="1400" lang="en-US">
+                <a:solidFill>
+                  <a:srgbClr val="FFFFFF"/>
+                </a:solidFill>
+                <a:latin typeface="Calibri" pitchFamily="34" charset="0"/>
+                <a:ea typeface="Calibri" pitchFamily="34" charset="-122"/>
+                <a:cs typeface="Calibri" pitchFamily="34" charset="-120"/>
+              </a:rPr>
+              <a:t>Library until 9pm</a:t>
+            </a:r>
+            <a:endParaRPr dirty="0" sz="1400" lang="en-US"/>
+          </a:p>
+        </p:txBody>
+      </p:sp>
+      <p:sp>
+        <p:nvSpPr>
+          <p:cNvPr id="1048583" name="Text 7"/>
+          <p:cNvSpPr/>
+          <p:nvPr/>
+        </p:nvSpPr>
+        <p:spPr>
+          <a:xfrm>
+            <a:off x="594360" y="2359152"/>
+            <a:ext cx="2560320" cy="1280160"/>
+          </a:xfrm>
+          <a:prstGeom prst="rect"/>
+          <a:noFill/>
+        </p:spPr>
+        <p:txBody>
+          <a:bodyPr anchor="ctr" bIns="0" lIns="0" rIns="0" rtlCol="0" tIns="0" wrap="square"/>
+          <a:p>
+            <a:pPr indent="0" marL="0">
+              <a:buNone/>
+            </a:pPr>
+            <a:r>
+              <a:rPr dirty="0" sz="1150" lang="en-US">
+                <a:solidFill>
+                  <a:srgbClr val="A0B8D0"/>
+                </a:solidFill>
+                <a:latin typeface="Calibri" pitchFamily="34" charset="0"/>
+                <a:ea typeface="Calibri" pitchFamily="34" charset="-122"/>
+                <a:cs typeface="Calibri" pitchFamily="34" charset="-120"/>
+              </a:rPr>
+              <a:t>Lectures end at 6pm. She stays late in the library, then walks back to her hostel through dimly-lit campus paths.</a:t>
+            </a:r>
+            <a:endParaRPr dirty="0" sz="1150" lang="en-US"/>
+          </a:p>
+        </p:txBody>
+      </p:sp>
+      <p:sp>
+        <p:nvSpPr>
+          <p:cNvPr id="1048584" name="Text 8"/>
+          <p:cNvSpPr/>
+          <p:nvPr/>
+        </p:nvSpPr>
+        <p:spPr>
+          <a:xfrm>
+            <a:off x="3337560" y="1719072"/>
+            <a:ext cx="2560320" cy="201168"/>
+          </a:xfrm>
+          <a:prstGeom prst="rect"/>
+          <a:noFill/>
+        </p:spPr>
+        <p:txBody>
+          <a:bodyPr anchor="ctr" bIns="0" lIns="0" rIns="0" rtlCol="0" tIns="0" wrap="square"/>
+          <a:p>
+            <a:pPr indent="0" marL="0">
+              <a:buNone/>
+            </a:pPr>
+            <a:r>
+              <a:rPr dirty="0" sz="850" kern="0" lang="en-US" spc="200">
+                <a:solidFill>
+                  <a:srgbClr val="86EFAC"/>
+                </a:solidFill>
+                <a:latin typeface="Calibri" pitchFamily="34" charset="0"/>
+                <a:ea typeface="Calibri" pitchFamily="34" charset="-122"/>
+                <a:cs typeface="Calibri" pitchFamily="34" charset="-120"/>
+              </a:rPr>
+              <a:t>CURRENT WORKAROUND</a:t>
+            </a:r>
+            <a:endParaRPr dirty="0" sz="850" lang="en-US"/>
+          </a:p>
+        </p:txBody>
+      </p:sp>
+      <p:sp>
+        <p:nvSpPr>
+          <p:cNvPr id="1048585" name="Text 9"/>
+          <p:cNvSpPr/>
+          <p:nvPr/>
+        </p:nvSpPr>
+        <p:spPr>
+          <a:xfrm>
+            <a:off x="3337560" y="1920240"/>
+            <a:ext cx="2560320" cy="411480"/>
+          </a:xfrm>
+          <a:prstGeom prst="rect"/>
+          <a:noFill/>
+        </p:spPr>
+        <p:txBody>
+          <a:bodyPr anchor="ctr" bIns="0" lIns="0" rIns="0" rtlCol="0" tIns="0" wrap="square"/>
+          <a:p>
+            <a:pPr indent="0" marL="0">
+              <a:buNone/>
+            </a:pPr>
+            <a:r>
+              <a:rPr b="1" dirty="0" sz="1400" lang="en-US">
+                <a:solidFill>
+                  <a:srgbClr val="FFFFFF"/>
+                </a:solidFill>
+                <a:latin typeface="Calibri" pitchFamily="34" charset="0"/>
+                <a:ea typeface="Calibri" pitchFamily="34" charset="-122"/>
+                <a:cs typeface="Calibri" pitchFamily="34" charset="-120"/>
+              </a:rPr>
+              <a:t>Manual, fragmented</a:t>
+            </a:r>
+            <a:endParaRPr dirty="0" sz="1400" lang="en-US"/>
+          </a:p>
+        </p:txBody>
+      </p:sp>
+      <p:sp>
+        <p:nvSpPr>
+          <p:cNvPr id="1048586" name="Text 10"/>
+          <p:cNvSpPr/>
+          <p:nvPr/>
+        </p:nvSpPr>
+        <p:spPr>
+          <a:xfrm>
+            <a:off x="3337560" y="2359152"/>
+            <a:ext cx="2560320" cy="1280160"/>
+          </a:xfrm>
+          <a:prstGeom prst="rect"/>
+          <a:noFill/>
+        </p:spPr>
+        <p:txBody>
+          <a:bodyPr anchor="ctr" bIns="0" lIns="0" rIns="0" rtlCol="0" tIns="0" wrap="square"/>
+          <a:p>
+            <a:pPr indent="0" marL="0">
+              <a:buNone/>
+            </a:pPr>
+            <a:r>
+              <a:rPr dirty="0" sz="1150" lang="en-US">
+                <a:solidFill>
+                  <a:srgbClr val="A0B8D0"/>
+                </a:solidFill>
+                <a:latin typeface="Calibri" pitchFamily="34" charset="0"/>
+                <a:ea typeface="Calibri" pitchFamily="34" charset="-122"/>
+                <a:cs typeface="Calibri" pitchFamily="34" charset="-120"/>
+              </a:rPr>
+              <a:t>Calls her boyfriend on the walk. Has campus security numbers saved but has never tested if they pick up.</a:t>
+            </a:r>
+            <a:endParaRPr dirty="0" sz="1150" lang="en-US"/>
+          </a:p>
+        </p:txBody>
+      </p:sp>
+      <p:sp>
+        <p:nvSpPr>
+          <p:cNvPr id="1048587" name="Text 11"/>
+          <p:cNvSpPr/>
+          <p:nvPr/>
+        </p:nvSpPr>
+        <p:spPr>
+          <a:xfrm>
+            <a:off x="6080760" y="1719072"/>
+            <a:ext cx="2560320" cy="201168"/>
+          </a:xfrm>
+          <a:prstGeom prst="rect"/>
+          <a:noFill/>
+        </p:spPr>
+        <p:txBody>
+          <a:bodyPr anchor="ctr" bIns="0" lIns="0" rIns="0" rtlCol="0" tIns="0" wrap="square"/>
+          <a:p>
+            <a:pPr indent="0" marL="0">
+              <a:buNone/>
+            </a:pPr>
+            <a:r>
+              <a:rPr dirty="0" sz="850" kern="0" lang="en-US" spc="200">
+                <a:solidFill>
+                  <a:srgbClr val="EF4444"/>
+                </a:solidFill>
+                <a:latin typeface="Calibri" pitchFamily="34" charset="0"/>
+                <a:ea typeface="Calibri" pitchFamily="34" charset="-122"/>
+                <a:cs typeface="Calibri" pitchFamily="34" charset="-120"/>
+              </a:rPr>
+              <a:t>TOP FRUSTRATION</a:t>
+            </a:r>
+            <a:endParaRPr dirty="0" sz="850" lang="en-US"/>
+          </a:p>
+        </p:txBody>
+      </p:sp>
+      <p:sp>
+        <p:nvSpPr>
+          <p:cNvPr id="1048588" name="Text 12"/>
+          <p:cNvSpPr/>
+          <p:nvPr/>
+        </p:nvSpPr>
+        <p:spPr>
+          <a:xfrm>
+            <a:off x="6080760" y="1920240"/>
+            <a:ext cx="2560320" cy="411480"/>
+          </a:xfrm>
+          <a:prstGeom prst="rect"/>
+          <a:noFill/>
+        </p:spPr>
+        <p:txBody>
+          <a:bodyPr anchor="ctr" bIns="0" lIns="0" rIns="0" rtlCol="0" tIns="0" wrap="square"/>
+          <a:p>
+            <a:pPr indent="0" marL="0">
+              <a:buNone/>
+            </a:pPr>
+            <a:r>
+              <a:rPr b="1" dirty="0" sz="1400" lang="en-US">
+                <a:solidFill>
+                  <a:srgbClr val="FFFFFF"/>
+                </a:solidFill>
+                <a:latin typeface="Calibri" pitchFamily="34" charset="0"/>
+                <a:ea typeface="Calibri" pitchFamily="34" charset="-122"/>
+                <a:cs typeface="Calibri" pitchFamily="34" charset="-120"/>
+              </a:rPr>
+              <a:t>The walk after 8pm</a:t>
+            </a:r>
+            <a:endParaRPr dirty="0" sz="1400" lang="en-US"/>
+          </a:p>
+        </p:txBody>
+      </p:sp>
+      <p:sp>
+        <p:nvSpPr>
+          <p:cNvPr id="1048589" name="Text 13"/>
+          <p:cNvSpPr/>
+          <p:nvPr/>
+        </p:nvSpPr>
+        <p:spPr>
+          <a:xfrm>
+            <a:off x="6080760" y="2359152"/>
+            <a:ext cx="2560320" cy="1280160"/>
+          </a:xfrm>
+          <a:prstGeom prst="rect"/>
+          <a:noFill/>
+        </p:spPr>
+        <p:txBody>
+          <a:bodyPr anchor="ctr" bIns="0" lIns="0" rIns="0" rtlCol="0" tIns="0" wrap="square"/>
+          <a:p>
+            <a:pPr indent="0" marL="0">
+              <a:buNone/>
+            </a:pPr>
+            <a:r>
+              <a:rPr dirty="0" sz="1150" lang="en-US">
+                <a:solidFill>
+                  <a:srgbClr val="A0B8D0"/>
+                </a:solidFill>
+                <a:latin typeface="Calibri" pitchFamily="34" charset="0"/>
+                <a:ea typeface="Calibri" pitchFamily="34" charset="-122"/>
+                <a:cs typeface="Calibri" pitchFamily="34" charset="-120"/>
+              </a:rPr>
+              <a:t>She rushes. Watches every shadow. Doesn’t enjoy late library sessions because the walk home is always anxious.</a:t>
+            </a:r>
+            <a:endParaRPr dirty="0" sz="1150" lang="en-US"/>
+          </a:p>
+        </p:txBody>
+      </p:sp>
+      <p:sp>
+        <p:nvSpPr>
+          <p:cNvPr id="1048590" name="Shape 14"/>
+          <p:cNvSpPr/>
+          <p:nvPr/>
+        </p:nvSpPr>
+        <p:spPr>
+          <a:xfrm>
+            <a:off x="594360" y="3703320"/>
+            <a:ext cx="7955280" cy="822960"/>
+          </a:xfrm>
+          <a:prstGeom prst="rect"/>
+          <a:solidFill>
+            <a:srgbClr val="0D2850"/>
+          </a:solidFill>
+          <a:ln w="12700">
+            <a:solidFill>
+              <a:srgbClr val="0D2850"/>
+            </a:solidFill>
+            <a:prstDash val="solid"/>
+          </a:ln>
+        </p:spPr>
+      </p:sp>
+      <p:sp>
+        <p:nvSpPr>
+          <p:cNvPr id="1048591" name="Text 15"/>
+          <p:cNvSpPr/>
+          <p:nvPr/>
+        </p:nvSpPr>
+        <p:spPr>
+          <a:xfrm>
+            <a:off x="713232" y="3776472"/>
+            <a:ext cx="2286000" cy="228600"/>
+          </a:xfrm>
+          <a:prstGeom prst="rect"/>
+          <a:noFill/>
+        </p:spPr>
+        <p:txBody>
+          <a:bodyPr anchor="ctr" bIns="0" lIns="0" rIns="0" rtlCol="0" tIns="0" wrap="square"/>
+          <a:p>
+            <a:pPr indent="0" marL="0">
+              <a:buNone/>
+            </a:pPr>
+            <a:r>
+              <a:rPr dirty="0" sz="950" lang="en-US">
+                <a:solidFill>
+                  <a:srgbClr val="2DD4BF"/>
+                </a:solidFill>
+                <a:latin typeface="Calibri" pitchFamily="34" charset="0"/>
+                <a:ea typeface="Calibri" pitchFamily="34" charset="-122"/>
+                <a:cs typeface="Calibri" pitchFamily="34" charset="-120"/>
+              </a:rPr>
+              <a:t>“Why she’d use LifeLine:”  </a:t>
+            </a:r>
+            <a:endParaRPr dirty="0" sz="950" lang="en-US"/>
+          </a:p>
+        </p:txBody>
+      </p:sp>
+      <p:sp>
+        <p:nvSpPr>
+          <p:cNvPr id="1048592" name="Text 16"/>
+          <p:cNvSpPr/>
+          <p:nvPr/>
+        </p:nvSpPr>
+        <p:spPr>
+          <a:xfrm>
+            <a:off x="713232" y="3995928"/>
+            <a:ext cx="7772400" cy="457200"/>
+          </a:xfrm>
+          <a:prstGeom prst="rect"/>
+          <a:noFill/>
+        </p:spPr>
+        <p:txBody>
+          <a:bodyPr anchor="ctr" bIns="0" lIns="0" rIns="0" rtlCol="0" tIns="0" wrap="square"/>
+          <a:p>
+            <a:pPr indent="0" marL="0">
+              <a:buNone/>
+            </a:pPr>
+            <a:r>
+              <a:rPr dirty="0" sz="1100" lang="en-US">
+                <a:solidFill>
+                  <a:srgbClr val="C8D9EE"/>
+                </a:solidFill>
+                <a:latin typeface="Calibri" pitchFamily="34" charset="0"/>
+                <a:ea typeface="Calibri" pitchFamily="34" charset="-122"/>
+                <a:cs typeface="Calibri" pitchFamily="34" charset="-120"/>
+              </a:rPr>
+              <a:t>A configured Safe Arrival trip handles the “let mum know I’m home” routine automatically. The SOS gives her real recourse if something feels off on the walk.</a:t>
+            </a:r>
+            <a:endParaRPr dirty="0" sz="1100" lang="en-US"/>
+          </a:p>
+        </p:txBody>
+      </p:sp>
+    </p:spTree>
+  </p:cSld>
+  <p:clrMapOvr>
+    <a:masterClrMapping/>
+  </p:clrMapOvr>
+</p:sld>
+</file>
+
+<file path=ppt/slides/slide5.xml><?xml version="1.0" encoding="utf-8"?>
+<p:sld xmlns:a="http://schemas.openxmlformats.org/drawingml/2006/main" xmlns:r="http://schemas.openxmlformats.org/officeDocument/2006/relationships" xmlns:p="http://schemas.openxmlformats.org/presentationml/2006/main">
+  <p:cSld name="Slide 5">
+    <p:bg>
+      <p:bgPr>
+        <a:solidFill>
+          <a:srgbClr val="F8FAFC"/>
+        </a:solidFill>
+      </p:bgPr>
+    </p:bg>
+    <p:spTree>
+      <p:nvGrpSpPr>
+        <p:cNvPr id="18" name=""/>
+        <p:cNvGrpSpPr/>
+        <p:nvPr/>
+      </p:nvGrpSpPr>
+      <p:grpSpPr>
+        <a:xfrm>
+          <a:off x="0" y="0"/>
+          <a:ext cx="0" cy="0"/>
+          <a:chOff x="0" y="0"/>
+          <a:chExt cx="0" cy="0"/>
+        </a:xfrm>
+      </p:grpSpPr>
+      <p:pic>
+        <p:nvPicPr>
+          <p:cNvPr id="2097153" name="Image 0" descr="/mnt/user-data/uploads/IMG-20260517-WA0000.jpg"/>
+          <p:cNvPicPr>
+            <a:picLocks noChangeAspect="1"/>
+          </p:cNvPicPr>
+          <p:nvPr/>
+        </p:nvPicPr>
+        <p:blipFill>
+          <a:blip xmlns:r="http://schemas.openxmlformats.org/officeDocument/2006/relationships" r:embed="rId1"/>
+          <a:stretch>
+            <a:fillRect/>
+          </a:stretch>
+        </p:blipFill>
+        <p:spPr>
+          <a:xfrm>
+            <a:off x="7955280" y="91440"/>
+            <a:ext cx="1005840" cy="1005840"/>
+          </a:xfrm>
+          <a:prstGeom prst="rect"/>
+        </p:spPr>
+      </p:pic>
+      <p:sp>
+        <p:nvSpPr>
+          <p:cNvPr id="1048596" name="Text 0"/>
+          <p:cNvSpPr/>
+          <p:nvPr/>
+        </p:nvSpPr>
+        <p:spPr>
+          <a:xfrm>
+            <a:off x="411480" y="201168"/>
+            <a:ext cx="3657600" cy="228600"/>
+          </a:xfrm>
+          <a:prstGeom prst="rect"/>
+          <a:noFill/>
+        </p:spPr>
+        <p:txBody>
+          <a:bodyPr anchor="ctr" bIns="0" lIns="0" rIns="0" rtlCol="0" tIns="0" wrap="square"/>
+          <a:p>
+            <a:pPr indent="0" marL="0">
+              <a:buNone/>
+            </a:pPr>
+            <a:r>
+              <a:rPr dirty="0" sz="900" kern="0" lang="en-US" spc="400">
+                <a:solidFill>
+                  <a:srgbClr val="94A3B8"/>
+                </a:solidFill>
+                <a:latin typeface="Calibri" pitchFamily="34" charset="0"/>
+                <a:ea typeface="Calibri" pitchFamily="34" charset="-122"/>
+                <a:cs typeface="Calibri" pitchFamily="34" charset="-120"/>
+              </a:rPr>
+              <a:t>THE SOLUTION</a:t>
+            </a:r>
+            <a:endParaRPr dirty="0" sz="900" lang="en-US"/>
+          </a:p>
+        </p:txBody>
+      </p:sp>
+      <p:sp>
+        <p:nvSpPr>
+          <p:cNvPr id="1048597" name="Text 1"/>
+          <p:cNvSpPr/>
+          <p:nvPr/>
+        </p:nvSpPr>
+        <p:spPr>
+          <a:xfrm>
+            <a:off x="411480" y="438912"/>
+            <a:ext cx="6400800" cy="475488"/>
+          </a:xfrm>
+          <a:prstGeom prst="rect"/>
+          <a:noFill/>
+        </p:spPr>
+        <p:txBody>
+          <a:bodyPr anchor="ctr" bIns="0" lIns="0" rIns="0" rtlCol="0" tIns="0" wrap="square"/>
+          <a:p>
+            <a:pPr indent="0" marL="0">
+              <a:buNone/>
+            </a:pPr>
+            <a:r>
+              <a:rPr b="1" dirty="0" sz="2800" lang="en-US">
+                <a:solidFill>
+                  <a:srgbClr val="0A1E3F"/>
+                </a:solidFill>
+                <a:latin typeface="Calibri" pitchFamily="34" charset="0"/>
+                <a:ea typeface="Calibri" pitchFamily="34" charset="-122"/>
+                <a:cs typeface="Calibri" pitchFamily="34" charset="-120"/>
+              </a:rPr>
+              <a:t>Safety in one tap.</a:t>
+            </a:r>
+            <a:endParaRPr dirty="0" sz="2800" lang="en-US"/>
+          </a:p>
+        </p:txBody>
+      </p:sp>
+      <p:sp>
+        <p:nvSpPr>
+          <p:cNvPr id="1048598" name="Shape 2"/>
+          <p:cNvSpPr/>
+          <p:nvPr/>
+        </p:nvSpPr>
+        <p:spPr>
+          <a:xfrm>
+            <a:off x="411480" y="1078992"/>
+            <a:ext cx="4023360" cy="3566160"/>
+          </a:xfrm>
+          <a:prstGeom prst="rect"/>
+          <a:solidFill>
+            <a:srgbClr val="0A1E3F"/>
+          </a:solidFill>
+          <a:ln w="12700">
+            <a:solidFill>
+              <a:srgbClr val="0A1E3F"/>
+            </a:solidFill>
+            <a:prstDash val="solid"/>
+          </a:ln>
+        </p:spPr>
+      </p:sp>
+      <p:sp>
+        <p:nvSpPr>
+          <p:cNvPr id="1048599" name="Shape 3"/>
+          <p:cNvSpPr/>
+          <p:nvPr/>
+        </p:nvSpPr>
+        <p:spPr>
+          <a:xfrm>
+            <a:off x="411480" y="1078992"/>
+            <a:ext cx="4023360" cy="347472"/>
+          </a:xfrm>
+          <a:prstGeom prst="rect"/>
+          <a:solidFill>
+            <a:srgbClr val="064E3B"/>
+          </a:solidFill>
+          <a:ln w="12700">
+            <a:solidFill>
+              <a:srgbClr val="064E3B"/>
+            </a:solidFill>
+            <a:prstDash val="solid"/>
+          </a:ln>
+        </p:spPr>
+      </p:sp>
+      <p:sp>
+        <p:nvSpPr>
+          <p:cNvPr id="1048600" name="Text 4"/>
+          <p:cNvSpPr/>
+          <p:nvPr/>
+        </p:nvSpPr>
+        <p:spPr>
+          <a:xfrm>
+            <a:off x="530352" y="1115568"/>
+            <a:ext cx="3749040" cy="274320"/>
+          </a:xfrm>
+          <a:prstGeom prst="rect"/>
+          <a:noFill/>
+        </p:spPr>
+        <p:txBody>
+          <a:bodyPr anchor="ctr" bIns="0" lIns="0" rIns="0" rtlCol="0" tIns="0" wrap="square"/>
+          <a:p>
+            <a:pPr indent="0" marL="0">
+              <a:buNone/>
+            </a:pPr>
+            <a:r>
+              <a:rPr b="1" dirty="0" sz="950" lang="en-US">
+                <a:solidFill>
+                  <a:srgbClr val="86EFAC"/>
+                </a:solidFill>
+                <a:latin typeface="Calibri" pitchFamily="34" charset="0"/>
+                <a:ea typeface="Calibri" pitchFamily="34" charset="-122"/>
+                <a:cs typeface="Calibri" pitchFamily="34" charset="-120"/>
+              </a:rPr>
+              <a:t>SAFE ARRIVAL FLOW  —  daily habit</a:t>
+            </a:r>
+            <a:endParaRPr dirty="0" sz="950" lang="en-US"/>
+          </a:p>
+        </p:txBody>
+      </p:sp>
+      <p:sp>
+        <p:nvSpPr>
+          <p:cNvPr id="1048601" name="Text 5"/>
+          <p:cNvSpPr/>
+          <p:nvPr/>
+        </p:nvSpPr>
+        <p:spPr>
+          <a:xfrm>
+            <a:off x="530352" y="1572768"/>
+            <a:ext cx="3749040" cy="320040"/>
+          </a:xfrm>
+          <a:prstGeom prst="rect"/>
+          <a:noFill/>
+        </p:spPr>
+        <p:txBody>
+          <a:bodyPr anchor="ctr" bIns="0" lIns="0" rIns="0" rtlCol="0" tIns="0" wrap="square"/>
+          <a:p>
+            <a:pPr indent="0" marL="0">
+              <a:buNone/>
+            </a:pPr>
+            <a:r>
+              <a:rPr b="1" dirty="0" sz="1100" lang="en-US">
+                <a:solidFill>
+                  <a:srgbClr val="FFFFFF"/>
+                </a:solidFill>
+                <a:latin typeface="Calibri" pitchFamily="34" charset="0"/>
+                <a:ea typeface="Calibri" pitchFamily="34" charset="-122"/>
+                <a:cs typeface="Calibri" pitchFamily="34" charset="-120"/>
+              </a:rPr>
+              <a:t>✓  </a:t>
+            </a:r>
+            <a:r>
+              <a:rPr dirty="0" sz="1100" lang="en-US">
+                <a:solidFill>
+                  <a:srgbClr val="FFFFFF"/>
+                </a:solidFill>
+                <a:latin typeface="Calibri" pitchFamily="34" charset="0"/>
+                <a:ea typeface="Calibri" pitchFamily="34" charset="-122"/>
+                <a:cs typeface="Calibri" pitchFamily="34" charset="-120"/>
+              </a:rPr>
+              <a:t>Pick destination + ETA (15 / 30 / 60 min)</a:t>
+            </a:r>
+            <a:endParaRPr dirty="0" sz="1100" lang="en-US"/>
+          </a:p>
+        </p:txBody>
+      </p:sp>
+      <p:sp>
+        <p:nvSpPr>
+          <p:cNvPr id="1048602" name="Text 6"/>
+          <p:cNvSpPr/>
+          <p:nvPr/>
+        </p:nvSpPr>
+        <p:spPr>
+          <a:xfrm>
+            <a:off x="530352" y="1911096"/>
+            <a:ext cx="3749040" cy="320040"/>
+          </a:xfrm>
+          <a:prstGeom prst="rect"/>
+          <a:noFill/>
+        </p:spPr>
+        <p:txBody>
+          <a:bodyPr anchor="ctr" bIns="0" lIns="0" rIns="0" rtlCol="0" tIns="0" wrap="square"/>
+          <a:p>
+            <a:pPr indent="0" marL="0">
+              <a:buNone/>
+            </a:pPr>
+            <a:r>
+              <a:rPr b="1" dirty="0" sz="1100" lang="en-US">
+                <a:solidFill>
+                  <a:srgbClr val="FFFFFF"/>
+                </a:solidFill>
+                <a:latin typeface="Calibri" pitchFamily="34" charset="0"/>
+                <a:ea typeface="Calibri" pitchFamily="34" charset="-122"/>
+                <a:cs typeface="Calibri" pitchFamily="34" charset="-120"/>
+              </a:rPr>
+              <a:t>✓  </a:t>
+            </a:r>
+            <a:r>
+              <a:rPr dirty="0" sz="1100" lang="en-US">
+                <a:solidFill>
+                  <a:srgbClr val="FFFFFF"/>
+                </a:solidFill>
+                <a:latin typeface="Calibri" pitchFamily="34" charset="0"/>
+                <a:ea typeface="Calibri" pitchFamily="34" charset="-122"/>
+                <a:cs typeface="Calibri" pitchFamily="34" charset="-120"/>
+              </a:rPr>
+              <a:t>Select trusted contacts to watch</a:t>
+            </a:r>
+            <a:endParaRPr dirty="0" sz="1100" lang="en-US"/>
+          </a:p>
+        </p:txBody>
+      </p:sp>
+      <p:sp>
+        <p:nvSpPr>
+          <p:cNvPr id="1048603" name="Text 7"/>
+          <p:cNvSpPr/>
+          <p:nvPr/>
+        </p:nvSpPr>
+        <p:spPr>
+          <a:xfrm>
+            <a:off x="530352" y="2249424"/>
+            <a:ext cx="3749040" cy="320040"/>
+          </a:xfrm>
+          <a:prstGeom prst="rect"/>
+          <a:noFill/>
+        </p:spPr>
+        <p:txBody>
+          <a:bodyPr anchor="ctr" bIns="0" lIns="0" rIns="0" rtlCol="0" tIns="0" wrap="square"/>
+          <a:p>
+            <a:pPr indent="0" marL="0">
+              <a:buNone/>
+            </a:pPr>
+            <a:r>
+              <a:rPr b="1" dirty="0" sz="1100" lang="en-US">
+                <a:solidFill>
+                  <a:srgbClr val="FFFFFF"/>
+                </a:solidFill>
+                <a:latin typeface="Calibri" pitchFamily="34" charset="0"/>
+                <a:ea typeface="Calibri" pitchFamily="34" charset="-122"/>
+                <a:cs typeface="Calibri" pitchFamily="34" charset="-120"/>
+              </a:rPr>
+              <a:t>✓  </a:t>
+            </a:r>
+            <a:r>
+              <a:rPr dirty="0" sz="1100" lang="en-US">
+                <a:solidFill>
+                  <a:srgbClr val="FFFFFF"/>
+                </a:solidFill>
+                <a:latin typeface="Calibri" pitchFamily="34" charset="0"/>
+                <a:ea typeface="Calibri" pitchFamily="34" charset="-122"/>
+                <a:cs typeface="Calibri" pitchFamily="34" charset="-120"/>
+              </a:rPr>
+              <a:t>Live OpenStreetMap tracking + countdown timer</a:t>
+            </a:r>
+            <a:endParaRPr dirty="0" sz="1100" lang="en-US"/>
+          </a:p>
+        </p:txBody>
+      </p:sp>
+      <p:sp>
+        <p:nvSpPr>
+          <p:cNvPr id="1048604" name="Text 8"/>
+          <p:cNvSpPr/>
+          <p:nvPr/>
+        </p:nvSpPr>
+        <p:spPr>
+          <a:xfrm>
+            <a:off x="530352" y="2587752"/>
+            <a:ext cx="3749040" cy="320040"/>
+          </a:xfrm>
+          <a:prstGeom prst="rect"/>
+          <a:noFill/>
+        </p:spPr>
+        <p:txBody>
+          <a:bodyPr anchor="ctr" bIns="0" lIns="0" rIns="0" rtlCol="0" tIns="0" wrap="square"/>
+          <a:p>
+            <a:pPr indent="0" marL="0">
+              <a:buNone/>
+            </a:pPr>
+            <a:r>
+              <a:rPr b="1" dirty="0" sz="1100" lang="en-US">
+                <a:solidFill>
+                  <a:srgbClr val="86EFAC"/>
+                </a:solidFill>
+                <a:latin typeface="Calibri" pitchFamily="34" charset="0"/>
+                <a:ea typeface="Calibri" pitchFamily="34" charset="-122"/>
+                <a:cs typeface="Calibri" pitchFamily="34" charset="-120"/>
+              </a:rPr>
+              <a:t>✓  </a:t>
+            </a:r>
+            <a:r>
+              <a:rPr dirty="0" sz="1100" lang="en-US">
+                <a:solidFill>
+                  <a:srgbClr val="86EFAC"/>
+                </a:solidFill>
+                <a:latin typeface="Calibri" pitchFamily="34" charset="0"/>
+                <a:ea typeface="Calibri" pitchFamily="34" charset="-122"/>
+                <a:cs typeface="Calibri" pitchFamily="34" charset="-120"/>
+              </a:rPr>
+              <a:t>Tap “I’ve arrived safely” → confetti + contacts notified</a:t>
+            </a:r>
+            <a:endParaRPr dirty="0" sz="1100" lang="en-US"/>
+          </a:p>
+        </p:txBody>
+      </p:sp>
+      <p:sp>
+        <p:nvSpPr>
+          <p:cNvPr id="1048605" name="Text 9"/>
+          <p:cNvSpPr/>
+          <p:nvPr/>
+        </p:nvSpPr>
+        <p:spPr>
+          <a:xfrm>
+            <a:off x="530352" y="2926080"/>
+            <a:ext cx="3749040" cy="320040"/>
+          </a:xfrm>
+          <a:prstGeom prst="rect"/>
+          <a:noFill/>
+        </p:spPr>
+        <p:txBody>
+          <a:bodyPr anchor="ctr" bIns="0" lIns="0" rIns="0" rtlCol="0" tIns="0" wrap="square"/>
+          <a:p>
+            <a:pPr indent="0" marL="0">
+              <a:buNone/>
+            </a:pPr>
+            <a:r>
+              <a:rPr b="1" dirty="0" sz="1100" lang="en-US">
+                <a:solidFill>
+                  <a:srgbClr val="FCA5A5"/>
+                </a:solidFill>
+                <a:latin typeface="Calibri" pitchFamily="34" charset="0"/>
+                <a:ea typeface="Calibri" pitchFamily="34" charset="-122"/>
+                <a:cs typeface="Calibri" pitchFamily="34" charset="-120"/>
+              </a:rPr>
+              <a:t>✓  </a:t>
+            </a:r>
+            <a:r>
+              <a:rPr dirty="0" sz="1100" lang="en-US">
+                <a:solidFill>
+                  <a:srgbClr val="FCA5A5"/>
+                </a:solidFill>
+                <a:latin typeface="Calibri" pitchFamily="34" charset="0"/>
+                <a:ea typeface="Calibri" pitchFamily="34" charset="-122"/>
+                <a:cs typeface="Calibri" pitchFamily="34" charset="-120"/>
+              </a:rPr>
+              <a:t>ETA expires without tap → contacts auto-alerted</a:t>
+            </a:r>
+            <a:endParaRPr dirty="0" sz="1100" lang="en-US"/>
+          </a:p>
+        </p:txBody>
+      </p:sp>
+      <p:sp>
+        <p:nvSpPr>
+          <p:cNvPr id="1048606" name="Text 10"/>
+          <p:cNvSpPr/>
+          <p:nvPr/>
+        </p:nvSpPr>
+        <p:spPr>
+          <a:xfrm>
+            <a:off x="530352" y="3264408"/>
+            <a:ext cx="3749040" cy="320040"/>
+          </a:xfrm>
+          <a:prstGeom prst="rect"/>
+          <a:noFill/>
+        </p:spPr>
+        <p:txBody>
+          <a:bodyPr anchor="ctr" bIns="0" lIns="0" rIns="0" rtlCol="0" tIns="0" wrap="square"/>
+          <a:p>
+            <a:pPr indent="0" marL="0">
+              <a:buNone/>
+            </a:pPr>
+            <a:r>
+              <a:rPr b="1" dirty="0" sz="1100" lang="en-US">
+                <a:solidFill>
+                  <a:srgbClr val="2DD4BF"/>
+                </a:solidFill>
+                <a:latin typeface="Calibri" pitchFamily="34" charset="0"/>
+                <a:ea typeface="Calibri" pitchFamily="34" charset="-122"/>
+                <a:cs typeface="Calibri" pitchFamily="34" charset="-120"/>
+              </a:rPr>
+              <a:t>✓  </a:t>
+            </a:r>
+            <a:r>
+              <a:rPr dirty="0" sz="1100" lang="en-US">
+                <a:solidFill>
+                  <a:srgbClr val="2DD4BF"/>
+                </a:solidFill>
+                <a:latin typeface="Calibri" pitchFamily="34" charset="0"/>
+                <a:ea typeface="Calibri" pitchFamily="34" charset="-122"/>
+                <a:cs typeface="Calibri" pitchFamily="34" charset="-120"/>
+              </a:rPr>
+              <a:t>Zero manual texting required once configured</a:t>
+            </a:r>
+            <a:endParaRPr dirty="0" sz="1100" lang="en-US"/>
+          </a:p>
+        </p:txBody>
+      </p:sp>
+      <p:sp>
+        <p:nvSpPr>
+          <p:cNvPr id="1048607" name="Shape 11"/>
+          <p:cNvSpPr/>
+          <p:nvPr/>
+        </p:nvSpPr>
+        <p:spPr>
+          <a:xfrm>
+            <a:off x="411480" y="4133088"/>
+            <a:ext cx="4023360" cy="420624"/>
+          </a:xfrm>
+          <a:prstGeom prst="rect"/>
+          <a:solidFill>
+            <a:srgbClr val="10B981"/>
+          </a:solidFill>
+          <a:ln w="12700">
+            <a:solidFill>
+              <a:srgbClr val="10B981"/>
+            </a:solidFill>
+            <a:prstDash val="solid"/>
+          </a:ln>
+        </p:spPr>
+      </p:sp>
+      <p:sp>
+        <p:nvSpPr>
+          <p:cNvPr id="1048608" name="Text 12"/>
+          <p:cNvSpPr/>
+          <p:nvPr/>
+        </p:nvSpPr>
+        <p:spPr>
+          <a:xfrm>
+            <a:off x="502920" y="4178808"/>
+            <a:ext cx="3840480" cy="329184"/>
+          </a:xfrm>
+          <a:prstGeom prst="rect"/>
+          <a:noFill/>
+        </p:spPr>
+        <p:txBody>
+          <a:bodyPr anchor="ctr" bIns="0" lIns="0" rIns="0" rtlCol="0" tIns="0" wrap="square"/>
+          <a:p>
+            <a:pPr indent="0" marL="0">
+              <a:buNone/>
+            </a:pPr>
+            <a:r>
+              <a:rPr b="1" dirty="0" sz="1000" lang="en-US">
+                <a:solidFill>
+                  <a:srgbClr val="FFFFFF"/>
+                </a:solidFill>
+                <a:latin typeface="Calibri" pitchFamily="34" charset="0"/>
+                <a:ea typeface="Calibri" pitchFamily="34" charset="-122"/>
+                <a:cs typeface="Calibri" pitchFamily="34" charset="-120"/>
+              </a:rPr>
+              <a:t>North Star: ≥ 90% of journeys end in safe-arrival confirmation</a:t>
+            </a:r>
+            <a:endParaRPr dirty="0" sz="1000" lang="en-US"/>
+          </a:p>
+        </p:txBody>
+      </p:sp>
+      <p:sp>
+        <p:nvSpPr>
+          <p:cNvPr id="1048609" name="Shape 13"/>
+          <p:cNvSpPr/>
+          <p:nvPr/>
+        </p:nvSpPr>
+        <p:spPr>
+          <a:xfrm>
+            <a:off x="4709160" y="1078992"/>
+            <a:ext cx="4023360" cy="3566160"/>
+          </a:xfrm>
+          <a:prstGeom prst="rect"/>
+          <a:solidFill>
+            <a:srgbClr val="0A1E3F"/>
+          </a:solidFill>
+          <a:ln w="12700">
+            <a:solidFill>
+              <a:srgbClr val="0A1E3F"/>
+            </a:solidFill>
+            <a:prstDash val="solid"/>
+          </a:ln>
+        </p:spPr>
+      </p:sp>
+      <p:sp>
+        <p:nvSpPr>
+          <p:cNvPr id="1048610" name="Shape 14"/>
+          <p:cNvSpPr/>
+          <p:nvPr/>
+        </p:nvSpPr>
+        <p:spPr>
+          <a:xfrm>
+            <a:off x="4709160" y="1078992"/>
+            <a:ext cx="4023360" cy="347472"/>
+          </a:xfrm>
+          <a:prstGeom prst="rect"/>
+          <a:solidFill>
+            <a:srgbClr val="7F1D1D"/>
+          </a:solidFill>
+          <a:ln w="12700">
+            <a:solidFill>
+              <a:srgbClr val="7F1D1D"/>
+            </a:solidFill>
+            <a:prstDash val="solid"/>
+          </a:ln>
+        </p:spPr>
+      </p:sp>
+      <p:sp>
+        <p:nvSpPr>
+          <p:cNvPr id="1048611" name="Text 15"/>
+          <p:cNvSpPr/>
+          <p:nvPr/>
+        </p:nvSpPr>
+        <p:spPr>
+          <a:xfrm>
+            <a:off x="4828032" y="1115568"/>
+            <a:ext cx="3749040" cy="274320"/>
+          </a:xfrm>
+          <a:prstGeom prst="rect"/>
+          <a:noFill/>
+        </p:spPr>
+        <p:txBody>
+          <a:bodyPr anchor="ctr" bIns="0" lIns="0" rIns="0" rtlCol="0" tIns="0" wrap="square"/>
+          <a:p>
+            <a:pPr indent="0" marL="0">
+              <a:buNone/>
+            </a:pPr>
+            <a:r>
+              <a:rPr b="1" dirty="0" sz="950" lang="en-US">
+                <a:solidFill>
+                  <a:srgbClr val="FCA5A5"/>
+                </a:solidFill>
+                <a:latin typeface="Calibri" pitchFamily="34" charset="0"/>
+                <a:ea typeface="Calibri" pitchFamily="34" charset="-122"/>
+                <a:cs typeface="Calibri" pitchFamily="34" charset="-120"/>
+              </a:rPr>
+              <a:t>SOS FLOW  —  safety net</a:t>
+            </a:r>
+            <a:endParaRPr dirty="0" sz="950" lang="en-US"/>
+          </a:p>
+        </p:txBody>
+      </p:sp>
+      <p:sp>
+        <p:nvSpPr>
+          <p:cNvPr id="1048612" name="Text 16"/>
+          <p:cNvSpPr/>
+          <p:nvPr/>
+        </p:nvSpPr>
+        <p:spPr>
+          <a:xfrm>
+            <a:off x="4828032" y="1572768"/>
+            <a:ext cx="3749040" cy="320040"/>
+          </a:xfrm>
+          <a:prstGeom prst="rect"/>
+          <a:noFill/>
+        </p:spPr>
+        <p:txBody>
+          <a:bodyPr anchor="ctr" bIns="0" lIns="0" rIns="0" rtlCol="0" tIns="0" wrap="square"/>
+          <a:p>
+            <a:pPr indent="0" marL="0">
+              <a:buNone/>
+            </a:pPr>
+            <a:r>
+              <a:rPr b="1" dirty="0" sz="1100" lang="en-US">
+                <a:solidFill>
+                  <a:srgbClr val="EF4444"/>
+                </a:solidFill>
+                <a:latin typeface="Calibri" pitchFamily="34" charset="0"/>
+                <a:ea typeface="Calibri" pitchFamily="34" charset="-122"/>
+                <a:cs typeface="Calibri" pitchFamily="34" charset="-120"/>
+              </a:rPr>
+              <a:t>⚠  </a:t>
+            </a:r>
+            <a:r>
+              <a:rPr dirty="0" sz="1100" lang="en-US">
+                <a:solidFill>
+                  <a:srgbClr val="FFFFFF"/>
+                </a:solidFill>
+                <a:latin typeface="Calibri" pitchFamily="34" charset="0"/>
+                <a:ea typeface="Calibri" pitchFamily="34" charset="-122"/>
+                <a:cs typeface="Calibri" pitchFamily="34" charset="-120"/>
+              </a:rPr>
+              <a:t>Hold red SOS button 3 seconds (SVG ring fills)</a:t>
+            </a:r>
+            <a:endParaRPr dirty="0" sz="1100" lang="en-US"/>
+          </a:p>
+        </p:txBody>
+      </p:sp>
+      <p:sp>
+        <p:nvSpPr>
+          <p:cNvPr id="1048613" name="Text 17"/>
+          <p:cNvSpPr/>
+          <p:nvPr/>
+        </p:nvSpPr>
+        <p:spPr>
+          <a:xfrm>
+            <a:off x="4828032" y="1911096"/>
+            <a:ext cx="3749040" cy="320040"/>
+          </a:xfrm>
+          <a:prstGeom prst="rect"/>
+          <a:noFill/>
+        </p:spPr>
+        <p:txBody>
+          <a:bodyPr anchor="ctr" bIns="0" lIns="0" rIns="0" rtlCol="0" tIns="0" wrap="square"/>
+          <a:p>
+            <a:pPr indent="0" marL="0">
+              <a:buNone/>
+            </a:pPr>
+            <a:r>
+              <a:rPr b="1" dirty="0" sz="1100" lang="en-US">
+                <a:solidFill>
+                  <a:srgbClr val="EF4444"/>
+                </a:solidFill>
+                <a:latin typeface="Calibri" pitchFamily="34" charset="0"/>
+                <a:ea typeface="Calibri" pitchFamily="34" charset="-122"/>
+                <a:cs typeface="Calibri" pitchFamily="34" charset="-120"/>
+              </a:rPr>
+              <a:t>⚠  </a:t>
+            </a:r>
+            <a:r>
+              <a:rPr dirty="0" sz="1100" lang="en-US">
+                <a:solidFill>
+                  <a:srgbClr val="FFFFFF"/>
+                </a:solidFill>
+                <a:latin typeface="Calibri" pitchFamily="34" charset="0"/>
+                <a:ea typeface="Calibri" pitchFamily="34" charset="-122"/>
+                <a:cs typeface="Calibri" pitchFamily="34" charset="-120"/>
+              </a:rPr>
+              <a:t>Haptic feedback: [200ms, 100ms, 200ms] vibration</a:t>
+            </a:r>
+            <a:endParaRPr dirty="0" sz="1100" lang="en-US"/>
+          </a:p>
+        </p:txBody>
+      </p:sp>
+      <p:sp>
+        <p:nvSpPr>
+          <p:cNvPr id="1048614" name="Text 18"/>
+          <p:cNvSpPr/>
+          <p:nvPr/>
+        </p:nvSpPr>
+        <p:spPr>
+          <a:xfrm>
+            <a:off x="4828032" y="2249424"/>
+            <a:ext cx="3749040" cy="320040"/>
+          </a:xfrm>
+          <a:prstGeom prst="rect"/>
+          <a:noFill/>
+        </p:spPr>
+        <p:txBody>
+          <a:bodyPr anchor="ctr" bIns="0" lIns="0" rIns="0" rtlCol="0" tIns="0" wrap="square"/>
+          <a:p>
+            <a:pPr indent="0" marL="0">
+              <a:buNone/>
+            </a:pPr>
+            <a:r>
+              <a:rPr b="1" dirty="0" sz="1100" lang="en-US">
+                <a:solidFill>
+                  <a:srgbClr val="EF4444"/>
+                </a:solidFill>
+                <a:latin typeface="Calibri" pitchFamily="34" charset="0"/>
+                <a:ea typeface="Calibri" pitchFamily="34" charset="-122"/>
+                <a:cs typeface="Calibri" pitchFamily="34" charset="-120"/>
+              </a:rPr>
+              <a:t>⚠  </a:t>
+            </a:r>
+            <a:r>
+              <a:rPr dirty="0" sz="1100" lang="en-US">
+                <a:solidFill>
+                  <a:srgbClr val="FFFFFF"/>
+                </a:solidFill>
+                <a:latin typeface="Calibri" pitchFamily="34" charset="0"/>
+                <a:ea typeface="Calibri" pitchFamily="34" charset="-122"/>
+                <a:cs typeface="Calibri" pitchFamily="34" charset="-120"/>
+              </a:rPr>
+              <a:t>2:45 escalation countdown begins</a:t>
+            </a:r>
+            <a:endParaRPr dirty="0" sz="1100" lang="en-US"/>
+          </a:p>
+        </p:txBody>
+      </p:sp>
+      <p:sp>
+        <p:nvSpPr>
+          <p:cNvPr id="1048615" name="Text 19"/>
+          <p:cNvSpPr/>
+          <p:nvPr/>
+        </p:nvSpPr>
+        <p:spPr>
+          <a:xfrm>
+            <a:off x="4828032" y="2587752"/>
+            <a:ext cx="3749040" cy="320040"/>
+          </a:xfrm>
+          <a:prstGeom prst="rect"/>
+          <a:noFill/>
+        </p:spPr>
+        <p:txBody>
+          <a:bodyPr anchor="ctr" bIns="0" lIns="0" rIns="0" rtlCol="0" tIns="0" wrap="square"/>
+          <a:p>
+            <a:pPr indent="0" marL="0">
+              <a:buNone/>
+            </a:pPr>
+            <a:r>
+              <a:rPr b="1" dirty="0" sz="1100" lang="en-US">
+                <a:solidFill>
+                  <a:srgbClr val="EF4444"/>
+                </a:solidFill>
+                <a:latin typeface="Calibri" pitchFamily="34" charset="0"/>
+                <a:ea typeface="Calibri" pitchFamily="34" charset="-122"/>
+                <a:cs typeface="Calibri" pitchFamily="34" charset="-120"/>
+              </a:rPr>
+              <a:t>⚠  </a:t>
+            </a:r>
+            <a:r>
+              <a:rPr dirty="0" sz="1100" lang="en-US">
+                <a:solidFill>
+                  <a:srgbClr val="FCA5A5"/>
+                </a:solidFill>
+                <a:latin typeface="Calibri" pitchFamily="34" charset="0"/>
+                <a:ea typeface="Calibri" pitchFamily="34" charset="-122"/>
+                <a:cs typeface="Calibri" pitchFamily="34" charset="-120"/>
+              </a:rPr>
+              <a:t>Live GPS streams to trusted contacts</a:t>
+            </a:r>
+            <a:endParaRPr dirty="0" sz="1100" lang="en-US"/>
+          </a:p>
+        </p:txBody>
+      </p:sp>
+      <p:sp>
+        <p:nvSpPr>
+          <p:cNvPr id="1048616" name="Text 20"/>
+          <p:cNvSpPr/>
+          <p:nvPr/>
+        </p:nvSpPr>
+        <p:spPr>
+          <a:xfrm>
+            <a:off x="4828032" y="2926080"/>
+            <a:ext cx="3749040" cy="320040"/>
+          </a:xfrm>
+          <a:prstGeom prst="rect"/>
+          <a:noFill/>
+        </p:spPr>
+        <p:txBody>
+          <a:bodyPr anchor="ctr" bIns="0" lIns="0" rIns="0" rtlCol="0" tIns="0" wrap="square"/>
+          <a:p>
+            <a:pPr indent="0" marL="0">
+              <a:buNone/>
+            </a:pPr>
+            <a:r>
+              <a:rPr b="1" dirty="0" sz="1100" lang="en-US">
+                <a:solidFill>
+                  <a:srgbClr val="EF4444"/>
+                </a:solidFill>
+                <a:latin typeface="Calibri" pitchFamily="34" charset="0"/>
+                <a:ea typeface="Calibri" pitchFamily="34" charset="-122"/>
+                <a:cs typeface="Calibri" pitchFamily="34" charset="-120"/>
+              </a:rPr>
+              <a:t>⚠  </a:t>
+            </a:r>
+            <a:r>
+              <a:rPr dirty="0" sz="1100" lang="en-US">
+                <a:solidFill>
+                  <a:srgbClr val="FFFFFF"/>
+                </a:solidFill>
+                <a:latin typeface="Calibri" pitchFamily="34" charset="0"/>
+                <a:ea typeface="Calibri" pitchFamily="34" charset="-122"/>
+                <a:cs typeface="Calibri" pitchFamily="34" charset="-120"/>
+              </a:rPr>
+              <a:t>“I’m safe — cancel” override any time before 2:45</a:t>
+            </a:r>
+            <a:endParaRPr dirty="0" sz="1100" lang="en-US"/>
+          </a:p>
+        </p:txBody>
+      </p:sp>
+      <p:sp>
+        <p:nvSpPr>
+          <p:cNvPr id="1048617" name="Text 21"/>
+          <p:cNvSpPr/>
+          <p:nvPr/>
+        </p:nvSpPr>
+        <p:spPr>
+          <a:xfrm>
+            <a:off x="4828032" y="3264408"/>
+            <a:ext cx="3749040" cy="320040"/>
+          </a:xfrm>
+          <a:prstGeom prst="rect"/>
+          <a:noFill/>
+        </p:spPr>
+        <p:txBody>
+          <a:bodyPr anchor="ctr" bIns="0" lIns="0" rIns="0" rtlCol="0" tIns="0" wrap="square"/>
+          <a:p>
+            <a:pPr indent="0" marL="0">
+              <a:buNone/>
+            </a:pPr>
+            <a:r>
+              <a:rPr b="1" dirty="0" sz="1100" lang="en-US">
+                <a:solidFill>
+                  <a:srgbClr val="EF4444"/>
+                </a:solidFill>
+                <a:latin typeface="Calibri" pitchFamily="34" charset="0"/>
+                <a:ea typeface="Calibri" pitchFamily="34" charset="-122"/>
+                <a:cs typeface="Calibri" pitchFamily="34" charset="-120"/>
+              </a:rPr>
+              <a:t>⚠  </a:t>
+            </a:r>
+            <a:r>
+              <a:rPr dirty="0" sz="1100" lang="en-US">
+                <a:solidFill>
+                  <a:srgbClr val="FCA5A5"/>
+                </a:solidFill>
+                <a:latin typeface="Calibri" pitchFamily="34" charset="0"/>
+                <a:ea typeface="Calibri" pitchFamily="34" charset="-122"/>
+                <a:cs typeface="Calibri" pitchFamily="34" charset="-120"/>
+              </a:rPr>
+              <a:t>Timer expires → contacts see location on red-tinted map</a:t>
+            </a:r>
+            <a:endParaRPr dirty="0" sz="1100" lang="en-US"/>
+          </a:p>
+        </p:txBody>
+      </p:sp>
+      <p:sp>
+        <p:nvSpPr>
+          <p:cNvPr id="1048618" name="Shape 22"/>
+          <p:cNvSpPr/>
+          <p:nvPr/>
+        </p:nvSpPr>
+        <p:spPr>
+          <a:xfrm>
+            <a:off x="4709160" y="4133088"/>
+            <a:ext cx="4023360" cy="420624"/>
+          </a:xfrm>
+          <a:prstGeom prst="rect"/>
+          <a:solidFill>
+            <a:srgbClr val="EF4444"/>
+          </a:solidFill>
+          <a:ln w="12700">
+            <a:solidFill>
+              <a:srgbClr val="EF4444"/>
+            </a:solidFill>
+            <a:prstDash val="solid"/>
+          </a:ln>
+        </p:spPr>
+      </p:sp>
+      <p:sp>
+        <p:nvSpPr>
+          <p:cNvPr id="1048619" name="Text 23"/>
+          <p:cNvSpPr/>
+          <p:nvPr/>
+        </p:nvSpPr>
+        <p:spPr>
+          <a:xfrm>
+            <a:off x="4828032" y="4178808"/>
+            <a:ext cx="3840480" cy="329184"/>
+          </a:xfrm>
+          <a:prstGeom prst="rect"/>
+          <a:noFill/>
+        </p:spPr>
+        <p:txBody>
+          <a:bodyPr anchor="ctr" bIns="0" lIns="0" rIns="0" rtlCol="0" tIns="0" wrap="square"/>
+          <a:p>
+            <a:pPr indent="0" marL="0">
+              <a:buNone/>
+            </a:pPr>
+            <a:r>
+              <a:rPr b="1" dirty="0" sz="1000" lang="en-US">
+                <a:solidFill>
+                  <a:srgbClr val="FFFFFF"/>
+                </a:solidFill>
+                <a:latin typeface="Calibri" pitchFamily="34" charset="0"/>
+                <a:ea typeface="Calibri" pitchFamily="34" charset="-122"/>
+                <a:cs typeface="Calibri" pitchFamily="34" charset="-120"/>
+              </a:rPr>
+              <a:t>Shake-to-SOS hint  ·  Pocket-bump safe: 3-second hold prevents false alarms</a:t>
+            </a:r>
+            <a:endParaRPr dirty="0" sz="1000" lang="en-US"/>
+          </a:p>
+        </p:txBody>
+      </p:sp>
+    </p:spTree>
+  </p:cSld>
+  <p:clrMapOvr>
+    <a:masterClrMapping/>
+  </p:clrMapOvr>
+</p:sld>
+</file>
+
+<file path=ppt/slides/slide6.xml><?xml version="1.0" encoding="utf-8"?>
+<p:sld xmlns:a="http://schemas.openxmlformats.org/drawingml/2006/main" xmlns:r="http://schemas.openxmlformats.org/officeDocument/2006/relationships" xmlns:p="http://schemas.openxmlformats.org/presentationml/2006/main">
+  <p:cSld name="Slide 6">
     <p:bg>
       <p:bgPr>
         <a:solidFill>
@@ -4642,7 +6209,7 @@
       </p:pic>
       <p:sp>
         <p:nvSpPr>
-          <p:cNvPr id="1048624" name="Text 0"/>
+          <p:cNvPr id="1048641" name="Text 0"/>
           <p:cNvSpPr/>
           <p:nvPr/>
         </p:nvSpPr>
@@ -4669,7 +6236,7 @@
                 <a:ea typeface="Calibri" pitchFamily="34" charset="-122"/>
                 <a:cs typeface="Calibri" pitchFamily="34" charset="-120"/>
               </a:rPr>
-              <a:t>THE USER</a:t>
+              <a:t>LIVE DEMO</a:t>
             </a:r>
             <a:endParaRPr dirty="0" sz="900" lang="en-US"/>
           </a:p>
@@ -4677,14 +6244,49 @@
       </p:sp>
       <p:sp>
         <p:nvSpPr>
-          <p:cNvPr id="1048625" name="Shape 1"/>
-          <p:cNvSpPr/>
-          <p:nvPr/>
-        </p:nvSpPr>
-        <p:spPr>
-          <a:xfrm>
-            <a:off x="411480" y="530352"/>
-            <a:ext cx="8321040" cy="4297680"/>
+          <p:cNvPr id="1048642" name="Text 1"/>
+          <p:cNvSpPr/>
+          <p:nvPr/>
+        </p:nvSpPr>
+        <p:spPr>
+          <a:xfrm>
+            <a:off x="411480" y="438912"/>
+            <a:ext cx="7589520" cy="475488"/>
+          </a:xfrm>
+          <a:prstGeom prst="rect"/>
+          <a:noFill/>
+        </p:spPr>
+        <p:txBody>
+          <a:bodyPr anchor="ctr" bIns="0" lIns="0" rIns="0" rtlCol="0" tIns="0" wrap="square"/>
+          <a:p>
+            <a:pPr indent="0" marL="0">
+              <a:buNone/>
+            </a:pPr>
+            <a:r>
+              <a:rPr b="1" dirty="0" sz="2600" lang="en-US">
+                <a:solidFill>
+                  <a:srgbClr val="0A1E3F"/>
+                </a:solidFill>
+                <a:latin typeface="Calibri" pitchFamily="34" charset="0"/>
+                <a:ea typeface="Calibri" pitchFamily="34" charset="-122"/>
+                <a:cs typeface="Calibri" pitchFamily="34" charset="-120"/>
+              </a:rPr>
+              <a:t>What you will see in the next 90 seconds</a:t>
+            </a:r>
+            <a:endParaRPr dirty="0" sz="2600" lang="en-US"/>
+          </a:p>
+        </p:txBody>
+      </p:sp>
+      <p:sp>
+        <p:nvSpPr>
+          <p:cNvPr id="1048643" name="Shape 2"/>
+          <p:cNvSpPr/>
+          <p:nvPr/>
+        </p:nvSpPr>
+        <p:spPr>
+          <a:xfrm>
+            <a:off x="411480" y="1078992"/>
+            <a:ext cx="1554480" cy="3017520"/>
           </a:xfrm>
           <a:prstGeom prst="rect"/>
           <a:solidFill>
@@ -4700,92 +6302,22 @@
       </p:sp>
       <p:sp>
         <p:nvSpPr>
-          <p:cNvPr id="1048626" name="Text 2"/>
-          <p:cNvSpPr/>
-          <p:nvPr/>
-        </p:nvSpPr>
-        <p:spPr>
-          <a:xfrm>
-            <a:off x="594360" y="658368"/>
-            <a:ext cx="4572000" cy="594360"/>
-          </a:xfrm>
-          <a:prstGeom prst="rect"/>
-          <a:noFill/>
-        </p:spPr>
-        <p:txBody>
-          <a:bodyPr anchor="ctr" bIns="0" lIns="0" rIns="0" rtlCol="0" tIns="0" wrap="square"/>
-          <a:p>
-            <a:pPr indent="0" marL="0">
-              <a:buNone/>
-            </a:pPr>
-            <a:r>
-              <a:rPr b="1" dirty="0" sz="3400" lang="en-US">
-                <a:solidFill>
-                  <a:srgbClr val="FFFFFF"/>
-                </a:solidFill>
-                <a:latin typeface="Calibri" pitchFamily="34" charset="0"/>
-                <a:ea typeface="Calibri" pitchFamily="34" charset="-122"/>
-                <a:cs typeface="Calibri" pitchFamily="34" charset="-120"/>
-              </a:rPr>
-              <a:t>Ada Umeh</a:t>
-            </a:r>
-            <a:endParaRPr dirty="0" sz="3400" lang="en-US"/>
-          </a:p>
-        </p:txBody>
-      </p:sp>
-      <p:sp>
-        <p:nvSpPr>
-          <p:cNvPr id="1048627" name="Text 3"/>
-          <p:cNvSpPr/>
-          <p:nvPr/>
-        </p:nvSpPr>
-        <p:spPr>
-          <a:xfrm>
-            <a:off x="594360" y="1243584"/>
-            <a:ext cx="7589520" cy="274320"/>
-          </a:xfrm>
-          <a:prstGeom prst="rect"/>
-          <a:noFill/>
-        </p:spPr>
-        <p:txBody>
-          <a:bodyPr anchor="ctr" bIns="0" lIns="0" rIns="0" rtlCol="0" tIns="0" wrap="square"/>
-          <a:p>
-            <a:pPr indent="0" marL="0">
-              <a:buNone/>
-            </a:pPr>
-            <a:r>
-              <a:rPr dirty="0" sz="1300" lang="en-US">
-                <a:solidFill>
-                  <a:srgbClr val="2DD4BF"/>
-                </a:solidFill>
-                <a:latin typeface="Calibri" pitchFamily="34" charset="0"/>
-                <a:ea typeface="Calibri" pitchFamily="34" charset="-122"/>
-                <a:cs typeface="Calibri" pitchFamily="34" charset="-120"/>
-              </a:rPr>
-              <a:t>20 years old  ·  300-level Biochemistry  ·  University of Nigeria, Nsukka</a:t>
-            </a:r>
-            <a:endParaRPr dirty="0" sz="1300" lang="en-US"/>
-          </a:p>
-        </p:txBody>
-      </p:sp>
-      <p:sp>
-        <p:nvSpPr>
-          <p:cNvPr id="1048628" name="Shape 4"/>
-          <p:cNvSpPr/>
-          <p:nvPr/>
-        </p:nvSpPr>
-        <p:spPr>
-          <a:xfrm>
-            <a:off x="594360" y="1572768"/>
-            <a:ext cx="7955280" cy="13716"/>
+          <p:cNvPr id="1048644" name="Shape 3"/>
+          <p:cNvSpPr/>
+          <p:nvPr/>
+        </p:nvSpPr>
+        <p:spPr>
+          <a:xfrm>
+            <a:off x="411480" y="1078992"/>
+            <a:ext cx="1554480" cy="457200"/>
           </a:xfrm>
           <a:prstGeom prst="rect"/>
           <a:solidFill>
-            <a:srgbClr val="1D3A5F"/>
+            <a:srgbClr val="2DD4BF"/>
           </a:solidFill>
           <a:ln w="12700">
             <a:solidFill>
-              <a:srgbClr val="1D3A5F"/>
+              <a:srgbClr val="2DD4BF"/>
             </a:solidFill>
             <a:prstDash val="solid"/>
           </a:ln>
@@ -4793,61 +6325,26 @@
       </p:sp>
       <p:sp>
         <p:nvSpPr>
-          <p:cNvPr id="1048629" name="Text 5"/>
-          <p:cNvSpPr/>
-          <p:nvPr/>
-        </p:nvSpPr>
-        <p:spPr>
-          <a:xfrm>
-            <a:off x="594360" y="1719072"/>
-            <a:ext cx="2560320" cy="201168"/>
-          </a:xfrm>
-          <a:prstGeom prst="rect"/>
-          <a:noFill/>
-        </p:spPr>
-        <p:txBody>
-          <a:bodyPr anchor="ctr" bIns="0" lIns="0" rIns="0" rtlCol="0" tIns="0" wrap="square"/>
-          <a:p>
-            <a:pPr indent="0" marL="0">
-              <a:buNone/>
-            </a:pPr>
-            <a:r>
-              <a:rPr dirty="0" sz="850" kern="0" lang="en-US" spc="200">
-                <a:solidFill>
-                  <a:srgbClr val="2DD4BF"/>
-                </a:solidFill>
-                <a:latin typeface="Calibri" pitchFamily="34" charset="0"/>
-                <a:ea typeface="Calibri" pitchFamily="34" charset="-122"/>
-                <a:cs typeface="Calibri" pitchFamily="34" charset="-120"/>
-              </a:rPr>
-              <a:t>DAILY ROUTINE</a:t>
-            </a:r>
-            <a:endParaRPr dirty="0" sz="850" lang="en-US"/>
-          </a:p>
-        </p:txBody>
-      </p:sp>
-      <p:sp>
-        <p:nvSpPr>
-          <p:cNvPr id="1048630" name="Text 6"/>
-          <p:cNvSpPr/>
-          <p:nvPr/>
-        </p:nvSpPr>
-        <p:spPr>
-          <a:xfrm>
-            <a:off x="594360" y="1920240"/>
-            <a:ext cx="2560320" cy="411480"/>
-          </a:xfrm>
-          <a:prstGeom prst="rect"/>
-          <a:noFill/>
-        </p:spPr>
-        <p:txBody>
-          <a:bodyPr anchor="ctr" bIns="0" lIns="0" rIns="0" rtlCol="0" tIns="0" wrap="square"/>
-          <a:p>
-            <a:pPr indent="0" marL="0">
-              <a:buNone/>
-            </a:pPr>
-            <a:r>
-              <a:rPr b="1" dirty="0" sz="1400" lang="en-US">
+          <p:cNvPr id="1048645" name="Text 4"/>
+          <p:cNvSpPr/>
+          <p:nvPr/>
+        </p:nvSpPr>
+        <p:spPr>
+          <a:xfrm>
+            <a:off x="457200" y="1115568"/>
+            <a:ext cx="457200" cy="384048"/>
+          </a:xfrm>
+          <a:prstGeom prst="rect"/>
+          <a:noFill/>
+        </p:spPr>
+        <p:txBody>
+          <a:bodyPr anchor="ctr" bIns="0" lIns="0" rIns="0" rtlCol="0" tIns="0" wrap="square"/>
+          <a:p>
+            <a:pPr indent="0" marL="0">
+              <a:buNone/>
+            </a:pPr>
+            <a:r>
+              <a:rPr b="1" dirty="0" sz="2200" lang="en-US">
                 <a:solidFill>
                   <a:srgbClr val="FFFFFF"/>
                 </a:solidFill>
@@ -4855,34 +6352,69 @@
                 <a:ea typeface="Calibri" pitchFamily="34" charset="-122"/>
                 <a:cs typeface="Calibri" pitchFamily="34" charset="-120"/>
               </a:rPr>
-              <a:t>Library until 9pm</a:t>
-            </a:r>
-            <a:endParaRPr dirty="0" sz="1400" lang="en-US"/>
-          </a:p>
-        </p:txBody>
-      </p:sp>
-      <p:sp>
-        <p:nvSpPr>
-          <p:cNvPr id="1048631" name="Text 7"/>
-          <p:cNvSpPr/>
-          <p:nvPr/>
-        </p:nvSpPr>
-        <p:spPr>
-          <a:xfrm>
-            <a:off x="594360" y="2359152"/>
-            <a:ext cx="2560320" cy="1280160"/>
-          </a:xfrm>
-          <a:prstGeom prst="rect"/>
-          <a:noFill/>
-        </p:spPr>
-        <p:txBody>
-          <a:bodyPr anchor="ctr" bIns="0" lIns="0" rIns="0" rtlCol="0" tIns="0" wrap="square"/>
-          <a:p>
-            <a:pPr indent="0" marL="0">
-              <a:buNone/>
-            </a:pPr>
-            <a:r>
-              <a:rPr dirty="0" sz="1150" lang="en-US">
+              <a:t>1</a:t>
+            </a:r>
+            <a:endParaRPr dirty="0" sz="2200" lang="en-US"/>
+          </a:p>
+        </p:txBody>
+      </p:sp>
+      <p:sp>
+        <p:nvSpPr>
+          <p:cNvPr id="1048646" name="Text 5"/>
+          <p:cNvSpPr/>
+          <p:nvPr/>
+        </p:nvSpPr>
+        <p:spPr>
+          <a:xfrm>
+            <a:off x="868680" y="1152144"/>
+            <a:ext cx="1051560" cy="347472"/>
+          </a:xfrm>
+          <a:prstGeom prst="rect"/>
+          <a:noFill/>
+        </p:spPr>
+        <p:txBody>
+          <a:bodyPr anchor="ctr" bIns="0" lIns="0" rIns="0" rtlCol="0" tIns="0" wrap="square"/>
+          <a:p>
+            <a:pPr indent="0" marL="0">
+              <a:buNone/>
+            </a:pPr>
+            <a:r>
+              <a:rPr b="1" dirty="0" sz="1100" lang="en-US">
+                <a:solidFill>
+                  <a:srgbClr val="FFFFFF"/>
+                </a:solidFill>
+                <a:latin typeface="Calibri" pitchFamily="34" charset="0"/>
+                <a:ea typeface="Calibri" pitchFamily="34" charset="-122"/>
+                <a:cs typeface="Calibri" pitchFamily="34" charset="-120"/>
+              </a:rPr>
+              <a:t>Onboarding</a:t>
+            </a:r>
+            <a:endParaRPr dirty="0" sz="1100" lang="en-US"/>
+          </a:p>
+        </p:txBody>
+      </p:sp>
+      <p:sp>
+        <p:nvSpPr>
+          <p:cNvPr id="1048647" name="Text 6"/>
+          <p:cNvSpPr/>
+          <p:nvPr/>
+        </p:nvSpPr>
+        <p:spPr>
+          <a:xfrm>
+            <a:off x="502920" y="1664208"/>
+            <a:ext cx="1371600" cy="2286000"/>
+          </a:xfrm>
+          <a:prstGeom prst="rect"/>
+          <a:noFill/>
+        </p:spPr>
+        <p:txBody>
+          <a:bodyPr anchor="ctr" bIns="0" lIns="0" rIns="0" rtlCol="0" tIns="0" wrap="square"/>
+          <a:p>
+            <a:pPr indent="0" marL="0">
+              <a:buNone/>
+            </a:pPr>
+            <a:r>
+              <a:rPr dirty="0" sz="1250" lang="en-US">
                 <a:solidFill>
                   <a:srgbClr val="A0B8D0"/>
                 </a:solidFill>
@@ -4890,104 +6422,16 @@
                 <a:ea typeface="Calibri" pitchFamily="34" charset="-122"/>
                 <a:cs typeface="Calibri" pitchFamily="34" charset="-120"/>
               </a:rPr>
-              <a:t>Lectures end at 6pm. She stays late in the library, then walks back to her hostel through dimly-lit campus paths.</a:t>
-            </a:r>
-            <a:endParaRPr dirty="0" sz="1150" lang="en-US"/>
-          </a:p>
-        </p:txBody>
-      </p:sp>
-      <p:sp>
-        <p:nvSpPr>
-          <p:cNvPr id="1048632" name="Text 8"/>
-          <p:cNvSpPr/>
-          <p:nvPr/>
-        </p:nvSpPr>
-        <p:spPr>
-          <a:xfrm>
-            <a:off x="3337560" y="1719072"/>
-            <a:ext cx="2560320" cy="201168"/>
-          </a:xfrm>
-          <a:prstGeom prst="rect"/>
-          <a:noFill/>
-        </p:spPr>
-        <p:txBody>
-          <a:bodyPr anchor="ctr" bIns="0" lIns="0" rIns="0" rtlCol="0" tIns="0" wrap="square"/>
-          <a:p>
-            <a:pPr indent="0" marL="0">
-              <a:buNone/>
-            </a:pPr>
-            <a:r>
-              <a:rPr dirty="0" sz="850" kern="0" lang="en-US" spc="200">
-                <a:solidFill>
-                  <a:srgbClr val="86EFAC"/>
-                </a:solidFill>
-                <a:latin typeface="Calibri" pitchFamily="34" charset="0"/>
-                <a:ea typeface="Calibri" pitchFamily="34" charset="-122"/>
-                <a:cs typeface="Calibri" pitchFamily="34" charset="-120"/>
-              </a:rPr>
-              <a:t>CURRENT WORKAROUND</a:t>
-            </a:r>
-            <a:endParaRPr dirty="0" sz="850" lang="en-US"/>
-          </a:p>
-        </p:txBody>
-      </p:sp>
-      <p:sp>
-        <p:nvSpPr>
-          <p:cNvPr id="1048633" name="Text 9"/>
-          <p:cNvSpPr/>
-          <p:nvPr/>
-        </p:nvSpPr>
-        <p:spPr>
-          <a:xfrm>
-            <a:off x="3337560" y="1920240"/>
-            <a:ext cx="2560320" cy="411480"/>
-          </a:xfrm>
-          <a:prstGeom prst="rect"/>
-          <a:noFill/>
-        </p:spPr>
-        <p:txBody>
-          <a:bodyPr anchor="ctr" bIns="0" lIns="0" rIns="0" rtlCol="0" tIns="0" wrap="square"/>
-          <a:p>
-            <a:pPr indent="0" marL="0">
-              <a:buNone/>
-            </a:pPr>
-            <a:r>
-              <a:rPr b="1" dirty="0" sz="1400" lang="en-US">
-                <a:solidFill>
-                  <a:srgbClr val="FFFFFF"/>
-                </a:solidFill>
-                <a:latin typeface="Calibri" pitchFamily="34" charset="0"/>
-                <a:ea typeface="Calibri" pitchFamily="34" charset="-122"/>
-                <a:cs typeface="Calibri" pitchFamily="34" charset="-120"/>
-              </a:rPr>
-              <a:t>Manual, fragmented</a:t>
-            </a:r>
-            <a:endParaRPr dirty="0" sz="1400" lang="en-US"/>
-          </a:p>
-        </p:txBody>
-      </p:sp>
-      <p:sp>
-        <p:nvSpPr>
-          <p:cNvPr id="1048634" name="Text 10"/>
-          <p:cNvSpPr/>
-          <p:nvPr/>
-        </p:nvSpPr>
-        <p:spPr>
-          <a:xfrm>
-            <a:off x="3337560" y="2359152"/>
-            <a:ext cx="2560320" cy="1280160"/>
-          </a:xfrm>
-          <a:prstGeom prst="rect"/>
-          <a:noFill/>
-        </p:spPr>
-        <p:txBody>
-          <a:bodyPr anchor="ctr" bIns="0" lIns="0" rIns="0" rtlCol="0" tIns="0" wrap="square"/>
-          <a:p>
-            <a:pPr indent="0" marL="0">
-              <a:buNone/>
-            </a:pPr>
-            <a:r>
-              <a:rPr dirty="0" sz="1150" lang="en-US">
+              <a:t>OTP screen</a:t>
+            </a:r>
+            <a:endParaRPr dirty="0" sz="1250" lang="en-US"/>
+          </a:p>
+          <a:p>
+            <a:pPr indent="0" marL="0">
+              <a:buNone/>
+            </a:pPr>
+            <a:r>
+              <a:rPr dirty="0" sz="1250" lang="en-US">
                 <a:solidFill>
                   <a:srgbClr val="A0B8D0"/>
                 </a:solidFill>
@@ -4995,104 +6439,16 @@
                 <a:ea typeface="Calibri" pitchFamily="34" charset="-122"/>
                 <a:cs typeface="Calibri" pitchFamily="34" charset="-120"/>
               </a:rPr>
-              <a:t>Calls her boyfriend on the walk. Has campus security numbers saved but has never tested if they pick up.</a:t>
-            </a:r>
-            <a:endParaRPr dirty="0" sz="1150" lang="en-US"/>
-          </a:p>
-        </p:txBody>
-      </p:sp>
-      <p:sp>
-        <p:nvSpPr>
-          <p:cNvPr id="1048635" name="Text 11"/>
-          <p:cNvSpPr/>
-          <p:nvPr/>
-        </p:nvSpPr>
-        <p:spPr>
-          <a:xfrm>
-            <a:off x="6080760" y="1719072"/>
-            <a:ext cx="2560320" cy="201168"/>
-          </a:xfrm>
-          <a:prstGeom prst="rect"/>
-          <a:noFill/>
-        </p:spPr>
-        <p:txBody>
-          <a:bodyPr anchor="ctr" bIns="0" lIns="0" rIns="0" rtlCol="0" tIns="0" wrap="square"/>
-          <a:p>
-            <a:pPr indent="0" marL="0">
-              <a:buNone/>
-            </a:pPr>
-            <a:r>
-              <a:rPr dirty="0" sz="850" kern="0" lang="en-US" spc="200">
-                <a:solidFill>
-                  <a:srgbClr val="EF4444"/>
-                </a:solidFill>
-                <a:latin typeface="Calibri" pitchFamily="34" charset="0"/>
-                <a:ea typeface="Calibri" pitchFamily="34" charset="-122"/>
-                <a:cs typeface="Calibri" pitchFamily="34" charset="-120"/>
-              </a:rPr>
-              <a:t>TOP FRUSTRATION</a:t>
-            </a:r>
-            <a:endParaRPr dirty="0" sz="850" lang="en-US"/>
-          </a:p>
-        </p:txBody>
-      </p:sp>
-      <p:sp>
-        <p:nvSpPr>
-          <p:cNvPr id="1048636" name="Text 12"/>
-          <p:cNvSpPr/>
-          <p:nvPr/>
-        </p:nvSpPr>
-        <p:spPr>
-          <a:xfrm>
-            <a:off x="6080760" y="1920240"/>
-            <a:ext cx="2560320" cy="411480"/>
-          </a:xfrm>
-          <a:prstGeom prst="rect"/>
-          <a:noFill/>
-        </p:spPr>
-        <p:txBody>
-          <a:bodyPr anchor="ctr" bIns="0" lIns="0" rIns="0" rtlCol="0" tIns="0" wrap="square"/>
-          <a:p>
-            <a:pPr indent="0" marL="0">
-              <a:buNone/>
-            </a:pPr>
-            <a:r>
-              <a:rPr b="1" dirty="0" sz="1400" lang="en-US">
-                <a:solidFill>
-                  <a:srgbClr val="FFFFFF"/>
-                </a:solidFill>
-                <a:latin typeface="Calibri" pitchFamily="34" charset="0"/>
-                <a:ea typeface="Calibri" pitchFamily="34" charset="-122"/>
-                <a:cs typeface="Calibri" pitchFamily="34" charset="-120"/>
-              </a:rPr>
-              <a:t>The walk after 8pm</a:t>
-            </a:r>
-            <a:endParaRPr dirty="0" sz="1400" lang="en-US"/>
-          </a:p>
-        </p:txBody>
-      </p:sp>
-      <p:sp>
-        <p:nvSpPr>
-          <p:cNvPr id="1048637" name="Text 13"/>
-          <p:cNvSpPr/>
-          <p:nvPr/>
-        </p:nvSpPr>
-        <p:spPr>
-          <a:xfrm>
-            <a:off x="6080760" y="2359152"/>
-            <a:ext cx="2560320" cy="1280160"/>
-          </a:xfrm>
-          <a:prstGeom prst="rect"/>
-          <a:noFill/>
-        </p:spPr>
-        <p:txBody>
-          <a:bodyPr anchor="ctr" bIns="0" lIns="0" rIns="0" rtlCol="0" tIns="0" wrap="square"/>
-          <a:p>
-            <a:pPr indent="0" marL="0">
-              <a:buNone/>
-            </a:pPr>
-            <a:r>
-              <a:rPr dirty="0" sz="1150" lang="en-US">
+              <a:t>Demo code:</a:t>
+            </a:r>
+            <a:endParaRPr dirty="0" sz="1250" lang="en-US"/>
+          </a:p>
+          <a:p>
+            <a:pPr indent="0" marL="0">
+              <a:buNone/>
+            </a:pPr>
+            <a:r>
+              <a:rPr dirty="0" sz="1250" lang="en-US">
                 <a:solidFill>
                   <a:srgbClr val="A0B8D0"/>
                 </a:solidFill>
@@ -5100,239 +6456,22 @@
                 <a:ea typeface="Calibri" pitchFamily="34" charset="-122"/>
                 <a:cs typeface="Calibri" pitchFamily="34" charset="-120"/>
               </a:rPr>
-              <a:t>She rushes. Watches every shadow. Doesn’t enjoy late library sessions because the walk home is always anxious.</a:t>
-            </a:r>
-            <a:endParaRPr dirty="0" sz="1150" lang="en-US"/>
-          </a:p>
-        </p:txBody>
-      </p:sp>
-      <p:sp>
-        <p:nvSpPr>
-          <p:cNvPr id="1048638" name="Shape 14"/>
-          <p:cNvSpPr/>
-          <p:nvPr/>
-        </p:nvSpPr>
-        <p:spPr>
-          <a:xfrm>
-            <a:off x="594360" y="3703320"/>
-            <a:ext cx="7955280" cy="822960"/>
-          </a:xfrm>
-          <a:prstGeom prst="rect"/>
-          <a:solidFill>
-            <a:srgbClr val="0D2850"/>
-          </a:solidFill>
-          <a:ln w="12700">
-            <a:solidFill>
-              <a:srgbClr val="0D2850"/>
-            </a:solidFill>
-            <a:prstDash val="solid"/>
-          </a:ln>
-        </p:spPr>
-      </p:sp>
-      <p:sp>
-        <p:nvSpPr>
-          <p:cNvPr id="1048639" name="Text 15"/>
-          <p:cNvSpPr/>
-          <p:nvPr/>
-        </p:nvSpPr>
-        <p:spPr>
-          <a:xfrm>
-            <a:off x="713232" y="3776472"/>
-            <a:ext cx="2286000" cy="228600"/>
-          </a:xfrm>
-          <a:prstGeom prst="rect"/>
-          <a:noFill/>
-        </p:spPr>
-        <p:txBody>
-          <a:bodyPr anchor="ctr" bIns="0" lIns="0" rIns="0" rtlCol="0" tIns="0" wrap="square"/>
-          <a:p>
-            <a:pPr indent="0" marL="0">
-              <a:buNone/>
-            </a:pPr>
-            <a:r>
-              <a:rPr dirty="0" sz="950" lang="en-US">
-                <a:solidFill>
-                  <a:srgbClr val="2DD4BF"/>
-                </a:solidFill>
-                <a:latin typeface="Calibri" pitchFamily="34" charset="0"/>
-                <a:ea typeface="Calibri" pitchFamily="34" charset="-122"/>
-                <a:cs typeface="Calibri" pitchFamily="34" charset="-120"/>
-              </a:rPr>
-              <a:t>“Why she’d use LifeLine:”  </a:t>
-            </a:r>
-            <a:endParaRPr dirty="0" sz="950" lang="en-US"/>
-          </a:p>
-        </p:txBody>
-      </p:sp>
-      <p:sp>
-        <p:nvSpPr>
-          <p:cNvPr id="1048640" name="Text 16"/>
-          <p:cNvSpPr/>
-          <p:nvPr/>
-        </p:nvSpPr>
-        <p:spPr>
-          <a:xfrm>
-            <a:off x="713232" y="3995928"/>
-            <a:ext cx="7772400" cy="457200"/>
-          </a:xfrm>
-          <a:prstGeom prst="rect"/>
-          <a:noFill/>
-        </p:spPr>
-        <p:txBody>
-          <a:bodyPr anchor="ctr" bIns="0" lIns="0" rIns="0" rtlCol="0" tIns="0" wrap="square"/>
-          <a:p>
-            <a:pPr indent="0" marL="0">
-              <a:buNone/>
-            </a:pPr>
-            <a:r>
-              <a:rPr dirty="0" sz="1100" lang="en-US">
-                <a:solidFill>
-                  <a:srgbClr val="C8D9EE"/>
-                </a:solidFill>
-                <a:latin typeface="Calibri" pitchFamily="34" charset="0"/>
-                <a:ea typeface="Calibri" pitchFamily="34" charset="-122"/>
-                <a:cs typeface="Calibri" pitchFamily="34" charset="-120"/>
-              </a:rPr>
-              <a:t>A configured Safe Arrival trip handles the “let mum know I’m home” routine automatically. The SOS gives her real recourse if something feels off on the walk.</a:t>
-            </a:r>
-            <a:endParaRPr dirty="0" sz="1100" lang="en-US"/>
-          </a:p>
-        </p:txBody>
-      </p:sp>
-    </p:spTree>
-  </p:cSld>
-  <p:clrMapOvr>
-    <a:masterClrMapping/>
-  </p:clrMapOvr>
-</p:sld>
-</file>
-
-<file path=ppt/slides/slide5.xml><?xml version="1.0" encoding="utf-8"?>
-<p:sld xmlns:a="http://schemas.openxmlformats.org/drawingml/2006/main" xmlns:r="http://schemas.openxmlformats.org/officeDocument/2006/relationships" xmlns:p="http://schemas.openxmlformats.org/presentationml/2006/main">
-  <p:cSld name="Slide 5">
-    <p:bg>
-      <p:bgPr>
-        <a:solidFill>
-          <a:srgbClr val="F8FAFC"/>
-        </a:solidFill>
-      </p:bgPr>
-    </p:bg>
-    <p:spTree>
-      <p:nvGrpSpPr>
-        <p:cNvPr id="27" name=""/>
-        <p:cNvGrpSpPr/>
-        <p:nvPr/>
-      </p:nvGrpSpPr>
-      <p:grpSpPr>
-        <a:xfrm>
-          <a:off x="0" y="0"/>
-          <a:ext cx="0" cy="0"/>
-          <a:chOff x="0" y="0"/>
-          <a:chExt cx="0" cy="0"/>
-        </a:xfrm>
-      </p:grpSpPr>
-      <p:pic>
-        <p:nvPicPr>
-          <p:cNvPr id="2097156" name="Image 0" descr="/mnt/user-data/uploads/IMG-20260517-WA0000.jpg"/>
-          <p:cNvPicPr>
-            <a:picLocks noChangeAspect="1"/>
-          </p:cNvPicPr>
-          <p:nvPr/>
-        </p:nvPicPr>
-        <p:blipFill>
-          <a:blip xmlns:r="http://schemas.openxmlformats.org/officeDocument/2006/relationships" r:embed="rId1"/>
-          <a:stretch>
-            <a:fillRect/>
-          </a:stretch>
-        </p:blipFill>
-        <p:spPr>
-          <a:xfrm>
-            <a:off x="7955280" y="91440"/>
-            <a:ext cx="1005840" cy="1005840"/>
-          </a:xfrm>
-          <a:prstGeom prst="rect"/>
-        </p:spPr>
-      </p:pic>
-      <p:sp>
-        <p:nvSpPr>
-          <p:cNvPr id="1048644" name="Text 0"/>
-          <p:cNvSpPr/>
-          <p:nvPr/>
-        </p:nvSpPr>
-        <p:spPr>
-          <a:xfrm>
-            <a:off x="411480" y="201168"/>
-            <a:ext cx="3657600" cy="228600"/>
-          </a:xfrm>
-          <a:prstGeom prst="rect"/>
-          <a:noFill/>
-        </p:spPr>
-        <p:txBody>
-          <a:bodyPr anchor="ctr" bIns="0" lIns="0" rIns="0" rtlCol="0" tIns="0" wrap="square"/>
-          <a:p>
-            <a:pPr indent="0" marL="0">
-              <a:buNone/>
-            </a:pPr>
-            <a:r>
-              <a:rPr dirty="0" sz="900" kern="0" lang="en-US" spc="400">
-                <a:solidFill>
-                  <a:srgbClr val="94A3B8"/>
-                </a:solidFill>
-                <a:latin typeface="Calibri" pitchFamily="34" charset="0"/>
-                <a:ea typeface="Calibri" pitchFamily="34" charset="-122"/>
-                <a:cs typeface="Calibri" pitchFamily="34" charset="-120"/>
-              </a:rPr>
-              <a:t>THE SOLUTION</a:t>
-            </a:r>
-            <a:endParaRPr dirty="0" sz="900" lang="en-US"/>
-          </a:p>
-        </p:txBody>
-      </p:sp>
-      <p:sp>
-        <p:nvSpPr>
-          <p:cNvPr id="1048645" name="Text 1"/>
-          <p:cNvSpPr/>
-          <p:nvPr/>
-        </p:nvSpPr>
-        <p:spPr>
-          <a:xfrm>
-            <a:off x="411480" y="438912"/>
-            <a:ext cx="6400800" cy="475488"/>
-          </a:xfrm>
-          <a:prstGeom prst="rect"/>
-          <a:noFill/>
-        </p:spPr>
-        <p:txBody>
-          <a:bodyPr anchor="ctr" bIns="0" lIns="0" rIns="0" rtlCol="0" tIns="0" wrap="square"/>
-          <a:p>
-            <a:pPr indent="0" marL="0">
-              <a:buNone/>
-            </a:pPr>
-            <a:r>
-              <a:rPr b="1" dirty="0" sz="2800" lang="en-US">
-                <a:solidFill>
-                  <a:srgbClr val="0A1E3F"/>
-                </a:solidFill>
-                <a:latin typeface="Calibri" pitchFamily="34" charset="0"/>
-                <a:ea typeface="Calibri" pitchFamily="34" charset="-122"/>
-                <a:cs typeface="Calibri" pitchFamily="34" charset="-120"/>
-              </a:rPr>
-              <a:t>Safety in one tap.</a:t>
-            </a:r>
-            <a:endParaRPr dirty="0" sz="2800" lang="en-US"/>
-          </a:p>
-        </p:txBody>
-      </p:sp>
-      <p:sp>
-        <p:nvSpPr>
-          <p:cNvPr id="1048646" name="Shape 2"/>
-          <p:cNvSpPr/>
-          <p:nvPr/>
-        </p:nvSpPr>
-        <p:spPr>
-          <a:xfrm>
-            <a:off x="411480" y="1078992"/>
-            <a:ext cx="4023360" cy="3566160"/>
+              <a:t>8484</a:t>
+            </a:r>
+            <a:endParaRPr dirty="0" sz="1250" lang="en-US"/>
+          </a:p>
+        </p:txBody>
+      </p:sp>
+      <p:sp>
+        <p:nvSpPr>
+          <p:cNvPr id="1048648" name="Shape 7"/>
+          <p:cNvSpPr/>
+          <p:nvPr/>
+        </p:nvSpPr>
+        <p:spPr>
+          <a:xfrm>
+            <a:off x="2112264" y="1078992"/>
+            <a:ext cx="1554480" cy="3017520"/>
           </a:xfrm>
           <a:prstGeom prst="rect"/>
           <a:solidFill>
@@ -5348,348 +6487,14 @@
       </p:sp>
       <p:sp>
         <p:nvSpPr>
-          <p:cNvPr id="1048647" name="Shape 3"/>
-          <p:cNvSpPr/>
-          <p:nvPr/>
-        </p:nvSpPr>
-        <p:spPr>
-          <a:xfrm>
-            <a:off x="411480" y="1078992"/>
-            <a:ext cx="4023360" cy="347472"/>
-          </a:xfrm>
-          <a:prstGeom prst="rect"/>
-          <a:solidFill>
-            <a:srgbClr val="064E3B"/>
-          </a:solidFill>
-          <a:ln w="12700">
-            <a:solidFill>
-              <a:srgbClr val="064E3B"/>
-            </a:solidFill>
-            <a:prstDash val="solid"/>
-          </a:ln>
-        </p:spPr>
-      </p:sp>
-      <p:sp>
-        <p:nvSpPr>
-          <p:cNvPr id="1048648" name="Text 4"/>
-          <p:cNvSpPr/>
-          <p:nvPr/>
-        </p:nvSpPr>
-        <p:spPr>
-          <a:xfrm>
-            <a:off x="530352" y="1115568"/>
-            <a:ext cx="3749040" cy="274320"/>
-          </a:xfrm>
-          <a:prstGeom prst="rect"/>
-          <a:noFill/>
-        </p:spPr>
-        <p:txBody>
-          <a:bodyPr anchor="ctr" bIns="0" lIns="0" rIns="0" rtlCol="0" tIns="0" wrap="square"/>
-          <a:p>
-            <a:pPr indent="0" marL="0">
-              <a:buNone/>
-            </a:pPr>
-            <a:r>
-              <a:rPr b="1" dirty="0" sz="950" lang="en-US">
-                <a:solidFill>
-                  <a:srgbClr val="86EFAC"/>
-                </a:solidFill>
-                <a:latin typeface="Calibri" pitchFamily="34" charset="0"/>
-                <a:ea typeface="Calibri" pitchFamily="34" charset="-122"/>
-                <a:cs typeface="Calibri" pitchFamily="34" charset="-120"/>
-              </a:rPr>
-              <a:t>SAFE ARRIVAL FLOW  —  daily habit</a:t>
-            </a:r>
-            <a:endParaRPr dirty="0" sz="950" lang="en-US"/>
-          </a:p>
-        </p:txBody>
-      </p:sp>
-      <p:sp>
-        <p:nvSpPr>
-          <p:cNvPr id="1048649" name="Text 5"/>
-          <p:cNvSpPr/>
-          <p:nvPr/>
-        </p:nvSpPr>
-        <p:spPr>
-          <a:xfrm>
-            <a:off x="530352" y="1572768"/>
-            <a:ext cx="3749040" cy="320040"/>
-          </a:xfrm>
-          <a:prstGeom prst="rect"/>
-          <a:noFill/>
-        </p:spPr>
-        <p:txBody>
-          <a:bodyPr anchor="ctr" bIns="0" lIns="0" rIns="0" rtlCol="0" tIns="0" wrap="square"/>
-          <a:p>
-            <a:pPr indent="0" marL="0">
-              <a:buNone/>
-            </a:pPr>
-            <a:r>
-              <a:rPr b="1" dirty="0" sz="1100" lang="en-US">
-                <a:solidFill>
-                  <a:srgbClr val="FFFFFF"/>
-                </a:solidFill>
-                <a:latin typeface="Calibri" pitchFamily="34" charset="0"/>
-                <a:ea typeface="Calibri" pitchFamily="34" charset="-122"/>
-                <a:cs typeface="Calibri" pitchFamily="34" charset="-120"/>
-              </a:rPr>
-              <a:t>✓  </a:t>
-            </a:r>
-            <a:r>
-              <a:rPr dirty="0" sz="1100" lang="en-US">
-                <a:solidFill>
-                  <a:srgbClr val="FFFFFF"/>
-                </a:solidFill>
-                <a:latin typeface="Calibri" pitchFamily="34" charset="0"/>
-                <a:ea typeface="Calibri" pitchFamily="34" charset="-122"/>
-                <a:cs typeface="Calibri" pitchFamily="34" charset="-120"/>
-              </a:rPr>
-              <a:t>Pick destination + ETA (15 / 30 / 60 min)</a:t>
-            </a:r>
-            <a:endParaRPr dirty="0" sz="1100" lang="en-US"/>
-          </a:p>
-        </p:txBody>
-      </p:sp>
-      <p:sp>
-        <p:nvSpPr>
-          <p:cNvPr id="1048650" name="Text 6"/>
-          <p:cNvSpPr/>
-          <p:nvPr/>
-        </p:nvSpPr>
-        <p:spPr>
-          <a:xfrm>
-            <a:off x="530352" y="1911096"/>
-            <a:ext cx="3749040" cy="320040"/>
-          </a:xfrm>
-          <a:prstGeom prst="rect"/>
-          <a:noFill/>
-        </p:spPr>
-        <p:txBody>
-          <a:bodyPr anchor="ctr" bIns="0" lIns="0" rIns="0" rtlCol="0" tIns="0" wrap="square"/>
-          <a:p>
-            <a:pPr indent="0" marL="0">
-              <a:buNone/>
-            </a:pPr>
-            <a:r>
-              <a:rPr b="1" dirty="0" sz="1100" lang="en-US">
-                <a:solidFill>
-                  <a:srgbClr val="FFFFFF"/>
-                </a:solidFill>
-                <a:latin typeface="Calibri" pitchFamily="34" charset="0"/>
-                <a:ea typeface="Calibri" pitchFamily="34" charset="-122"/>
-                <a:cs typeface="Calibri" pitchFamily="34" charset="-120"/>
-              </a:rPr>
-              <a:t>✓  </a:t>
-            </a:r>
-            <a:r>
-              <a:rPr dirty="0" sz="1100" lang="en-US">
-                <a:solidFill>
-                  <a:srgbClr val="FFFFFF"/>
-                </a:solidFill>
-                <a:latin typeface="Calibri" pitchFamily="34" charset="0"/>
-                <a:ea typeface="Calibri" pitchFamily="34" charset="-122"/>
-                <a:cs typeface="Calibri" pitchFamily="34" charset="-120"/>
-              </a:rPr>
-              <a:t>Select trusted contacts to watch</a:t>
-            </a:r>
-            <a:endParaRPr dirty="0" sz="1100" lang="en-US"/>
-          </a:p>
-        </p:txBody>
-      </p:sp>
-      <p:sp>
-        <p:nvSpPr>
-          <p:cNvPr id="1048651" name="Text 7"/>
-          <p:cNvSpPr/>
-          <p:nvPr/>
-        </p:nvSpPr>
-        <p:spPr>
-          <a:xfrm>
-            <a:off x="530352" y="2249424"/>
-            <a:ext cx="3749040" cy="320040"/>
-          </a:xfrm>
-          <a:prstGeom prst="rect"/>
-          <a:noFill/>
-        </p:spPr>
-        <p:txBody>
-          <a:bodyPr anchor="ctr" bIns="0" lIns="0" rIns="0" rtlCol="0" tIns="0" wrap="square"/>
-          <a:p>
-            <a:pPr indent="0" marL="0">
-              <a:buNone/>
-            </a:pPr>
-            <a:r>
-              <a:rPr b="1" dirty="0" sz="1100" lang="en-US">
-                <a:solidFill>
-                  <a:srgbClr val="FFFFFF"/>
-                </a:solidFill>
-                <a:latin typeface="Calibri" pitchFamily="34" charset="0"/>
-                <a:ea typeface="Calibri" pitchFamily="34" charset="-122"/>
-                <a:cs typeface="Calibri" pitchFamily="34" charset="-120"/>
-              </a:rPr>
-              <a:t>✓  </a:t>
-            </a:r>
-            <a:r>
-              <a:rPr dirty="0" sz="1100" lang="en-US">
-                <a:solidFill>
-                  <a:srgbClr val="FFFFFF"/>
-                </a:solidFill>
-                <a:latin typeface="Calibri" pitchFamily="34" charset="0"/>
-                <a:ea typeface="Calibri" pitchFamily="34" charset="-122"/>
-                <a:cs typeface="Calibri" pitchFamily="34" charset="-120"/>
-              </a:rPr>
-              <a:t>Live OpenStreetMap tracking + countdown timer</a:t>
-            </a:r>
-            <a:endParaRPr dirty="0" sz="1100" lang="en-US"/>
-          </a:p>
-        </p:txBody>
-      </p:sp>
-      <p:sp>
-        <p:nvSpPr>
-          <p:cNvPr id="1048652" name="Text 8"/>
-          <p:cNvSpPr/>
-          <p:nvPr/>
-        </p:nvSpPr>
-        <p:spPr>
-          <a:xfrm>
-            <a:off x="530352" y="2587752"/>
-            <a:ext cx="3749040" cy="320040"/>
-          </a:xfrm>
-          <a:prstGeom prst="rect"/>
-          <a:noFill/>
-        </p:spPr>
-        <p:txBody>
-          <a:bodyPr anchor="ctr" bIns="0" lIns="0" rIns="0" rtlCol="0" tIns="0" wrap="square"/>
-          <a:p>
-            <a:pPr indent="0" marL="0">
-              <a:buNone/>
-            </a:pPr>
-            <a:r>
-              <a:rPr b="1" dirty="0" sz="1100" lang="en-US">
-                <a:solidFill>
-                  <a:srgbClr val="86EFAC"/>
-                </a:solidFill>
-                <a:latin typeface="Calibri" pitchFamily="34" charset="0"/>
-                <a:ea typeface="Calibri" pitchFamily="34" charset="-122"/>
-                <a:cs typeface="Calibri" pitchFamily="34" charset="-120"/>
-              </a:rPr>
-              <a:t>✓  </a:t>
-            </a:r>
-            <a:r>
-              <a:rPr dirty="0" sz="1100" lang="en-US">
-                <a:solidFill>
-                  <a:srgbClr val="86EFAC"/>
-                </a:solidFill>
-                <a:latin typeface="Calibri" pitchFamily="34" charset="0"/>
-                <a:ea typeface="Calibri" pitchFamily="34" charset="-122"/>
-                <a:cs typeface="Calibri" pitchFamily="34" charset="-120"/>
-              </a:rPr>
-              <a:t>Tap “I’ve arrived safely” → confetti + contacts notified</a:t>
-            </a:r>
-            <a:endParaRPr dirty="0" sz="1100" lang="en-US"/>
-          </a:p>
-        </p:txBody>
-      </p:sp>
-      <p:sp>
-        <p:nvSpPr>
-          <p:cNvPr id="1048653" name="Text 9"/>
-          <p:cNvSpPr/>
-          <p:nvPr/>
-        </p:nvSpPr>
-        <p:spPr>
-          <a:xfrm>
-            <a:off x="530352" y="2926080"/>
-            <a:ext cx="3749040" cy="320040"/>
-          </a:xfrm>
-          <a:prstGeom prst="rect"/>
-          <a:noFill/>
-        </p:spPr>
-        <p:txBody>
-          <a:bodyPr anchor="ctr" bIns="0" lIns="0" rIns="0" rtlCol="0" tIns="0" wrap="square"/>
-          <a:p>
-            <a:pPr indent="0" marL="0">
-              <a:buNone/>
-            </a:pPr>
-            <a:r>
-              <a:rPr b="1" dirty="0" sz="1100" lang="en-US">
-                <a:solidFill>
-                  <a:srgbClr val="FCA5A5"/>
-                </a:solidFill>
-                <a:latin typeface="Calibri" pitchFamily="34" charset="0"/>
-                <a:ea typeface="Calibri" pitchFamily="34" charset="-122"/>
-                <a:cs typeface="Calibri" pitchFamily="34" charset="-120"/>
-              </a:rPr>
-              <a:t>✓  </a:t>
-            </a:r>
-            <a:r>
-              <a:rPr dirty="0" sz="1100" lang="en-US">
-                <a:solidFill>
-                  <a:srgbClr val="FCA5A5"/>
-                </a:solidFill>
-                <a:latin typeface="Calibri" pitchFamily="34" charset="0"/>
-                <a:ea typeface="Calibri" pitchFamily="34" charset="-122"/>
-                <a:cs typeface="Calibri" pitchFamily="34" charset="-120"/>
-              </a:rPr>
-              <a:t>ETA expires without tap → contacts auto-alerted</a:t>
-            </a:r>
-            <a:endParaRPr dirty="0" sz="1100" lang="en-US"/>
-          </a:p>
-        </p:txBody>
-      </p:sp>
-      <p:sp>
-        <p:nvSpPr>
-          <p:cNvPr id="1048654" name="Text 10"/>
-          <p:cNvSpPr/>
-          <p:nvPr/>
-        </p:nvSpPr>
-        <p:spPr>
-          <a:xfrm>
-            <a:off x="530352" y="3264408"/>
-            <a:ext cx="3749040" cy="320040"/>
-          </a:xfrm>
-          <a:prstGeom prst="rect"/>
-          <a:noFill/>
-        </p:spPr>
-        <p:txBody>
-          <a:bodyPr anchor="ctr" bIns="0" lIns="0" rIns="0" rtlCol="0" tIns="0" wrap="square"/>
-          <a:p>
-            <a:pPr indent="0" marL="0">
-              <a:buNone/>
-            </a:pPr>
-            <a:r>
-              <a:rPr b="1" dirty="0" sz="1100" lang="en-US">
-                <a:solidFill>
-                  <a:srgbClr val="2DD4BF"/>
-                </a:solidFill>
-                <a:latin typeface="Calibri" pitchFamily="34" charset="0"/>
-                <a:ea typeface="Calibri" pitchFamily="34" charset="-122"/>
-                <a:cs typeface="Calibri" pitchFamily="34" charset="-120"/>
-              </a:rPr>
-              <a:t>✓  </a:t>
-            </a:r>
-            <a:r>
-              <a:rPr dirty="0" sz="1100" lang="en-US">
-                <a:solidFill>
-                  <a:srgbClr val="2DD4BF"/>
-                </a:solidFill>
-                <a:latin typeface="Calibri" pitchFamily="34" charset="0"/>
-                <a:ea typeface="Calibri" pitchFamily="34" charset="-122"/>
-                <a:cs typeface="Calibri" pitchFamily="34" charset="-120"/>
-              </a:rPr>
-              <a:t>Zero manual texting required once configured</a:t>
-            </a:r>
-            <a:endParaRPr dirty="0" sz="1100" lang="en-US"/>
-          </a:p>
-        </p:txBody>
-      </p:sp>
-      <p:sp>
-        <p:nvSpPr>
-          <p:cNvPr id="1048655" name="Shape 11"/>
-          <p:cNvSpPr/>
-          <p:nvPr/>
-        </p:nvSpPr>
-        <p:spPr>
-          <a:xfrm>
-            <a:off x="411480" y="4133088"/>
-            <a:ext cx="4023360" cy="420624"/>
+          <p:cNvPr id="1048649" name="Shape 8"/>
+          <p:cNvSpPr/>
+          <p:nvPr/>
+        </p:nvSpPr>
+        <p:spPr>
+          <a:xfrm>
+            <a:off x="2112264" y="1078992"/>
+            <a:ext cx="1554480" cy="457200"/>
           </a:xfrm>
           <a:prstGeom prst="rect"/>
           <a:solidFill>
@@ -5705,26 +6510,26 @@
       </p:sp>
       <p:sp>
         <p:nvSpPr>
-          <p:cNvPr id="1048656" name="Text 12"/>
-          <p:cNvSpPr/>
-          <p:nvPr/>
-        </p:nvSpPr>
-        <p:spPr>
-          <a:xfrm>
-            <a:off x="502920" y="4178808"/>
-            <a:ext cx="3840480" cy="329184"/>
-          </a:xfrm>
-          <a:prstGeom prst="rect"/>
-          <a:noFill/>
-        </p:spPr>
-        <p:txBody>
-          <a:bodyPr anchor="ctr" bIns="0" lIns="0" rIns="0" rtlCol="0" tIns="0" wrap="square"/>
-          <a:p>
-            <a:pPr indent="0" marL="0">
-              <a:buNone/>
-            </a:pPr>
-            <a:r>
-              <a:rPr b="1" dirty="0" sz="1000" lang="en-US">
+          <p:cNvPr id="1048650" name="Text 9"/>
+          <p:cNvSpPr/>
+          <p:nvPr/>
+        </p:nvSpPr>
+        <p:spPr>
+          <a:xfrm>
+            <a:off x="2157984" y="1115568"/>
+            <a:ext cx="457200" cy="384048"/>
+          </a:xfrm>
+          <a:prstGeom prst="rect"/>
+          <a:noFill/>
+        </p:spPr>
+        <p:txBody>
+          <a:bodyPr anchor="ctr" bIns="0" lIns="0" rIns="0" rtlCol="0" tIns="0" wrap="square"/>
+          <a:p>
+            <a:pPr indent="0" marL="0">
+              <a:buNone/>
+            </a:pPr>
+            <a:r>
+              <a:rPr b="1" dirty="0" sz="2200" lang="en-US">
                 <a:solidFill>
                   <a:srgbClr val="FFFFFF"/>
                 </a:solidFill>
@@ -5732,22 +6537,126 @@
                 <a:ea typeface="Calibri" pitchFamily="34" charset="-122"/>
                 <a:cs typeface="Calibri" pitchFamily="34" charset="-120"/>
               </a:rPr>
-              <a:t>North Star: ≥ 90% of journeys end in safe-arrival confirmation</a:t>
-            </a:r>
-            <a:endParaRPr dirty="0" sz="1000" lang="en-US"/>
-          </a:p>
-        </p:txBody>
-      </p:sp>
-      <p:sp>
-        <p:nvSpPr>
-          <p:cNvPr id="1048657" name="Shape 13"/>
-          <p:cNvSpPr/>
-          <p:nvPr/>
-        </p:nvSpPr>
-        <p:spPr>
-          <a:xfrm>
-            <a:off x="4709160" y="1078992"/>
-            <a:ext cx="4023360" cy="3566160"/>
+              <a:t>2</a:t>
+            </a:r>
+            <a:endParaRPr dirty="0" sz="2200" lang="en-US"/>
+          </a:p>
+        </p:txBody>
+      </p:sp>
+      <p:sp>
+        <p:nvSpPr>
+          <p:cNvPr id="1048651" name="Text 10"/>
+          <p:cNvSpPr/>
+          <p:nvPr/>
+        </p:nvSpPr>
+        <p:spPr>
+          <a:xfrm>
+            <a:off x="2569464" y="1152144"/>
+            <a:ext cx="1051560" cy="347472"/>
+          </a:xfrm>
+          <a:prstGeom prst="rect"/>
+          <a:noFill/>
+        </p:spPr>
+        <p:txBody>
+          <a:bodyPr anchor="ctr" bIns="0" lIns="0" rIns="0" rtlCol="0" tIns="0" wrap="square"/>
+          <a:p>
+            <a:pPr indent="0" marL="0">
+              <a:buNone/>
+            </a:pPr>
+            <a:r>
+              <a:rPr b="1" dirty="0" sz="1100" lang="en-US">
+                <a:solidFill>
+                  <a:srgbClr val="FFFFFF"/>
+                </a:solidFill>
+                <a:latin typeface="Calibri" pitchFamily="34" charset="0"/>
+                <a:ea typeface="Calibri" pitchFamily="34" charset="-122"/>
+                <a:cs typeface="Calibri" pitchFamily="34" charset="-120"/>
+              </a:rPr>
+              <a:t>Safe Arrival</a:t>
+            </a:r>
+            <a:endParaRPr dirty="0" sz="1100" lang="en-US"/>
+          </a:p>
+        </p:txBody>
+      </p:sp>
+      <p:sp>
+        <p:nvSpPr>
+          <p:cNvPr id="1048652" name="Text 11"/>
+          <p:cNvSpPr/>
+          <p:nvPr/>
+        </p:nvSpPr>
+        <p:spPr>
+          <a:xfrm>
+            <a:off x="2203704" y="1664208"/>
+            <a:ext cx="1371600" cy="2286000"/>
+          </a:xfrm>
+          <a:prstGeom prst="rect"/>
+          <a:noFill/>
+        </p:spPr>
+        <p:txBody>
+          <a:bodyPr anchor="ctr" bIns="0" lIns="0" rIns="0" rtlCol="0" tIns="0" wrap="square"/>
+          <a:p>
+            <a:pPr indent="0" marL="0">
+              <a:buNone/>
+            </a:pPr>
+            <a:r>
+              <a:rPr dirty="0" sz="1250" lang="en-US">
+                <a:solidFill>
+                  <a:srgbClr val="A0B8D0"/>
+                </a:solidFill>
+                <a:latin typeface="Calibri" pitchFamily="34" charset="0"/>
+                <a:ea typeface="Calibri" pitchFamily="34" charset="-122"/>
+                <a:cs typeface="Calibri" pitchFamily="34" charset="-120"/>
+              </a:rPr>
+              <a:t>Set destination</a:t>
+            </a:r>
+            <a:endParaRPr dirty="0" sz="1250" lang="en-US"/>
+          </a:p>
+          <a:p>
+            <a:pPr indent="0" marL="0">
+              <a:buNone/>
+            </a:pPr>
+            <a:r>
+              <a:rPr dirty="0" sz="1250" lang="en-US">
+                <a:solidFill>
+                  <a:srgbClr val="A0B8D0"/>
+                </a:solidFill>
+                <a:latin typeface="Calibri" pitchFamily="34" charset="0"/>
+                <a:ea typeface="Calibri" pitchFamily="34" charset="-122"/>
+                <a:cs typeface="Calibri" pitchFamily="34" charset="-120"/>
+              </a:rPr>
+              <a:t>+ ETA</a:t>
+            </a:r>
+            <a:endParaRPr dirty="0" sz="1250" lang="en-US"/>
+          </a:p>
+          <a:p>
+            <a:pPr indent="0" marL="0">
+              <a:buNone/>
+            </a:pPr>
+            <a:r>
+              <a:rPr dirty="0" sz="1250" lang="en-US">
+                <a:solidFill>
+                  <a:srgbClr val="A0B8D0"/>
+                </a:solidFill>
+                <a:latin typeface="Calibri" pitchFamily="34" charset="0"/>
+                <a:ea typeface="Calibri" pitchFamily="34" charset="-122"/>
+                <a:cs typeface="Calibri" pitchFamily="34" charset="-120"/>
+              </a:rPr>
+              <a:t>Share contacts</a:t>
+            </a:r>
+            <a:endParaRPr dirty="0" sz="1250" lang="en-US"/>
+          </a:p>
+        </p:txBody>
+      </p:sp>
+      <p:sp>
+        <p:nvSpPr>
+          <p:cNvPr id="1048653" name="Shape 12"/>
+          <p:cNvSpPr/>
+          <p:nvPr/>
+        </p:nvSpPr>
+        <p:spPr>
+          <a:xfrm>
+            <a:off x="3813048" y="1078992"/>
+            <a:ext cx="1554480" cy="3017520"/>
           </a:xfrm>
           <a:prstGeom prst="rect"/>
           <a:solidFill>
@@ -5763,22 +6672,22 @@
       </p:sp>
       <p:sp>
         <p:nvSpPr>
-          <p:cNvPr id="1048658" name="Shape 14"/>
-          <p:cNvSpPr/>
-          <p:nvPr/>
-        </p:nvSpPr>
-        <p:spPr>
-          <a:xfrm>
-            <a:off x="4709160" y="1078992"/>
-            <a:ext cx="4023360" cy="347472"/>
+          <p:cNvPr id="1048654" name="Shape 13"/>
+          <p:cNvSpPr/>
+          <p:nvPr/>
+        </p:nvSpPr>
+        <p:spPr>
+          <a:xfrm>
+            <a:off x="3813048" y="1078992"/>
+            <a:ext cx="1554480" cy="457200"/>
           </a:xfrm>
           <a:prstGeom prst="rect"/>
           <a:solidFill>
-            <a:srgbClr val="7F1D1D"/>
+            <a:srgbClr val="3B82F6"/>
           </a:solidFill>
           <a:ln w="12700">
             <a:solidFill>
-              <a:srgbClr val="7F1D1D"/>
+              <a:srgbClr val="3B82F6"/>
             </a:solidFill>
             <a:prstDash val="solid"/>
           </a:ln>
@@ -5786,49 +6695,49 @@
       </p:sp>
       <p:sp>
         <p:nvSpPr>
-          <p:cNvPr id="1048659" name="Text 15"/>
-          <p:cNvSpPr/>
-          <p:nvPr/>
-        </p:nvSpPr>
-        <p:spPr>
-          <a:xfrm>
-            <a:off x="4828032" y="1115568"/>
-            <a:ext cx="3749040" cy="274320"/>
-          </a:xfrm>
-          <a:prstGeom prst="rect"/>
-          <a:noFill/>
-        </p:spPr>
-        <p:txBody>
-          <a:bodyPr anchor="ctr" bIns="0" lIns="0" rIns="0" rtlCol="0" tIns="0" wrap="square"/>
-          <a:p>
-            <a:pPr indent="0" marL="0">
-              <a:buNone/>
-            </a:pPr>
-            <a:r>
-              <a:rPr b="1" dirty="0" sz="950" lang="en-US">
-                <a:solidFill>
-                  <a:srgbClr val="FCA5A5"/>
-                </a:solidFill>
-                <a:latin typeface="Calibri" pitchFamily="34" charset="0"/>
-                <a:ea typeface="Calibri" pitchFamily="34" charset="-122"/>
-                <a:cs typeface="Calibri" pitchFamily="34" charset="-120"/>
-              </a:rPr>
-              <a:t>SOS FLOW  —  safety net</a:t>
-            </a:r>
-            <a:endParaRPr dirty="0" sz="950" lang="en-US"/>
-          </a:p>
-        </p:txBody>
-      </p:sp>
-      <p:sp>
-        <p:nvSpPr>
-          <p:cNvPr id="1048660" name="Text 16"/>
-          <p:cNvSpPr/>
-          <p:nvPr/>
-        </p:nvSpPr>
-        <p:spPr>
-          <a:xfrm>
-            <a:off x="4828032" y="1572768"/>
-            <a:ext cx="3749040" cy="320040"/>
+          <p:cNvPr id="1048655" name="Text 14"/>
+          <p:cNvSpPr/>
+          <p:nvPr/>
+        </p:nvSpPr>
+        <p:spPr>
+          <a:xfrm>
+            <a:off x="3858768" y="1115568"/>
+            <a:ext cx="457200" cy="384048"/>
+          </a:xfrm>
+          <a:prstGeom prst="rect"/>
+          <a:noFill/>
+        </p:spPr>
+        <p:txBody>
+          <a:bodyPr anchor="ctr" bIns="0" lIns="0" rIns="0" rtlCol="0" tIns="0" wrap="square"/>
+          <a:p>
+            <a:pPr indent="0" marL="0">
+              <a:buNone/>
+            </a:pPr>
+            <a:r>
+              <a:rPr b="1" dirty="0" sz="2200" lang="en-US">
+                <a:solidFill>
+                  <a:srgbClr val="FFFFFF"/>
+                </a:solidFill>
+                <a:latin typeface="Calibri" pitchFamily="34" charset="0"/>
+                <a:ea typeface="Calibri" pitchFamily="34" charset="-122"/>
+                <a:cs typeface="Calibri" pitchFamily="34" charset="-120"/>
+              </a:rPr>
+              <a:t>3</a:t>
+            </a:r>
+            <a:endParaRPr dirty="0" sz="2200" lang="en-US"/>
+          </a:p>
+        </p:txBody>
+      </p:sp>
+      <p:sp>
+        <p:nvSpPr>
+          <p:cNvPr id="1048656" name="Text 15"/>
+          <p:cNvSpPr/>
+          <p:nvPr/>
+        </p:nvSpPr>
+        <p:spPr>
+          <a:xfrm>
+            <a:off x="4270248" y="1152144"/>
+            <a:ext cx="1051560" cy="347472"/>
           </a:xfrm>
           <a:prstGeom prst="rect"/>
           <a:noFill/>
@@ -5842,24 +6751,13 @@
             <a:r>
               <a:rPr b="1" dirty="0" sz="1100" lang="en-US">
                 <a:solidFill>
-                  <a:srgbClr val="EF4444"/>
-                </a:solidFill>
-                <a:latin typeface="Calibri" pitchFamily="34" charset="0"/>
-                <a:ea typeface="Calibri" pitchFamily="34" charset="-122"/>
-                <a:cs typeface="Calibri" pitchFamily="34" charset="-120"/>
-              </a:rPr>
-              <a:t>⚠  </a:t>
-            </a:r>
-            <a:r>
-              <a:rPr dirty="0" sz="1100" lang="en-US">
-                <a:solidFill>
                   <a:srgbClr val="FFFFFF"/>
                 </a:solidFill>
                 <a:latin typeface="Calibri" pitchFamily="34" charset="0"/>
                 <a:ea typeface="Calibri" pitchFamily="34" charset="-122"/>
                 <a:cs typeface="Calibri" pitchFamily="34" charset="-120"/>
               </a:rPr>
-              <a:t>Hold red SOS button 3 seconds (SVG ring fills)</a:t>
+              <a:t>Live Tracking</a:t>
             </a:r>
             <a:endParaRPr dirty="0" sz="1100" lang="en-US"/>
           </a:p>
@@ -5867,244 +6765,106 @@
       </p:sp>
       <p:sp>
         <p:nvSpPr>
-          <p:cNvPr id="1048661" name="Text 17"/>
-          <p:cNvSpPr/>
-          <p:nvPr/>
-        </p:nvSpPr>
-        <p:spPr>
-          <a:xfrm>
-            <a:off x="4828032" y="1911096"/>
-            <a:ext cx="3749040" cy="320040"/>
-          </a:xfrm>
-          <a:prstGeom prst="rect"/>
-          <a:noFill/>
-        </p:spPr>
-        <p:txBody>
-          <a:bodyPr anchor="ctr" bIns="0" lIns="0" rIns="0" rtlCol="0" tIns="0" wrap="square"/>
-          <a:p>
-            <a:pPr indent="0" marL="0">
-              <a:buNone/>
-            </a:pPr>
-            <a:r>
-              <a:rPr b="1" dirty="0" sz="1100" lang="en-US">
-                <a:solidFill>
-                  <a:srgbClr val="EF4444"/>
-                </a:solidFill>
-                <a:latin typeface="Calibri" pitchFamily="34" charset="0"/>
-                <a:ea typeface="Calibri" pitchFamily="34" charset="-122"/>
-                <a:cs typeface="Calibri" pitchFamily="34" charset="-120"/>
-              </a:rPr>
-              <a:t>⚠  </a:t>
-            </a:r>
-            <a:r>
-              <a:rPr dirty="0" sz="1100" lang="en-US">
-                <a:solidFill>
-                  <a:srgbClr val="FFFFFF"/>
-                </a:solidFill>
-                <a:latin typeface="Calibri" pitchFamily="34" charset="0"/>
-                <a:ea typeface="Calibri" pitchFamily="34" charset="-122"/>
-                <a:cs typeface="Calibri" pitchFamily="34" charset="-120"/>
-              </a:rPr>
-              <a:t>Haptic feedback: [200ms, 100ms, 200ms] vibration</a:t>
-            </a:r>
-            <a:endParaRPr dirty="0" sz="1100" lang="en-US"/>
-          </a:p>
-        </p:txBody>
-      </p:sp>
-      <p:sp>
-        <p:nvSpPr>
-          <p:cNvPr id="1048662" name="Text 18"/>
-          <p:cNvSpPr/>
-          <p:nvPr/>
-        </p:nvSpPr>
-        <p:spPr>
-          <a:xfrm>
-            <a:off x="4828032" y="2249424"/>
-            <a:ext cx="3749040" cy="320040"/>
-          </a:xfrm>
-          <a:prstGeom prst="rect"/>
-          <a:noFill/>
-        </p:spPr>
-        <p:txBody>
-          <a:bodyPr anchor="ctr" bIns="0" lIns="0" rIns="0" rtlCol="0" tIns="0" wrap="square"/>
-          <a:p>
-            <a:pPr indent="0" marL="0">
-              <a:buNone/>
-            </a:pPr>
-            <a:r>
-              <a:rPr b="1" dirty="0" sz="1100" lang="en-US">
-                <a:solidFill>
-                  <a:srgbClr val="EF4444"/>
-                </a:solidFill>
-                <a:latin typeface="Calibri" pitchFamily="34" charset="0"/>
-                <a:ea typeface="Calibri" pitchFamily="34" charset="-122"/>
-                <a:cs typeface="Calibri" pitchFamily="34" charset="-120"/>
-              </a:rPr>
-              <a:t>⚠  </a:t>
-            </a:r>
-            <a:r>
-              <a:rPr dirty="0" sz="1100" lang="en-US">
-                <a:solidFill>
-                  <a:srgbClr val="FFFFFF"/>
-                </a:solidFill>
-                <a:latin typeface="Calibri" pitchFamily="34" charset="0"/>
-                <a:ea typeface="Calibri" pitchFamily="34" charset="-122"/>
-                <a:cs typeface="Calibri" pitchFamily="34" charset="-120"/>
-              </a:rPr>
-              <a:t>2:45 escalation countdown begins</a:t>
-            </a:r>
-            <a:endParaRPr dirty="0" sz="1100" lang="en-US"/>
-          </a:p>
-        </p:txBody>
-      </p:sp>
-      <p:sp>
-        <p:nvSpPr>
-          <p:cNvPr id="1048663" name="Text 19"/>
-          <p:cNvSpPr/>
-          <p:nvPr/>
-        </p:nvSpPr>
-        <p:spPr>
-          <a:xfrm>
-            <a:off x="4828032" y="2587752"/>
-            <a:ext cx="3749040" cy="320040"/>
-          </a:xfrm>
-          <a:prstGeom prst="rect"/>
-          <a:noFill/>
-        </p:spPr>
-        <p:txBody>
-          <a:bodyPr anchor="ctr" bIns="0" lIns="0" rIns="0" rtlCol="0" tIns="0" wrap="square"/>
-          <a:p>
-            <a:pPr indent="0" marL="0">
-              <a:buNone/>
-            </a:pPr>
-            <a:r>
-              <a:rPr b="1" dirty="0" sz="1100" lang="en-US">
-                <a:solidFill>
-                  <a:srgbClr val="EF4444"/>
-                </a:solidFill>
-                <a:latin typeface="Calibri" pitchFamily="34" charset="0"/>
-                <a:ea typeface="Calibri" pitchFamily="34" charset="-122"/>
-                <a:cs typeface="Calibri" pitchFamily="34" charset="-120"/>
-              </a:rPr>
-              <a:t>⚠  </a:t>
-            </a:r>
-            <a:r>
-              <a:rPr dirty="0" sz="1100" lang="en-US">
-                <a:solidFill>
-                  <a:srgbClr val="FCA5A5"/>
-                </a:solidFill>
-                <a:latin typeface="Calibri" pitchFamily="34" charset="0"/>
-                <a:ea typeface="Calibri" pitchFamily="34" charset="-122"/>
-                <a:cs typeface="Calibri" pitchFamily="34" charset="-120"/>
-              </a:rPr>
-              <a:t>Live GPS streams to trusted contacts</a:t>
-            </a:r>
-            <a:endParaRPr dirty="0" sz="1100" lang="en-US"/>
-          </a:p>
-        </p:txBody>
-      </p:sp>
-      <p:sp>
-        <p:nvSpPr>
-          <p:cNvPr id="1048664" name="Text 20"/>
-          <p:cNvSpPr/>
-          <p:nvPr/>
-        </p:nvSpPr>
-        <p:spPr>
-          <a:xfrm>
-            <a:off x="4828032" y="2926080"/>
-            <a:ext cx="3749040" cy="320040"/>
-          </a:xfrm>
-          <a:prstGeom prst="rect"/>
-          <a:noFill/>
-        </p:spPr>
-        <p:txBody>
-          <a:bodyPr anchor="ctr" bIns="0" lIns="0" rIns="0" rtlCol="0" tIns="0" wrap="square"/>
-          <a:p>
-            <a:pPr indent="0" marL="0">
-              <a:buNone/>
-            </a:pPr>
-            <a:r>
-              <a:rPr b="1" dirty="0" sz="1100" lang="en-US">
-                <a:solidFill>
-                  <a:srgbClr val="EF4444"/>
-                </a:solidFill>
-                <a:latin typeface="Calibri" pitchFamily="34" charset="0"/>
-                <a:ea typeface="Calibri" pitchFamily="34" charset="-122"/>
-                <a:cs typeface="Calibri" pitchFamily="34" charset="-120"/>
-              </a:rPr>
-              <a:t>⚠  </a:t>
-            </a:r>
-            <a:r>
-              <a:rPr dirty="0" sz="1100" lang="en-US">
-                <a:solidFill>
-                  <a:srgbClr val="FFFFFF"/>
-                </a:solidFill>
-                <a:latin typeface="Calibri" pitchFamily="34" charset="0"/>
-                <a:ea typeface="Calibri" pitchFamily="34" charset="-122"/>
-                <a:cs typeface="Calibri" pitchFamily="34" charset="-120"/>
-              </a:rPr>
-              <a:t>“I’m safe — cancel” override any time before 2:45</a:t>
-            </a:r>
-            <a:endParaRPr dirty="0" sz="1100" lang="en-US"/>
-          </a:p>
-        </p:txBody>
-      </p:sp>
-      <p:sp>
-        <p:nvSpPr>
-          <p:cNvPr id="1048665" name="Text 21"/>
-          <p:cNvSpPr/>
-          <p:nvPr/>
-        </p:nvSpPr>
-        <p:spPr>
-          <a:xfrm>
-            <a:off x="4828032" y="3264408"/>
-            <a:ext cx="3749040" cy="320040"/>
-          </a:xfrm>
-          <a:prstGeom prst="rect"/>
-          <a:noFill/>
-        </p:spPr>
-        <p:txBody>
-          <a:bodyPr anchor="ctr" bIns="0" lIns="0" rIns="0" rtlCol="0" tIns="0" wrap="square"/>
-          <a:p>
-            <a:pPr indent="0" marL="0">
-              <a:buNone/>
-            </a:pPr>
-            <a:r>
-              <a:rPr b="1" dirty="0" sz="1100" lang="en-US">
-                <a:solidFill>
-                  <a:srgbClr val="EF4444"/>
-                </a:solidFill>
-                <a:latin typeface="Calibri" pitchFamily="34" charset="0"/>
-                <a:ea typeface="Calibri" pitchFamily="34" charset="-122"/>
-                <a:cs typeface="Calibri" pitchFamily="34" charset="-120"/>
-              </a:rPr>
-              <a:t>⚠  </a:t>
-            </a:r>
-            <a:r>
-              <a:rPr dirty="0" sz="1100" lang="en-US">
-                <a:solidFill>
-                  <a:srgbClr val="FCA5A5"/>
-                </a:solidFill>
-                <a:latin typeface="Calibri" pitchFamily="34" charset="0"/>
-                <a:ea typeface="Calibri" pitchFamily="34" charset="-122"/>
-                <a:cs typeface="Calibri" pitchFamily="34" charset="-120"/>
-              </a:rPr>
-              <a:t>Timer expires → contacts see location on red-tinted map</a:t>
-            </a:r>
-            <a:endParaRPr dirty="0" sz="1100" lang="en-US"/>
-          </a:p>
-        </p:txBody>
-      </p:sp>
-      <p:sp>
-        <p:nvSpPr>
-          <p:cNvPr id="1048666" name="Shape 22"/>
-          <p:cNvSpPr/>
-          <p:nvPr/>
-        </p:nvSpPr>
-        <p:spPr>
-          <a:xfrm>
-            <a:off x="4709160" y="4133088"/>
-            <a:ext cx="4023360" cy="420624"/>
+          <p:cNvPr id="1048657" name="Text 16"/>
+          <p:cNvSpPr/>
+          <p:nvPr/>
+        </p:nvSpPr>
+        <p:spPr>
+          <a:xfrm>
+            <a:off x="3904488" y="1664208"/>
+            <a:ext cx="1371600" cy="2286000"/>
+          </a:xfrm>
+          <a:prstGeom prst="rect"/>
+          <a:noFill/>
+        </p:spPr>
+        <p:txBody>
+          <a:bodyPr anchor="ctr" bIns="0" lIns="0" rIns="0" rtlCol="0" tIns="0" wrap="square"/>
+          <a:p>
+            <a:pPr indent="0" marL="0">
+              <a:buNone/>
+            </a:pPr>
+            <a:r>
+              <a:rPr dirty="0" sz="1250" lang="en-US">
+                <a:solidFill>
+                  <a:srgbClr val="A0B8D0"/>
+                </a:solidFill>
+                <a:latin typeface="Calibri" pitchFamily="34" charset="0"/>
+                <a:ea typeface="Calibri" pitchFamily="34" charset="-122"/>
+                <a:cs typeface="Calibri" pitchFamily="34" charset="-120"/>
+              </a:rPr>
+              <a:t>OSM map</a:t>
+            </a:r>
+            <a:endParaRPr dirty="0" sz="1250" lang="en-US"/>
+          </a:p>
+          <a:p>
+            <a:pPr indent="0" marL="0">
+              <a:buNone/>
+            </a:pPr>
+            <a:r>
+              <a:rPr dirty="0" sz="1250" lang="en-US">
+                <a:solidFill>
+                  <a:srgbClr val="A0B8D0"/>
+                </a:solidFill>
+                <a:latin typeface="Calibri" pitchFamily="34" charset="0"/>
+                <a:ea typeface="Calibri" pitchFamily="34" charset="-122"/>
+                <a:cs typeface="Calibri" pitchFamily="34" charset="-120"/>
+              </a:rPr>
+              <a:t>Countdown</a:t>
+            </a:r>
+            <a:endParaRPr dirty="0" sz="1250" lang="en-US"/>
+          </a:p>
+          <a:p>
+            <a:pPr indent="0" marL="0">
+              <a:buNone/>
+            </a:pPr>
+            <a:r>
+              <a:rPr dirty="0" sz="1250" lang="en-US">
+                <a:solidFill>
+                  <a:srgbClr val="A0B8D0"/>
+                </a:solidFill>
+                <a:latin typeface="Calibri" pitchFamily="34" charset="0"/>
+                <a:ea typeface="Calibri" pitchFamily="34" charset="-122"/>
+                <a:cs typeface="Calibri" pitchFamily="34" charset="-120"/>
+              </a:rPr>
+              <a:t>timer</a:t>
+            </a:r>
+            <a:endParaRPr dirty="0" sz="1250" lang="en-US"/>
+          </a:p>
+        </p:txBody>
+      </p:sp>
+      <p:sp>
+        <p:nvSpPr>
+          <p:cNvPr id="1048658" name="Shape 17"/>
+          <p:cNvSpPr/>
+          <p:nvPr/>
+        </p:nvSpPr>
+        <p:spPr>
+          <a:xfrm>
+            <a:off x="5513832" y="1078992"/>
+            <a:ext cx="1554480" cy="3017520"/>
+          </a:xfrm>
+          <a:prstGeom prst="rect"/>
+          <a:solidFill>
+            <a:srgbClr val="0A1E3F"/>
+          </a:solidFill>
+          <a:ln w="12700">
+            <a:solidFill>
+              <a:srgbClr val="0A1E3F"/>
+            </a:solidFill>
+            <a:prstDash val="solid"/>
+          </a:ln>
+        </p:spPr>
+      </p:sp>
+      <p:sp>
+        <p:nvSpPr>
+          <p:cNvPr id="1048659" name="Shape 18"/>
+          <p:cNvSpPr/>
+          <p:nvPr/>
+        </p:nvSpPr>
+        <p:spPr>
+          <a:xfrm>
+            <a:off x="5513832" y="1078992"/>
+            <a:ext cx="1554480" cy="457200"/>
           </a:xfrm>
           <a:prstGeom prst="rect"/>
           <a:solidFill>
@@ -6120,26 +6880,26 @@
       </p:sp>
       <p:sp>
         <p:nvSpPr>
-          <p:cNvPr id="1048667" name="Text 23"/>
-          <p:cNvSpPr/>
-          <p:nvPr/>
-        </p:nvSpPr>
-        <p:spPr>
-          <a:xfrm>
-            <a:off x="4828032" y="4178808"/>
-            <a:ext cx="3840480" cy="329184"/>
-          </a:xfrm>
-          <a:prstGeom prst="rect"/>
-          <a:noFill/>
-        </p:spPr>
-        <p:txBody>
-          <a:bodyPr anchor="ctr" bIns="0" lIns="0" rIns="0" rtlCol="0" tIns="0" wrap="square"/>
-          <a:p>
-            <a:pPr indent="0" marL="0">
-              <a:buNone/>
-            </a:pPr>
-            <a:r>
-              <a:rPr b="1" dirty="0" sz="1000" lang="en-US">
+          <p:cNvPr id="1048660" name="Text 19"/>
+          <p:cNvSpPr/>
+          <p:nvPr/>
+        </p:nvSpPr>
+        <p:spPr>
+          <a:xfrm>
+            <a:off x="5559552" y="1115568"/>
+            <a:ext cx="457200" cy="384048"/>
+          </a:xfrm>
+          <a:prstGeom prst="rect"/>
+          <a:noFill/>
+        </p:spPr>
+        <p:txBody>
+          <a:bodyPr anchor="ctr" bIns="0" lIns="0" rIns="0" rtlCol="0" tIns="0" wrap="square"/>
+          <a:p>
+            <a:pPr indent="0" marL="0">
+              <a:buNone/>
+            </a:pPr>
+            <a:r>
+              <a:rPr b="1" dirty="0" sz="2200" lang="en-US">
                 <a:solidFill>
                   <a:srgbClr val="FFFFFF"/>
                 </a:solidFill>
@@ -6147,9 +6907,498 @@
                 <a:ea typeface="Calibri" pitchFamily="34" charset="-122"/>
                 <a:cs typeface="Calibri" pitchFamily="34" charset="-120"/>
               </a:rPr>
-              <a:t>Shake-to-SOS hint  ·  Pocket-bump safe: 3-second hold prevents false alarms</a:t>
-            </a:r>
-            <a:endParaRPr dirty="0" sz="1000" lang="en-US"/>
+              <a:t>4</a:t>
+            </a:r>
+            <a:endParaRPr dirty="0" sz="2200" lang="en-US"/>
+          </a:p>
+        </p:txBody>
+      </p:sp>
+      <p:sp>
+        <p:nvSpPr>
+          <p:cNvPr id="1048661" name="Text 20"/>
+          <p:cNvSpPr/>
+          <p:nvPr/>
+        </p:nvSpPr>
+        <p:spPr>
+          <a:xfrm>
+            <a:off x="5971032" y="1152144"/>
+            <a:ext cx="1051560" cy="347472"/>
+          </a:xfrm>
+          <a:prstGeom prst="rect"/>
+          <a:noFill/>
+        </p:spPr>
+        <p:txBody>
+          <a:bodyPr anchor="ctr" bIns="0" lIns="0" rIns="0" rtlCol="0" tIns="0" wrap="square"/>
+          <a:p>
+            <a:pPr indent="0" marL="0">
+              <a:buNone/>
+            </a:pPr>
+            <a:r>
+              <a:rPr b="1" dirty="0" sz="1100" lang="en-US">
+                <a:solidFill>
+                  <a:srgbClr val="FFFFFF"/>
+                </a:solidFill>
+                <a:latin typeface="Calibri" pitchFamily="34" charset="0"/>
+                <a:ea typeface="Calibri" pitchFamily="34" charset="-122"/>
+                <a:cs typeface="Calibri" pitchFamily="34" charset="-120"/>
+              </a:rPr>
+              <a:t>SOS Flow</a:t>
+            </a:r>
+            <a:endParaRPr dirty="0" sz="1100" lang="en-US"/>
+          </a:p>
+        </p:txBody>
+      </p:sp>
+      <p:sp>
+        <p:nvSpPr>
+          <p:cNvPr id="1048662" name="Text 21"/>
+          <p:cNvSpPr/>
+          <p:nvPr/>
+        </p:nvSpPr>
+        <p:spPr>
+          <a:xfrm>
+            <a:off x="5605272" y="1664208"/>
+            <a:ext cx="1371600" cy="2286000"/>
+          </a:xfrm>
+          <a:prstGeom prst="rect"/>
+          <a:noFill/>
+        </p:spPr>
+        <p:txBody>
+          <a:bodyPr anchor="ctr" bIns="0" lIns="0" rIns="0" rtlCol="0" tIns="0" wrap="square"/>
+          <a:p>
+            <a:pPr indent="0" marL="0">
+              <a:buNone/>
+            </a:pPr>
+            <a:r>
+              <a:rPr dirty="0" sz="1250" lang="en-US">
+                <a:solidFill>
+                  <a:srgbClr val="A0B8D0"/>
+                </a:solidFill>
+                <a:latin typeface="Calibri" pitchFamily="34" charset="0"/>
+                <a:ea typeface="Calibri" pitchFamily="34" charset="-122"/>
+                <a:cs typeface="Calibri" pitchFamily="34" charset="-120"/>
+              </a:rPr>
+              <a:t>3-sec hold</a:t>
+            </a:r>
+            <a:endParaRPr dirty="0" sz="1250" lang="en-US"/>
+          </a:p>
+          <a:p>
+            <a:pPr indent="0" marL="0">
+              <a:buNone/>
+            </a:pPr>
+            <a:r>
+              <a:rPr dirty="0" sz="1250" lang="en-US">
+                <a:solidFill>
+                  <a:srgbClr val="A0B8D0"/>
+                </a:solidFill>
+                <a:latin typeface="Calibri" pitchFamily="34" charset="0"/>
+                <a:ea typeface="Calibri" pitchFamily="34" charset="-122"/>
+                <a:cs typeface="Calibri" pitchFamily="34" charset="-120"/>
+              </a:rPr>
+              <a:t>2:45 timer</a:t>
+            </a:r>
+            <a:endParaRPr dirty="0" sz="1250" lang="en-US"/>
+          </a:p>
+          <a:p>
+            <a:pPr indent="0" marL="0">
+              <a:buNone/>
+            </a:pPr>
+            <a:r>
+              <a:rPr dirty="0" sz="1250" lang="en-US">
+                <a:solidFill>
+                  <a:srgbClr val="A0B8D0"/>
+                </a:solidFill>
+                <a:latin typeface="Calibri" pitchFamily="34" charset="0"/>
+                <a:ea typeface="Calibri" pitchFamily="34" charset="-122"/>
+                <a:cs typeface="Calibri" pitchFamily="34" charset="-120"/>
+              </a:rPr>
+              <a:t>Cancel override</a:t>
+            </a:r>
+            <a:endParaRPr dirty="0" sz="1250" lang="en-US"/>
+          </a:p>
+        </p:txBody>
+      </p:sp>
+      <p:sp>
+        <p:nvSpPr>
+          <p:cNvPr id="1048663" name="Shape 22"/>
+          <p:cNvSpPr/>
+          <p:nvPr/>
+        </p:nvSpPr>
+        <p:spPr>
+          <a:xfrm>
+            <a:off x="7214616" y="1078992"/>
+            <a:ext cx="1554480" cy="3017520"/>
+          </a:xfrm>
+          <a:prstGeom prst="rect"/>
+          <a:solidFill>
+            <a:srgbClr val="0A1E3F"/>
+          </a:solidFill>
+          <a:ln w="12700">
+            <a:solidFill>
+              <a:srgbClr val="0A1E3F"/>
+            </a:solidFill>
+            <a:prstDash val="solid"/>
+          </a:ln>
+        </p:spPr>
+      </p:sp>
+      <p:sp>
+        <p:nvSpPr>
+          <p:cNvPr id="1048664" name="Shape 23"/>
+          <p:cNvSpPr/>
+          <p:nvPr/>
+        </p:nvSpPr>
+        <p:spPr>
+          <a:xfrm>
+            <a:off x="7214616" y="1078992"/>
+            <a:ext cx="1554480" cy="457200"/>
+          </a:xfrm>
+          <a:prstGeom prst="rect"/>
+          <a:solidFill>
+            <a:srgbClr val="F59E0B"/>
+          </a:solidFill>
+          <a:ln w="12700">
+            <a:solidFill>
+              <a:srgbClr val="F59E0B"/>
+            </a:solidFill>
+            <a:prstDash val="solid"/>
+          </a:ln>
+        </p:spPr>
+      </p:sp>
+      <p:sp>
+        <p:nvSpPr>
+          <p:cNvPr id="1048665" name="Text 24"/>
+          <p:cNvSpPr/>
+          <p:nvPr/>
+        </p:nvSpPr>
+        <p:spPr>
+          <a:xfrm>
+            <a:off x="7260336" y="1115568"/>
+            <a:ext cx="457200" cy="384048"/>
+          </a:xfrm>
+          <a:prstGeom prst="rect"/>
+          <a:noFill/>
+        </p:spPr>
+        <p:txBody>
+          <a:bodyPr anchor="ctr" bIns="0" lIns="0" rIns="0" rtlCol="0" tIns="0" wrap="square"/>
+          <a:p>
+            <a:pPr indent="0" marL="0">
+              <a:buNone/>
+            </a:pPr>
+            <a:r>
+              <a:rPr b="1" dirty="0" sz="2200" lang="en-US">
+                <a:solidFill>
+                  <a:srgbClr val="FFFFFF"/>
+                </a:solidFill>
+                <a:latin typeface="Calibri" pitchFamily="34" charset="0"/>
+                <a:ea typeface="Calibri" pitchFamily="34" charset="-122"/>
+                <a:cs typeface="Calibri" pitchFamily="34" charset="-120"/>
+              </a:rPr>
+              <a:t>5</a:t>
+            </a:r>
+            <a:endParaRPr dirty="0" sz="2200" lang="en-US"/>
+          </a:p>
+        </p:txBody>
+      </p:sp>
+      <p:sp>
+        <p:nvSpPr>
+          <p:cNvPr id="1048666" name="Text 25"/>
+          <p:cNvSpPr/>
+          <p:nvPr/>
+        </p:nvSpPr>
+        <p:spPr>
+          <a:xfrm>
+            <a:off x="7671816" y="1152144"/>
+            <a:ext cx="1051560" cy="347472"/>
+          </a:xfrm>
+          <a:prstGeom prst="rect"/>
+          <a:noFill/>
+        </p:spPr>
+        <p:txBody>
+          <a:bodyPr anchor="ctr" bIns="0" lIns="0" rIns="0" rtlCol="0" tIns="0" wrap="square"/>
+          <a:p>
+            <a:pPr indent="0" marL="0">
+              <a:buNone/>
+            </a:pPr>
+            <a:r>
+              <a:rPr b="1" dirty="0" sz="1100" lang="en-US">
+                <a:solidFill>
+                  <a:srgbClr val="FFFFFF"/>
+                </a:solidFill>
+                <a:latin typeface="Calibri" pitchFamily="34" charset="0"/>
+                <a:ea typeface="Calibri" pitchFamily="34" charset="-122"/>
+                <a:cs typeface="Calibri" pitchFamily="34" charset="-120"/>
+              </a:rPr>
+              <a:t>Failure Paths</a:t>
+            </a:r>
+            <a:endParaRPr dirty="0" sz="1100" lang="en-US"/>
+          </a:p>
+        </p:txBody>
+      </p:sp>
+      <p:sp>
+        <p:nvSpPr>
+          <p:cNvPr id="1048667" name="Text 26"/>
+          <p:cNvSpPr/>
+          <p:nvPr/>
+        </p:nvSpPr>
+        <p:spPr>
+          <a:xfrm>
+            <a:off x="7306056" y="1664208"/>
+            <a:ext cx="1371600" cy="2286000"/>
+          </a:xfrm>
+          <a:prstGeom prst="rect"/>
+          <a:noFill/>
+        </p:spPr>
+        <p:txBody>
+          <a:bodyPr anchor="ctr" bIns="0" lIns="0" rIns="0" rtlCol="0" tIns="0" wrap="square"/>
+          <a:p>
+            <a:pPr indent="0" marL="0">
+              <a:buNone/>
+            </a:pPr>
+            <a:r>
+              <a:rPr dirty="0" sz="1250" lang="en-US">
+                <a:solidFill>
+                  <a:srgbClr val="A0B8D0"/>
+                </a:solidFill>
+                <a:latin typeface="Calibri" pitchFamily="34" charset="0"/>
+                <a:ea typeface="Calibri" pitchFamily="34" charset="-122"/>
+                <a:cs typeface="Calibri" pitchFamily="34" charset="-120"/>
+              </a:rPr>
+              <a:t>Wrong OTP</a:t>
+            </a:r>
+            <a:endParaRPr dirty="0" sz="1250" lang="en-US"/>
+          </a:p>
+          <a:p>
+            <a:pPr indent="0" marL="0">
+              <a:buNone/>
+            </a:pPr>
+            <a:r>
+              <a:rPr dirty="0" sz="1250" lang="en-US">
+                <a:solidFill>
+                  <a:srgbClr val="A0B8D0"/>
+                </a:solidFill>
+                <a:latin typeface="Calibri" pitchFamily="34" charset="0"/>
+                <a:ea typeface="Calibri" pitchFamily="34" charset="-122"/>
+                <a:cs typeface="Calibri" pitchFamily="34" charset="-120"/>
+              </a:rPr>
+              <a:t>GPS denied</a:t>
+            </a:r>
+            <a:endParaRPr dirty="0" sz="1250" lang="en-US"/>
+          </a:p>
+          <a:p>
+            <a:pPr indent="0" marL="0">
+              <a:buNone/>
+            </a:pPr>
+            <a:r>
+              <a:rPr dirty="0" sz="1250" lang="en-US">
+                <a:solidFill>
+                  <a:srgbClr val="A0B8D0"/>
+                </a:solidFill>
+                <a:latin typeface="Calibri" pitchFamily="34" charset="0"/>
+                <a:ea typeface="Calibri" pitchFamily="34" charset="-122"/>
+                <a:cs typeface="Calibri" pitchFamily="34" charset="-120"/>
+              </a:rPr>
+              <a:t>ETA overdue</a:t>
+            </a:r>
+            <a:endParaRPr dirty="0" sz="1250" lang="en-US"/>
+          </a:p>
+        </p:txBody>
+      </p:sp>
+      <p:sp>
+        <p:nvSpPr>
+          <p:cNvPr id="1048668" name="Shape 27"/>
+          <p:cNvSpPr/>
+          <p:nvPr/>
+        </p:nvSpPr>
+        <p:spPr>
+          <a:xfrm>
+            <a:off x="411480" y="4224528"/>
+            <a:ext cx="8321040" cy="475488"/>
+          </a:xfrm>
+          <a:prstGeom prst="rect"/>
+          <a:solidFill>
+            <a:srgbClr val="0A1E3F"/>
+          </a:solidFill>
+          <a:ln w="12700">
+            <a:solidFill>
+              <a:srgbClr val="0A1E3F"/>
+            </a:solidFill>
+            <a:prstDash val="solid"/>
+          </a:ln>
+        </p:spPr>
+      </p:sp>
+      <p:sp>
+        <p:nvSpPr>
+          <p:cNvPr id="1048669" name="Text 28"/>
+          <p:cNvSpPr/>
+          <p:nvPr/>
+        </p:nvSpPr>
+        <p:spPr>
+          <a:xfrm>
+            <a:off x="594360" y="4270248"/>
+            <a:ext cx="1097280" cy="384048"/>
+          </a:xfrm>
+          <a:prstGeom prst="rect"/>
+          <a:noFill/>
+        </p:spPr>
+        <p:txBody>
+          <a:bodyPr anchor="ctr" bIns="0" lIns="0" rIns="0" rtlCol="0" tIns="0" wrap="square"/>
+          <a:p>
+            <a:pPr indent="0" marL="0">
+              <a:buNone/>
+            </a:pPr>
+            <a:r>
+              <a:rPr b="1" dirty="0" sz="1100" lang="en-US">
+                <a:solidFill>
+                  <a:srgbClr val="2DD4BF"/>
+                </a:solidFill>
+                <a:latin typeface="Calibri" pitchFamily="34" charset="0"/>
+                <a:ea typeface="Calibri" pitchFamily="34" charset="-122"/>
+                <a:cs typeface="Calibri" pitchFamily="34" charset="-120"/>
+              </a:rPr>
+              <a:t>Demo URL:</a:t>
+            </a:r>
+            <a:endParaRPr dirty="0" sz="1100" lang="en-US"/>
+          </a:p>
+        </p:txBody>
+      </p:sp>
+      <p:sp>
+        <p:nvSpPr>
+          <p:cNvPr id="1048670" name="Text 29"/>
+          <p:cNvSpPr/>
+          <p:nvPr/>
+        </p:nvSpPr>
+        <p:spPr>
+          <a:xfrm>
+            <a:off x="1645920" y="4270248"/>
+            <a:ext cx="6858000" cy="384048"/>
+          </a:xfrm>
+          <a:prstGeom prst="rect"/>
+          <a:noFill/>
+        </p:spPr>
+        <p:txBody>
+          <a:bodyPr anchor="ctr" bIns="0" lIns="0" rIns="0" rtlCol="0" tIns="0" wrap="square"/>
+          <a:p>
+            <a:pPr indent="0" marL="0">
+              <a:buNone/>
+            </a:pPr>
+            <a:r>
+              <a:rPr dirty="0" sz="1100" lang="en-US">
+                <a:solidFill>
+                  <a:srgbClr val="FFFFFF"/>
+                </a:solidFill>
+                <a:latin typeface="Calibri" pitchFamily="34" charset="0"/>
+                <a:ea typeface="Calibri" pitchFamily="34" charset="-122"/>
+                <a:cs typeface="Calibri" pitchFamily="34" charset="-120"/>
+                <a:hlinkClick r:id="rId2"/>
+              </a:rPr>
+              <a:t>h</a:t>
+            </a:r>
+            <a:r>
+              <a:rPr dirty="0" sz="1100" lang="en-US">
+                <a:solidFill>
+                  <a:srgbClr val="FFFFFF"/>
+                </a:solidFill>
+                <a:latin typeface="Calibri" pitchFamily="34" charset="0"/>
+                <a:ea typeface="Calibri" pitchFamily="34" charset="-122"/>
+                <a:cs typeface="Calibri" pitchFamily="34" charset="-120"/>
+                <a:hlinkClick r:id="rId2"/>
+              </a:rPr>
+              <a:t>t</a:t>
+            </a:r>
+            <a:r>
+              <a:rPr dirty="0" sz="1100" lang="en-US">
+                <a:solidFill>
+                  <a:srgbClr val="FFFFFF"/>
+                </a:solidFill>
+                <a:latin typeface="Calibri" pitchFamily="34" charset="0"/>
+                <a:ea typeface="Calibri" pitchFamily="34" charset="-122"/>
+                <a:cs typeface="Calibri" pitchFamily="34" charset="-120"/>
+                <a:hlinkClick r:id="rId2"/>
+              </a:rPr>
+              <a:t>t</a:t>
+            </a:r>
+            <a:r>
+              <a:rPr dirty="0" sz="1100" lang="en-US">
+                <a:solidFill>
+                  <a:srgbClr val="FFFFFF"/>
+                </a:solidFill>
+                <a:latin typeface="Calibri" pitchFamily="34" charset="0"/>
+                <a:ea typeface="Calibri" pitchFamily="34" charset="-122"/>
+                <a:cs typeface="Calibri" pitchFamily="34" charset="-120"/>
+                <a:hlinkClick r:id="rId2"/>
+              </a:rPr>
+              <a:t>p</a:t>
+            </a:r>
+            <a:r>
+              <a:rPr dirty="0" sz="1100" lang="en-US">
+                <a:solidFill>
+                  <a:srgbClr val="FFFFFF"/>
+                </a:solidFill>
+                <a:latin typeface="Calibri" pitchFamily="34" charset="0"/>
+                <a:ea typeface="Calibri" pitchFamily="34" charset="-122"/>
+                <a:cs typeface="Calibri" pitchFamily="34" charset="-120"/>
+                <a:hlinkClick r:id="rId2"/>
+              </a:rPr>
+              <a:t>:</a:t>
+            </a:r>
+            <a:r>
+              <a:rPr dirty="0" sz="1100" lang="en-US">
+                <a:solidFill>
+                  <a:srgbClr val="FFFFFF"/>
+                </a:solidFill>
+                <a:latin typeface="Calibri" pitchFamily="34" charset="0"/>
+                <a:ea typeface="Calibri" pitchFamily="34" charset="-122"/>
+                <a:cs typeface="Calibri" pitchFamily="34" charset="-120"/>
+                <a:hlinkClick r:id="rId2"/>
+              </a:rPr>
+              <a:t>/</a:t>
+            </a:r>
+            <a:r>
+              <a:rPr dirty="0" sz="1100" lang="en-US">
+                <a:solidFill>
+                  <a:srgbClr val="FFFFFF"/>
+                </a:solidFill>
+                <a:latin typeface="Calibri" pitchFamily="34" charset="0"/>
+                <a:ea typeface="Calibri" pitchFamily="34" charset="-122"/>
+                <a:cs typeface="Calibri" pitchFamily="34" charset="-120"/>
+                <a:hlinkClick r:id="rId2"/>
+              </a:rPr>
+              <a:t>/</a:t>
+            </a:r>
+            <a:r>
+              <a:rPr dirty="0" sz="1100" lang="en-US">
+                <a:solidFill>
+                  <a:srgbClr val="FFFFFF"/>
+                </a:solidFill>
+                <a:latin typeface="Calibri" pitchFamily="34" charset="0"/>
+                <a:ea typeface="Calibri" pitchFamily="34" charset="-122"/>
+                <a:cs typeface="Calibri" pitchFamily="34" charset="-120"/>
+                <a:hlinkClick r:id="rId2"/>
+              </a:rPr>
+              <a:t>tsa-phoenix-safetytech-39.github.io/lifeline/lifelineapp</a:t>
+            </a:r>
+            <a:r>
+              <a:rPr dirty="0" sz="1100" lang="en-US">
+                <a:solidFill>
+                  <a:srgbClr val="FFFFFF"/>
+                </a:solidFill>
+                <a:latin typeface="Calibri" pitchFamily="34" charset="0"/>
+                <a:ea typeface="Calibri" pitchFamily="34" charset="-122"/>
+                <a:cs typeface="Calibri" pitchFamily="34" charset="-120"/>
+              </a:rPr>
+              <a:t> </a:t>
+            </a:r>
+            <a:r>
+              <a:rPr dirty="0" sz="1100" lang="en-US">
+                <a:solidFill>
+                  <a:srgbClr val="FFFFFF"/>
+                </a:solidFill>
+                <a:latin typeface="Calibri" pitchFamily="34" charset="0"/>
+                <a:ea typeface="Calibri" pitchFamily="34" charset="-122"/>
+                <a:cs typeface="Calibri" pitchFamily="34" charset="-120"/>
+              </a:rPr>
+              <a:t> ·  Works on any phone  ·  Nigerian 3G tested  ·  No install required</a:t>
+            </a:r>
+            <a:endParaRPr dirty="0" sz="1100" lang="en-US"/>
           </a:p>
         </p:txBody>
       </p:sp>
@@ -6161,9 +7410,9 @@
 </p:sld>
 </file>
 
-<file path=ppt/slides/slide6.xml><?xml version="1.0" encoding="utf-8"?>
+<file path=ppt/slides/slide7.xml><?xml version="1.0" encoding="utf-8"?>
 <p:sld xmlns:a="http://schemas.openxmlformats.org/drawingml/2006/main" xmlns:r="http://schemas.openxmlformats.org/officeDocument/2006/relationships" xmlns:p="http://schemas.openxmlformats.org/presentationml/2006/main">
-  <p:cSld name="Slide 6">
+  <p:cSld name="Slide 7">
     <p:bg>
       <p:bgPr>
         <a:solidFill>
@@ -6209,14 +7458,14 @@
       </p:pic>
       <p:sp>
         <p:nvSpPr>
-          <p:cNvPr id="1048671" name="Text 0"/>
+          <p:cNvPr id="1048695" name="Text 0"/>
           <p:cNvSpPr/>
           <p:nvPr/>
         </p:nvSpPr>
         <p:spPr>
           <a:xfrm>
             <a:off x="411480" y="201168"/>
-            <a:ext cx="2743200" cy="228600"/>
+            <a:ext cx="4572000" cy="228600"/>
           </a:xfrm>
           <a:prstGeom prst="rect"/>
           <a:noFill/>
@@ -6236,7 +7485,7 @@
                 <a:ea typeface="Calibri" pitchFamily="34" charset="-122"/>
                 <a:cs typeface="Calibri" pitchFamily="34" charset="-120"/>
               </a:rPr>
-              <a:t>LIVE DEMO</a:t>
+              <a:t>ARCHITECTURE &amp; TECH</a:t>
             </a:r>
             <a:endParaRPr dirty="0" sz="900" lang="en-US"/>
           </a:p>
@@ -6244,26 +7493,26 @@
       </p:sp>
       <p:sp>
         <p:nvSpPr>
-          <p:cNvPr id="1048672" name="Text 1"/>
+          <p:cNvPr id="1048696" name="Text 1"/>
           <p:cNvSpPr/>
           <p:nvPr/>
         </p:nvSpPr>
         <p:spPr>
           <a:xfrm>
             <a:off x="411480" y="438912"/>
-            <a:ext cx="7589520" cy="475488"/>
-          </a:xfrm>
-          <a:prstGeom prst="rect"/>
-          <a:noFill/>
-        </p:spPr>
-        <p:txBody>
-          <a:bodyPr anchor="ctr" bIns="0" lIns="0" rIns="0" rtlCol="0" tIns="0" wrap="square"/>
-          <a:p>
-            <a:pPr indent="0" marL="0">
-              <a:buNone/>
-            </a:pPr>
-            <a:r>
-              <a:rPr b="1" dirty="0" sz="2600" lang="en-US">
+            <a:ext cx="7772400" cy="475488"/>
+          </a:xfrm>
+          <a:prstGeom prst="rect"/>
+          <a:noFill/>
+        </p:spPr>
+        <p:txBody>
+          <a:bodyPr anchor="ctr" bIns="0" lIns="0" rIns="0" rtlCol="0" tIns="0" wrap="square"/>
+          <a:p>
+            <a:pPr indent="0" marL="0">
+              <a:buNone/>
+            </a:pPr>
+            <a:r>
+              <a:rPr b="1" dirty="0" sz="2400" lang="en-US">
                 <a:solidFill>
                   <a:srgbClr val="0A1E3F"/>
                 </a:solidFill>
@@ -6271,22 +7520,22 @@
                 <a:ea typeface="Calibri" pitchFamily="34" charset="-122"/>
                 <a:cs typeface="Calibri" pitchFamily="34" charset="-120"/>
               </a:rPr>
-              <a:t>What you will see in the next 90 seconds</a:t>
-            </a:r>
-            <a:endParaRPr dirty="0" sz="2600" lang="en-US"/>
-          </a:p>
-        </p:txBody>
-      </p:sp>
-      <p:sp>
-        <p:nvSpPr>
-          <p:cNvPr id="1048673" name="Shape 2"/>
+              <a:t>Built for Nigerian networks, not California ones.</a:t>
+            </a:r>
+            <a:endParaRPr dirty="0" sz="2400" lang="en-US"/>
+          </a:p>
+        </p:txBody>
+      </p:sp>
+      <p:sp>
+        <p:nvSpPr>
+          <p:cNvPr id="1048697" name="Shape 2"/>
           <p:cNvSpPr/>
           <p:nvPr/>
         </p:nvSpPr>
         <p:spPr>
           <a:xfrm>
             <a:off x="411480" y="1078992"/>
-            <a:ext cx="1554480" cy="3017520"/>
+            <a:ext cx="1371600" cy="411480"/>
           </a:xfrm>
           <a:prstGeom prst="rect"/>
           <a:solidFill>
@@ -6302,22 +7551,57 @@
       </p:sp>
       <p:sp>
         <p:nvSpPr>
-          <p:cNvPr id="1048674" name="Shape 3"/>
-          <p:cNvSpPr/>
-          <p:nvPr/>
-        </p:nvSpPr>
-        <p:spPr>
-          <a:xfrm>
-            <a:off x="411480" y="1078992"/>
-            <a:ext cx="1554480" cy="457200"/>
+          <p:cNvPr id="1048698" name="Text 3"/>
+          <p:cNvSpPr/>
+          <p:nvPr/>
+        </p:nvSpPr>
+        <p:spPr>
+          <a:xfrm>
+            <a:off x="502920" y="1097280"/>
+            <a:ext cx="1280160" cy="374904"/>
+          </a:xfrm>
+          <a:prstGeom prst="rect"/>
+          <a:noFill/>
+        </p:spPr>
+        <p:txBody>
+          <a:bodyPr anchor="ctr" bIns="0" lIns="0" rIns="0" rtlCol="0" tIns="0" wrap="square"/>
+          <a:p>
+            <a:pPr indent="0" marL="0">
+              <a:buNone/>
+            </a:pPr>
+            <a:r>
+              <a:rPr b="1" dirty="0" sz="1000" lang="en-US">
+                <a:solidFill>
+                  <a:srgbClr val="2DD4BF"/>
+                </a:solidFill>
+                <a:latin typeface="Calibri" pitchFamily="34" charset="0"/>
+                <a:ea typeface="Calibri" pitchFamily="34" charset="-122"/>
+                <a:cs typeface="Calibri" pitchFamily="34" charset="-120"/>
+              </a:rPr>
+              <a:t>Frontend</a:t>
+            </a:r>
+            <a:endParaRPr dirty="0" sz="1000" lang="en-US"/>
+          </a:p>
+        </p:txBody>
+      </p:sp>
+      <p:sp>
+        <p:nvSpPr>
+          <p:cNvPr id="1048699" name="Shape 4"/>
+          <p:cNvSpPr/>
+          <p:nvPr/>
+        </p:nvSpPr>
+        <p:spPr>
+          <a:xfrm>
+            <a:off x="1783080" y="1078992"/>
+            <a:ext cx="3474720" cy="411480"/>
           </a:xfrm>
           <a:prstGeom prst="rect"/>
           <a:solidFill>
-            <a:srgbClr val="2DD4BF"/>
+            <a:srgbClr val="F1F5F9"/>
           </a:solidFill>
           <a:ln w="12700">
             <a:solidFill>
-              <a:srgbClr val="2DD4BF"/>
+              <a:srgbClr val="94A3B8"/>
             </a:solidFill>
             <a:prstDash val="solid"/>
           </a:ln>
@@ -6325,153 +7609,49 @@
       </p:sp>
       <p:sp>
         <p:nvSpPr>
-          <p:cNvPr id="1048675" name="Text 4"/>
-          <p:cNvSpPr/>
-          <p:nvPr/>
-        </p:nvSpPr>
-        <p:spPr>
-          <a:xfrm>
-            <a:off x="457200" y="1115568"/>
-            <a:ext cx="457200" cy="384048"/>
-          </a:xfrm>
-          <a:prstGeom prst="rect"/>
-          <a:noFill/>
-        </p:spPr>
-        <p:txBody>
-          <a:bodyPr anchor="ctr" bIns="0" lIns="0" rIns="0" rtlCol="0" tIns="0" wrap="square"/>
-          <a:p>
-            <a:pPr indent="0" marL="0">
-              <a:buNone/>
-            </a:pPr>
-            <a:r>
-              <a:rPr b="1" dirty="0" sz="2200" lang="en-US">
-                <a:solidFill>
-                  <a:srgbClr val="FFFFFF"/>
-                </a:solidFill>
-                <a:latin typeface="Calibri" pitchFamily="34" charset="0"/>
-                <a:ea typeface="Calibri" pitchFamily="34" charset="-122"/>
-                <a:cs typeface="Calibri" pitchFamily="34" charset="-120"/>
-              </a:rPr>
-              <a:t>1</a:t>
-            </a:r>
-            <a:endParaRPr dirty="0" sz="2200" lang="en-US"/>
-          </a:p>
-        </p:txBody>
-      </p:sp>
-      <p:sp>
-        <p:nvSpPr>
-          <p:cNvPr id="1048676" name="Text 5"/>
-          <p:cNvSpPr/>
-          <p:nvPr/>
-        </p:nvSpPr>
-        <p:spPr>
-          <a:xfrm>
-            <a:off x="868680" y="1152144"/>
-            <a:ext cx="1051560" cy="347472"/>
-          </a:xfrm>
-          <a:prstGeom prst="rect"/>
-          <a:noFill/>
-        </p:spPr>
-        <p:txBody>
-          <a:bodyPr anchor="ctr" bIns="0" lIns="0" rIns="0" rtlCol="0" tIns="0" wrap="square"/>
-          <a:p>
-            <a:pPr indent="0" marL="0">
-              <a:buNone/>
-            </a:pPr>
-            <a:r>
-              <a:rPr b="1" dirty="0" sz="1100" lang="en-US">
-                <a:solidFill>
-                  <a:srgbClr val="FFFFFF"/>
-                </a:solidFill>
-                <a:latin typeface="Calibri" pitchFamily="34" charset="0"/>
-                <a:ea typeface="Calibri" pitchFamily="34" charset="-122"/>
-                <a:cs typeface="Calibri" pitchFamily="34" charset="-120"/>
-              </a:rPr>
-              <a:t>Onboarding</a:t>
-            </a:r>
-            <a:endParaRPr dirty="0" sz="1100" lang="en-US"/>
-          </a:p>
-        </p:txBody>
-      </p:sp>
-      <p:sp>
-        <p:nvSpPr>
-          <p:cNvPr id="1048677" name="Text 6"/>
-          <p:cNvSpPr/>
-          <p:nvPr/>
-        </p:nvSpPr>
-        <p:spPr>
-          <a:xfrm>
-            <a:off x="502920" y="1664208"/>
-            <a:ext cx="1371600" cy="2286000"/>
-          </a:xfrm>
-          <a:prstGeom prst="rect"/>
-          <a:noFill/>
-        </p:spPr>
-        <p:txBody>
-          <a:bodyPr anchor="ctr" bIns="0" lIns="0" rIns="0" rtlCol="0" tIns="0" wrap="square"/>
-          <a:p>
-            <a:pPr indent="0" marL="0">
-              <a:buNone/>
-            </a:pPr>
-            <a:r>
-              <a:rPr dirty="0" sz="1250" lang="en-US">
-                <a:solidFill>
-                  <a:srgbClr val="A0B8D0"/>
-                </a:solidFill>
-                <a:latin typeface="Calibri" pitchFamily="34" charset="0"/>
-                <a:ea typeface="Calibri" pitchFamily="34" charset="-122"/>
-                <a:cs typeface="Calibri" pitchFamily="34" charset="-120"/>
-              </a:rPr>
-              <a:t>OTP screen</a:t>
-            </a:r>
-            <a:endParaRPr dirty="0" sz="1250" lang="en-US"/>
-          </a:p>
-          <a:p>
-            <a:pPr indent="0" marL="0">
-              <a:buNone/>
-            </a:pPr>
-            <a:r>
-              <a:rPr dirty="0" sz="1250" lang="en-US">
-                <a:solidFill>
-                  <a:srgbClr val="A0B8D0"/>
-                </a:solidFill>
-                <a:latin typeface="Calibri" pitchFamily="34" charset="0"/>
-                <a:ea typeface="Calibri" pitchFamily="34" charset="-122"/>
-                <a:cs typeface="Calibri" pitchFamily="34" charset="-120"/>
-              </a:rPr>
-              <a:t>Demo code:</a:t>
-            </a:r>
-            <a:endParaRPr dirty="0" sz="1250" lang="en-US"/>
-          </a:p>
-          <a:p>
-            <a:pPr indent="0" marL="0">
-              <a:buNone/>
-            </a:pPr>
-            <a:r>
-              <a:rPr dirty="0" sz="1250" lang="en-US">
-                <a:solidFill>
-                  <a:srgbClr val="A0B8D0"/>
-                </a:solidFill>
-                <a:latin typeface="Calibri" pitchFamily="34" charset="0"/>
-                <a:ea typeface="Calibri" pitchFamily="34" charset="-122"/>
-                <a:cs typeface="Calibri" pitchFamily="34" charset="-120"/>
-              </a:rPr>
-              <a:t>8484</a:t>
-            </a:r>
-            <a:endParaRPr dirty="0" sz="1250" lang="en-US"/>
-          </a:p>
-        </p:txBody>
-      </p:sp>
-      <p:sp>
-        <p:nvSpPr>
-          <p:cNvPr id="1048678" name="Shape 7"/>
-          <p:cNvSpPr/>
-          <p:nvPr/>
-        </p:nvSpPr>
-        <p:spPr>
-          <a:xfrm>
-            <a:off x="2112264" y="1078992"/>
-            <a:ext cx="1554480" cy="3017520"/>
+          <p:cNvPr id="1048700" name="Text 5"/>
+          <p:cNvSpPr/>
+          <p:nvPr/>
+        </p:nvSpPr>
+        <p:spPr>
+          <a:xfrm>
+            <a:off x="1874520" y="1097280"/>
+            <a:ext cx="3383280" cy="374904"/>
+          </a:xfrm>
+          <a:prstGeom prst="rect"/>
+          <a:noFill/>
+        </p:spPr>
+        <p:txBody>
+          <a:bodyPr anchor="ctr" bIns="0" lIns="0" rIns="0" rtlCol="0" tIns="0" wrap="square"/>
+          <a:p>
+            <a:pPr indent="0" marL="0">
+              <a:buNone/>
+            </a:pPr>
+            <a:r>
+              <a:rPr dirty="0" sz="1000" lang="en-US">
+                <a:solidFill>
+                  <a:srgbClr val="334155"/>
+                </a:solidFill>
+                <a:latin typeface="Calibri" pitchFamily="34" charset="0"/>
+                <a:ea typeface="Calibri" pitchFamily="34" charset="-122"/>
+                <a:cs typeface="Calibri" pitchFamily="34" charset="-120"/>
+              </a:rPr>
+              <a:t>Vanilla HTML + CSS + JavaScript. No framework. No build step.</a:t>
+            </a:r>
+            <a:endParaRPr dirty="0" sz="1000" lang="en-US"/>
+          </a:p>
+        </p:txBody>
+      </p:sp>
+      <p:sp>
+        <p:nvSpPr>
+          <p:cNvPr id="1048701" name="Shape 6"/>
+          <p:cNvSpPr/>
+          <p:nvPr/>
+        </p:nvSpPr>
+        <p:spPr>
+          <a:xfrm>
+            <a:off x="411480" y="1508760"/>
+            <a:ext cx="1371600" cy="411480"/>
           </a:xfrm>
           <a:prstGeom prst="rect"/>
           <a:solidFill>
@@ -6487,22 +7667,57 @@
       </p:sp>
       <p:sp>
         <p:nvSpPr>
-          <p:cNvPr id="1048679" name="Shape 8"/>
-          <p:cNvSpPr/>
-          <p:nvPr/>
-        </p:nvSpPr>
-        <p:spPr>
-          <a:xfrm>
-            <a:off x="2112264" y="1078992"/>
-            <a:ext cx="1554480" cy="457200"/>
+          <p:cNvPr id="1048702" name="Text 7"/>
+          <p:cNvSpPr/>
+          <p:nvPr/>
+        </p:nvSpPr>
+        <p:spPr>
+          <a:xfrm>
+            <a:off x="502920" y="1527048"/>
+            <a:ext cx="1280160" cy="374904"/>
+          </a:xfrm>
+          <a:prstGeom prst="rect"/>
+          <a:noFill/>
+        </p:spPr>
+        <p:txBody>
+          <a:bodyPr anchor="ctr" bIns="0" lIns="0" rIns="0" rtlCol="0" tIns="0" wrap="square"/>
+          <a:p>
+            <a:pPr indent="0" marL="0">
+              <a:buNone/>
+            </a:pPr>
+            <a:r>
+              <a:rPr b="1" dirty="0" sz="1000" lang="en-US">
+                <a:solidFill>
+                  <a:srgbClr val="2DD4BF"/>
+                </a:solidFill>
+                <a:latin typeface="Calibri" pitchFamily="34" charset="0"/>
+                <a:ea typeface="Calibri" pitchFamily="34" charset="-122"/>
+                <a:cs typeface="Calibri" pitchFamily="34" charset="-120"/>
+              </a:rPr>
+              <a:t>Map</a:t>
+            </a:r>
+            <a:endParaRPr dirty="0" sz="1000" lang="en-US"/>
+          </a:p>
+        </p:txBody>
+      </p:sp>
+      <p:sp>
+        <p:nvSpPr>
+          <p:cNvPr id="1048703" name="Shape 8"/>
+          <p:cNvSpPr/>
+          <p:nvPr/>
+        </p:nvSpPr>
+        <p:spPr>
+          <a:xfrm>
+            <a:off x="1783080" y="1508760"/>
+            <a:ext cx="3474720" cy="411480"/>
           </a:xfrm>
           <a:prstGeom prst="rect"/>
           <a:solidFill>
-            <a:srgbClr val="10B981"/>
+            <a:srgbClr val="FFFFFF"/>
           </a:solidFill>
           <a:ln w="12700">
             <a:solidFill>
-              <a:srgbClr val="10B981"/>
+              <a:srgbClr val="94A3B8"/>
             </a:solidFill>
             <a:prstDash val="solid"/>
           </a:ln>
@@ -6510,153 +7725,49 @@
       </p:sp>
       <p:sp>
         <p:nvSpPr>
-          <p:cNvPr id="1048680" name="Text 9"/>
-          <p:cNvSpPr/>
-          <p:nvPr/>
-        </p:nvSpPr>
-        <p:spPr>
-          <a:xfrm>
-            <a:off x="2157984" y="1115568"/>
-            <a:ext cx="457200" cy="384048"/>
-          </a:xfrm>
-          <a:prstGeom prst="rect"/>
-          <a:noFill/>
-        </p:spPr>
-        <p:txBody>
-          <a:bodyPr anchor="ctr" bIns="0" lIns="0" rIns="0" rtlCol="0" tIns="0" wrap="square"/>
-          <a:p>
-            <a:pPr indent="0" marL="0">
-              <a:buNone/>
-            </a:pPr>
-            <a:r>
-              <a:rPr b="1" dirty="0" sz="2200" lang="en-US">
-                <a:solidFill>
-                  <a:srgbClr val="FFFFFF"/>
-                </a:solidFill>
-                <a:latin typeface="Calibri" pitchFamily="34" charset="0"/>
-                <a:ea typeface="Calibri" pitchFamily="34" charset="-122"/>
-                <a:cs typeface="Calibri" pitchFamily="34" charset="-120"/>
-              </a:rPr>
-              <a:t>2</a:t>
-            </a:r>
-            <a:endParaRPr dirty="0" sz="2200" lang="en-US"/>
-          </a:p>
-        </p:txBody>
-      </p:sp>
-      <p:sp>
-        <p:nvSpPr>
-          <p:cNvPr id="1048681" name="Text 10"/>
-          <p:cNvSpPr/>
-          <p:nvPr/>
-        </p:nvSpPr>
-        <p:spPr>
-          <a:xfrm>
-            <a:off x="2569464" y="1152144"/>
-            <a:ext cx="1051560" cy="347472"/>
-          </a:xfrm>
-          <a:prstGeom prst="rect"/>
-          <a:noFill/>
-        </p:spPr>
-        <p:txBody>
-          <a:bodyPr anchor="ctr" bIns="0" lIns="0" rIns="0" rtlCol="0" tIns="0" wrap="square"/>
-          <a:p>
-            <a:pPr indent="0" marL="0">
-              <a:buNone/>
-            </a:pPr>
-            <a:r>
-              <a:rPr b="1" dirty="0" sz="1100" lang="en-US">
-                <a:solidFill>
-                  <a:srgbClr val="FFFFFF"/>
-                </a:solidFill>
-                <a:latin typeface="Calibri" pitchFamily="34" charset="0"/>
-                <a:ea typeface="Calibri" pitchFamily="34" charset="-122"/>
-                <a:cs typeface="Calibri" pitchFamily="34" charset="-120"/>
-              </a:rPr>
-              <a:t>Safe Arrival</a:t>
-            </a:r>
-            <a:endParaRPr dirty="0" sz="1100" lang="en-US"/>
-          </a:p>
-        </p:txBody>
-      </p:sp>
-      <p:sp>
-        <p:nvSpPr>
-          <p:cNvPr id="1048682" name="Text 11"/>
-          <p:cNvSpPr/>
-          <p:nvPr/>
-        </p:nvSpPr>
-        <p:spPr>
-          <a:xfrm>
-            <a:off x="2203704" y="1664208"/>
-            <a:ext cx="1371600" cy="2286000"/>
-          </a:xfrm>
-          <a:prstGeom prst="rect"/>
-          <a:noFill/>
-        </p:spPr>
-        <p:txBody>
-          <a:bodyPr anchor="ctr" bIns="0" lIns="0" rIns="0" rtlCol="0" tIns="0" wrap="square"/>
-          <a:p>
-            <a:pPr indent="0" marL="0">
-              <a:buNone/>
-            </a:pPr>
-            <a:r>
-              <a:rPr dirty="0" sz="1250" lang="en-US">
-                <a:solidFill>
-                  <a:srgbClr val="A0B8D0"/>
-                </a:solidFill>
-                <a:latin typeface="Calibri" pitchFamily="34" charset="0"/>
-                <a:ea typeface="Calibri" pitchFamily="34" charset="-122"/>
-                <a:cs typeface="Calibri" pitchFamily="34" charset="-120"/>
-              </a:rPr>
-              <a:t>Set destination</a:t>
-            </a:r>
-            <a:endParaRPr dirty="0" sz="1250" lang="en-US"/>
-          </a:p>
-          <a:p>
-            <a:pPr indent="0" marL="0">
-              <a:buNone/>
-            </a:pPr>
-            <a:r>
-              <a:rPr dirty="0" sz="1250" lang="en-US">
-                <a:solidFill>
-                  <a:srgbClr val="A0B8D0"/>
-                </a:solidFill>
-                <a:latin typeface="Calibri" pitchFamily="34" charset="0"/>
-                <a:ea typeface="Calibri" pitchFamily="34" charset="-122"/>
-                <a:cs typeface="Calibri" pitchFamily="34" charset="-120"/>
-              </a:rPr>
-              <a:t>+ ETA</a:t>
-            </a:r>
-            <a:endParaRPr dirty="0" sz="1250" lang="en-US"/>
-          </a:p>
-          <a:p>
-            <a:pPr indent="0" marL="0">
-              <a:buNone/>
-            </a:pPr>
-            <a:r>
-              <a:rPr dirty="0" sz="1250" lang="en-US">
-                <a:solidFill>
-                  <a:srgbClr val="A0B8D0"/>
-                </a:solidFill>
-                <a:latin typeface="Calibri" pitchFamily="34" charset="0"/>
-                <a:ea typeface="Calibri" pitchFamily="34" charset="-122"/>
-                <a:cs typeface="Calibri" pitchFamily="34" charset="-120"/>
-              </a:rPr>
-              <a:t>Share contacts</a:t>
-            </a:r>
-            <a:endParaRPr dirty="0" sz="1250" lang="en-US"/>
-          </a:p>
-        </p:txBody>
-      </p:sp>
-      <p:sp>
-        <p:nvSpPr>
-          <p:cNvPr id="1048683" name="Shape 12"/>
-          <p:cNvSpPr/>
-          <p:nvPr/>
-        </p:nvSpPr>
-        <p:spPr>
-          <a:xfrm>
-            <a:off x="3813048" y="1078992"/>
-            <a:ext cx="1554480" cy="3017520"/>
+          <p:cNvPr id="1048704" name="Text 9"/>
+          <p:cNvSpPr/>
+          <p:nvPr/>
+        </p:nvSpPr>
+        <p:spPr>
+          <a:xfrm>
+            <a:off x="1874520" y="1527048"/>
+            <a:ext cx="3383280" cy="374904"/>
+          </a:xfrm>
+          <a:prstGeom prst="rect"/>
+          <a:noFill/>
+        </p:spPr>
+        <p:txBody>
+          <a:bodyPr anchor="ctr" bIns="0" lIns="0" rIns="0" rtlCol="0" tIns="0" wrap="square"/>
+          <a:p>
+            <a:pPr indent="0" marL="0">
+              <a:buNone/>
+            </a:pPr>
+            <a:r>
+              <a:rPr dirty="0" sz="1000" lang="en-US">
+                <a:solidFill>
+                  <a:srgbClr val="334155"/>
+                </a:solidFill>
+                <a:latin typeface="Calibri" pitchFamily="34" charset="0"/>
+                <a:ea typeface="Calibri" pitchFamily="34" charset="-122"/>
+                <a:cs typeface="Calibri" pitchFamily="34" charset="-120"/>
+              </a:rPr>
+              <a:t>Leaflet 1.9.4 — embedded inline (~147KB). Zero CDN dependency.</a:t>
+            </a:r>
+            <a:endParaRPr dirty="0" sz="1000" lang="en-US"/>
+          </a:p>
+        </p:txBody>
+      </p:sp>
+      <p:sp>
+        <p:nvSpPr>
+          <p:cNvPr id="1048705" name="Shape 10"/>
+          <p:cNvSpPr/>
+          <p:nvPr/>
+        </p:nvSpPr>
+        <p:spPr>
+          <a:xfrm>
+            <a:off x="411480" y="1938528"/>
+            <a:ext cx="1371600" cy="411480"/>
           </a:xfrm>
           <a:prstGeom prst="rect"/>
           <a:solidFill>
@@ -6672,22 +7783,57 @@
       </p:sp>
       <p:sp>
         <p:nvSpPr>
-          <p:cNvPr id="1048684" name="Shape 13"/>
-          <p:cNvSpPr/>
-          <p:nvPr/>
-        </p:nvSpPr>
-        <p:spPr>
-          <a:xfrm>
-            <a:off x="3813048" y="1078992"/>
-            <a:ext cx="1554480" cy="457200"/>
+          <p:cNvPr id="1048706" name="Text 11"/>
+          <p:cNvSpPr/>
+          <p:nvPr/>
+        </p:nvSpPr>
+        <p:spPr>
+          <a:xfrm>
+            <a:off x="502920" y="1956816"/>
+            <a:ext cx="1280160" cy="374904"/>
+          </a:xfrm>
+          <a:prstGeom prst="rect"/>
+          <a:noFill/>
+        </p:spPr>
+        <p:txBody>
+          <a:bodyPr anchor="ctr" bIns="0" lIns="0" rIns="0" rtlCol="0" tIns="0" wrap="square"/>
+          <a:p>
+            <a:pPr indent="0" marL="0">
+              <a:buNone/>
+            </a:pPr>
+            <a:r>
+              <a:rPr b="1" dirty="0" sz="1000" lang="en-US">
+                <a:solidFill>
+                  <a:srgbClr val="2DD4BF"/>
+                </a:solidFill>
+                <a:latin typeface="Calibri" pitchFamily="34" charset="0"/>
+                <a:ea typeface="Calibri" pitchFamily="34" charset="-122"/>
+                <a:cs typeface="Calibri" pitchFamily="34" charset="-120"/>
+              </a:rPr>
+              <a:t>Map tiles</a:t>
+            </a:r>
+            <a:endParaRPr dirty="0" sz="1000" lang="en-US"/>
+          </a:p>
+        </p:txBody>
+      </p:sp>
+      <p:sp>
+        <p:nvSpPr>
+          <p:cNvPr id="1048707" name="Shape 12"/>
+          <p:cNvSpPr/>
+          <p:nvPr/>
+        </p:nvSpPr>
+        <p:spPr>
+          <a:xfrm>
+            <a:off x="1783080" y="1938528"/>
+            <a:ext cx="3474720" cy="411480"/>
           </a:xfrm>
           <a:prstGeom prst="rect"/>
           <a:solidFill>
-            <a:srgbClr val="3B82F6"/>
+            <a:srgbClr val="F1F5F9"/>
           </a:solidFill>
           <a:ln w="12700">
             <a:solidFill>
-              <a:srgbClr val="3B82F6"/>
+              <a:srgbClr val="94A3B8"/>
             </a:solidFill>
             <a:prstDash val="solid"/>
           </a:ln>
@@ -6695,153 +7841,49 @@
       </p:sp>
       <p:sp>
         <p:nvSpPr>
-          <p:cNvPr id="1048685" name="Text 14"/>
-          <p:cNvSpPr/>
-          <p:nvPr/>
-        </p:nvSpPr>
-        <p:spPr>
-          <a:xfrm>
-            <a:off x="3858768" y="1115568"/>
-            <a:ext cx="457200" cy="384048"/>
-          </a:xfrm>
-          <a:prstGeom prst="rect"/>
-          <a:noFill/>
-        </p:spPr>
-        <p:txBody>
-          <a:bodyPr anchor="ctr" bIns="0" lIns="0" rIns="0" rtlCol="0" tIns="0" wrap="square"/>
-          <a:p>
-            <a:pPr indent="0" marL="0">
-              <a:buNone/>
-            </a:pPr>
-            <a:r>
-              <a:rPr b="1" dirty="0" sz="2200" lang="en-US">
-                <a:solidFill>
-                  <a:srgbClr val="FFFFFF"/>
-                </a:solidFill>
-                <a:latin typeface="Calibri" pitchFamily="34" charset="0"/>
-                <a:ea typeface="Calibri" pitchFamily="34" charset="-122"/>
-                <a:cs typeface="Calibri" pitchFamily="34" charset="-120"/>
-              </a:rPr>
-              <a:t>3</a:t>
-            </a:r>
-            <a:endParaRPr dirty="0" sz="2200" lang="en-US"/>
-          </a:p>
-        </p:txBody>
-      </p:sp>
-      <p:sp>
-        <p:nvSpPr>
-          <p:cNvPr id="1048686" name="Text 15"/>
-          <p:cNvSpPr/>
-          <p:nvPr/>
-        </p:nvSpPr>
-        <p:spPr>
-          <a:xfrm>
-            <a:off x="4270248" y="1152144"/>
-            <a:ext cx="1051560" cy="347472"/>
-          </a:xfrm>
-          <a:prstGeom prst="rect"/>
-          <a:noFill/>
-        </p:spPr>
-        <p:txBody>
-          <a:bodyPr anchor="ctr" bIns="0" lIns="0" rIns="0" rtlCol="0" tIns="0" wrap="square"/>
-          <a:p>
-            <a:pPr indent="0" marL="0">
-              <a:buNone/>
-            </a:pPr>
-            <a:r>
-              <a:rPr b="1" dirty="0" sz="1100" lang="en-US">
-                <a:solidFill>
-                  <a:srgbClr val="FFFFFF"/>
-                </a:solidFill>
-                <a:latin typeface="Calibri" pitchFamily="34" charset="0"/>
-                <a:ea typeface="Calibri" pitchFamily="34" charset="-122"/>
-                <a:cs typeface="Calibri" pitchFamily="34" charset="-120"/>
-              </a:rPr>
-              <a:t>Live Tracking</a:t>
-            </a:r>
-            <a:endParaRPr dirty="0" sz="1100" lang="en-US"/>
-          </a:p>
-        </p:txBody>
-      </p:sp>
-      <p:sp>
-        <p:nvSpPr>
-          <p:cNvPr id="1048687" name="Text 16"/>
-          <p:cNvSpPr/>
-          <p:nvPr/>
-        </p:nvSpPr>
-        <p:spPr>
-          <a:xfrm>
-            <a:off x="3904488" y="1664208"/>
-            <a:ext cx="1371600" cy="2286000"/>
-          </a:xfrm>
-          <a:prstGeom prst="rect"/>
-          <a:noFill/>
-        </p:spPr>
-        <p:txBody>
-          <a:bodyPr anchor="ctr" bIns="0" lIns="0" rIns="0" rtlCol="0" tIns="0" wrap="square"/>
-          <a:p>
-            <a:pPr indent="0" marL="0">
-              <a:buNone/>
-            </a:pPr>
-            <a:r>
-              <a:rPr dirty="0" sz="1250" lang="en-US">
-                <a:solidFill>
-                  <a:srgbClr val="A0B8D0"/>
-                </a:solidFill>
-                <a:latin typeface="Calibri" pitchFamily="34" charset="0"/>
-                <a:ea typeface="Calibri" pitchFamily="34" charset="-122"/>
-                <a:cs typeface="Calibri" pitchFamily="34" charset="-120"/>
-              </a:rPr>
-              <a:t>OSM map</a:t>
-            </a:r>
-            <a:endParaRPr dirty="0" sz="1250" lang="en-US"/>
-          </a:p>
-          <a:p>
-            <a:pPr indent="0" marL="0">
-              <a:buNone/>
-            </a:pPr>
-            <a:r>
-              <a:rPr dirty="0" sz="1250" lang="en-US">
-                <a:solidFill>
-                  <a:srgbClr val="A0B8D0"/>
-                </a:solidFill>
-                <a:latin typeface="Calibri" pitchFamily="34" charset="0"/>
-                <a:ea typeface="Calibri" pitchFamily="34" charset="-122"/>
-                <a:cs typeface="Calibri" pitchFamily="34" charset="-120"/>
-              </a:rPr>
-              <a:t>Countdown</a:t>
-            </a:r>
-            <a:endParaRPr dirty="0" sz="1250" lang="en-US"/>
-          </a:p>
-          <a:p>
-            <a:pPr indent="0" marL="0">
-              <a:buNone/>
-            </a:pPr>
-            <a:r>
-              <a:rPr dirty="0" sz="1250" lang="en-US">
-                <a:solidFill>
-                  <a:srgbClr val="A0B8D0"/>
-                </a:solidFill>
-                <a:latin typeface="Calibri" pitchFamily="34" charset="0"/>
-                <a:ea typeface="Calibri" pitchFamily="34" charset="-122"/>
-                <a:cs typeface="Calibri" pitchFamily="34" charset="-120"/>
-              </a:rPr>
-              <a:t>timer</a:t>
-            </a:r>
-            <a:endParaRPr dirty="0" sz="1250" lang="en-US"/>
-          </a:p>
-        </p:txBody>
-      </p:sp>
-      <p:sp>
-        <p:nvSpPr>
-          <p:cNvPr id="1048688" name="Shape 17"/>
-          <p:cNvSpPr/>
-          <p:nvPr/>
-        </p:nvSpPr>
-        <p:spPr>
-          <a:xfrm>
-            <a:off x="5513832" y="1078992"/>
-            <a:ext cx="1554480" cy="3017520"/>
+          <p:cNvPr id="1048708" name="Text 13"/>
+          <p:cNvSpPr/>
+          <p:nvPr/>
+        </p:nvSpPr>
+        <p:spPr>
+          <a:xfrm>
+            <a:off x="1874520" y="1956816"/>
+            <a:ext cx="3383280" cy="374904"/>
+          </a:xfrm>
+          <a:prstGeom prst="rect"/>
+          <a:noFill/>
+        </p:spPr>
+        <p:txBody>
+          <a:bodyPr anchor="ctr" bIns="0" lIns="0" rIns="0" rtlCol="0" tIns="0" wrap="square"/>
+          <a:p>
+            <a:pPr indent="0" marL="0">
+              <a:buNone/>
+            </a:pPr>
+            <a:r>
+              <a:rPr dirty="0" sz="1000" lang="en-US">
+                <a:solidFill>
+                  <a:srgbClr val="334155"/>
+                </a:solidFill>
+                <a:latin typeface="Calibri" pitchFamily="34" charset="0"/>
+                <a:ea typeface="Calibri" pitchFamily="34" charset="-122"/>
+                <a:cs typeface="Calibri" pitchFamily="34" charset="-120"/>
+              </a:rPr>
+              <a:t>OpenStreetMap (free, no API key). Fails gracefully to grey.</a:t>
+            </a:r>
+            <a:endParaRPr dirty="0" sz="1000" lang="en-US"/>
+          </a:p>
+        </p:txBody>
+      </p:sp>
+      <p:sp>
+        <p:nvSpPr>
+          <p:cNvPr id="1048709" name="Shape 14"/>
+          <p:cNvSpPr/>
+          <p:nvPr/>
+        </p:nvSpPr>
+        <p:spPr>
+          <a:xfrm>
+            <a:off x="411480" y="2368296"/>
+            <a:ext cx="1371600" cy="411480"/>
           </a:xfrm>
           <a:prstGeom prst="rect"/>
           <a:solidFill>
@@ -6857,22 +7899,57 @@
       </p:sp>
       <p:sp>
         <p:nvSpPr>
-          <p:cNvPr id="1048689" name="Shape 18"/>
-          <p:cNvSpPr/>
-          <p:nvPr/>
-        </p:nvSpPr>
-        <p:spPr>
-          <a:xfrm>
-            <a:off x="5513832" y="1078992"/>
-            <a:ext cx="1554480" cy="457200"/>
+          <p:cNvPr id="1048710" name="Text 15"/>
+          <p:cNvSpPr/>
+          <p:nvPr/>
+        </p:nvSpPr>
+        <p:spPr>
+          <a:xfrm>
+            <a:off x="502920" y="2386584"/>
+            <a:ext cx="1280160" cy="374904"/>
+          </a:xfrm>
+          <a:prstGeom prst="rect"/>
+          <a:noFill/>
+        </p:spPr>
+        <p:txBody>
+          <a:bodyPr anchor="ctr" bIns="0" lIns="0" rIns="0" rtlCol="0" tIns="0" wrap="square"/>
+          <a:p>
+            <a:pPr indent="0" marL="0">
+              <a:buNone/>
+            </a:pPr>
+            <a:r>
+              <a:rPr b="1" dirty="0" sz="1000" lang="en-US">
+                <a:solidFill>
+                  <a:srgbClr val="2DD4BF"/>
+                </a:solidFill>
+                <a:latin typeface="Calibri" pitchFamily="34" charset="0"/>
+                <a:ea typeface="Calibri" pitchFamily="34" charset="-122"/>
+                <a:cs typeface="Calibri" pitchFamily="34" charset="-120"/>
+              </a:rPr>
+              <a:t>Location</a:t>
+            </a:r>
+            <a:endParaRPr dirty="0" sz="1000" lang="en-US"/>
+          </a:p>
+        </p:txBody>
+      </p:sp>
+      <p:sp>
+        <p:nvSpPr>
+          <p:cNvPr id="1048711" name="Shape 16"/>
+          <p:cNvSpPr/>
+          <p:nvPr/>
+        </p:nvSpPr>
+        <p:spPr>
+          <a:xfrm>
+            <a:off x="1783080" y="2368296"/>
+            <a:ext cx="3474720" cy="411480"/>
           </a:xfrm>
           <a:prstGeom prst="rect"/>
           <a:solidFill>
-            <a:srgbClr val="EF4444"/>
+            <a:srgbClr val="FFFFFF"/>
           </a:solidFill>
           <a:ln w="12700">
             <a:solidFill>
-              <a:srgbClr val="EF4444"/>
+              <a:srgbClr val="94A3B8"/>
             </a:solidFill>
             <a:prstDash val="solid"/>
           </a:ln>
@@ -6880,153 +7957,49 @@
       </p:sp>
       <p:sp>
         <p:nvSpPr>
-          <p:cNvPr id="1048690" name="Text 19"/>
-          <p:cNvSpPr/>
-          <p:nvPr/>
-        </p:nvSpPr>
-        <p:spPr>
-          <a:xfrm>
-            <a:off x="5559552" y="1115568"/>
-            <a:ext cx="457200" cy="384048"/>
-          </a:xfrm>
-          <a:prstGeom prst="rect"/>
-          <a:noFill/>
-        </p:spPr>
-        <p:txBody>
-          <a:bodyPr anchor="ctr" bIns="0" lIns="0" rIns="0" rtlCol="0" tIns="0" wrap="square"/>
-          <a:p>
-            <a:pPr indent="0" marL="0">
-              <a:buNone/>
-            </a:pPr>
-            <a:r>
-              <a:rPr b="1" dirty="0" sz="2200" lang="en-US">
-                <a:solidFill>
-                  <a:srgbClr val="FFFFFF"/>
-                </a:solidFill>
-                <a:latin typeface="Calibri" pitchFamily="34" charset="0"/>
-                <a:ea typeface="Calibri" pitchFamily="34" charset="-122"/>
-                <a:cs typeface="Calibri" pitchFamily="34" charset="-120"/>
-              </a:rPr>
-              <a:t>4</a:t>
-            </a:r>
-            <a:endParaRPr dirty="0" sz="2200" lang="en-US"/>
-          </a:p>
-        </p:txBody>
-      </p:sp>
-      <p:sp>
-        <p:nvSpPr>
-          <p:cNvPr id="1048691" name="Text 20"/>
-          <p:cNvSpPr/>
-          <p:nvPr/>
-        </p:nvSpPr>
-        <p:spPr>
-          <a:xfrm>
-            <a:off x="5971032" y="1152144"/>
-            <a:ext cx="1051560" cy="347472"/>
-          </a:xfrm>
-          <a:prstGeom prst="rect"/>
-          <a:noFill/>
-        </p:spPr>
-        <p:txBody>
-          <a:bodyPr anchor="ctr" bIns="0" lIns="0" rIns="0" rtlCol="0" tIns="0" wrap="square"/>
-          <a:p>
-            <a:pPr indent="0" marL="0">
-              <a:buNone/>
-            </a:pPr>
-            <a:r>
-              <a:rPr b="1" dirty="0" sz="1100" lang="en-US">
-                <a:solidFill>
-                  <a:srgbClr val="FFFFFF"/>
-                </a:solidFill>
-                <a:latin typeface="Calibri" pitchFamily="34" charset="0"/>
-                <a:ea typeface="Calibri" pitchFamily="34" charset="-122"/>
-                <a:cs typeface="Calibri" pitchFamily="34" charset="-120"/>
-              </a:rPr>
-              <a:t>SOS Flow</a:t>
-            </a:r>
-            <a:endParaRPr dirty="0" sz="1100" lang="en-US"/>
-          </a:p>
-        </p:txBody>
-      </p:sp>
-      <p:sp>
-        <p:nvSpPr>
-          <p:cNvPr id="1048692" name="Text 21"/>
-          <p:cNvSpPr/>
-          <p:nvPr/>
-        </p:nvSpPr>
-        <p:spPr>
-          <a:xfrm>
-            <a:off x="5605272" y="1664208"/>
-            <a:ext cx="1371600" cy="2286000"/>
-          </a:xfrm>
-          <a:prstGeom prst="rect"/>
-          <a:noFill/>
-        </p:spPr>
-        <p:txBody>
-          <a:bodyPr anchor="ctr" bIns="0" lIns="0" rIns="0" rtlCol="0" tIns="0" wrap="square"/>
-          <a:p>
-            <a:pPr indent="0" marL="0">
-              <a:buNone/>
-            </a:pPr>
-            <a:r>
-              <a:rPr dirty="0" sz="1250" lang="en-US">
-                <a:solidFill>
-                  <a:srgbClr val="A0B8D0"/>
-                </a:solidFill>
-                <a:latin typeface="Calibri" pitchFamily="34" charset="0"/>
-                <a:ea typeface="Calibri" pitchFamily="34" charset="-122"/>
-                <a:cs typeface="Calibri" pitchFamily="34" charset="-120"/>
-              </a:rPr>
-              <a:t>3-sec hold</a:t>
-            </a:r>
-            <a:endParaRPr dirty="0" sz="1250" lang="en-US"/>
-          </a:p>
-          <a:p>
-            <a:pPr indent="0" marL="0">
-              <a:buNone/>
-            </a:pPr>
-            <a:r>
-              <a:rPr dirty="0" sz="1250" lang="en-US">
-                <a:solidFill>
-                  <a:srgbClr val="A0B8D0"/>
-                </a:solidFill>
-                <a:latin typeface="Calibri" pitchFamily="34" charset="0"/>
-                <a:ea typeface="Calibri" pitchFamily="34" charset="-122"/>
-                <a:cs typeface="Calibri" pitchFamily="34" charset="-120"/>
-              </a:rPr>
-              <a:t>2:45 timer</a:t>
-            </a:r>
-            <a:endParaRPr dirty="0" sz="1250" lang="en-US"/>
-          </a:p>
-          <a:p>
-            <a:pPr indent="0" marL="0">
-              <a:buNone/>
-            </a:pPr>
-            <a:r>
-              <a:rPr dirty="0" sz="1250" lang="en-US">
-                <a:solidFill>
-                  <a:srgbClr val="A0B8D0"/>
-                </a:solidFill>
-                <a:latin typeface="Calibri" pitchFamily="34" charset="0"/>
-                <a:ea typeface="Calibri" pitchFamily="34" charset="-122"/>
-                <a:cs typeface="Calibri" pitchFamily="34" charset="-120"/>
-              </a:rPr>
-              <a:t>Cancel override</a:t>
-            </a:r>
-            <a:endParaRPr dirty="0" sz="1250" lang="en-US"/>
-          </a:p>
-        </p:txBody>
-      </p:sp>
-      <p:sp>
-        <p:nvSpPr>
-          <p:cNvPr id="1048693" name="Shape 22"/>
-          <p:cNvSpPr/>
-          <p:nvPr/>
-        </p:nvSpPr>
-        <p:spPr>
-          <a:xfrm>
-            <a:off x="7214616" y="1078992"/>
-            <a:ext cx="1554480" cy="3017520"/>
+          <p:cNvPr id="1048712" name="Text 17"/>
+          <p:cNvSpPr/>
+          <p:nvPr/>
+        </p:nvSpPr>
+        <p:spPr>
+          <a:xfrm>
+            <a:off x="1874520" y="2386584"/>
+            <a:ext cx="3383280" cy="374904"/>
+          </a:xfrm>
+          <a:prstGeom prst="rect"/>
+          <a:noFill/>
+        </p:spPr>
+        <p:txBody>
+          <a:bodyPr anchor="ctr" bIns="0" lIns="0" rIns="0" rtlCol="0" tIns="0" wrap="square"/>
+          <a:p>
+            <a:pPr indent="0" marL="0">
+              <a:buNone/>
+            </a:pPr>
+            <a:r>
+              <a:rPr dirty="0" sz="1000" lang="en-US">
+                <a:solidFill>
+                  <a:srgbClr val="334155"/>
+                </a:solidFill>
+                <a:latin typeface="Calibri" pitchFamily="34" charset="0"/>
+                <a:ea typeface="Calibri" pitchFamily="34" charset="-122"/>
+                <a:cs typeface="Calibri" pitchFamily="34" charset="-120"/>
+              </a:rPr>
+              <a:t>Browser navigator.geolocation (GPS)</a:t>
+            </a:r>
+            <a:endParaRPr dirty="0" sz="1000" lang="en-US"/>
+          </a:p>
+        </p:txBody>
+      </p:sp>
+      <p:sp>
+        <p:nvSpPr>
+          <p:cNvPr id="1048713" name="Shape 18"/>
+          <p:cNvSpPr/>
+          <p:nvPr/>
+        </p:nvSpPr>
+        <p:spPr>
+          <a:xfrm>
+            <a:off x="411480" y="2798064"/>
+            <a:ext cx="1371600" cy="411480"/>
           </a:xfrm>
           <a:prstGeom prst="rect"/>
           <a:solidFill>
@@ -7042,22 +8015,57 @@
       </p:sp>
       <p:sp>
         <p:nvSpPr>
-          <p:cNvPr id="1048694" name="Shape 23"/>
-          <p:cNvSpPr/>
-          <p:nvPr/>
-        </p:nvSpPr>
-        <p:spPr>
-          <a:xfrm>
-            <a:off x="7214616" y="1078992"/>
-            <a:ext cx="1554480" cy="457200"/>
+          <p:cNvPr id="1048714" name="Text 19"/>
+          <p:cNvSpPr/>
+          <p:nvPr/>
+        </p:nvSpPr>
+        <p:spPr>
+          <a:xfrm>
+            <a:off x="502920" y="2816352"/>
+            <a:ext cx="1280160" cy="374904"/>
+          </a:xfrm>
+          <a:prstGeom prst="rect"/>
+          <a:noFill/>
+        </p:spPr>
+        <p:txBody>
+          <a:bodyPr anchor="ctr" bIns="0" lIns="0" rIns="0" rtlCol="0" tIns="0" wrap="square"/>
+          <a:p>
+            <a:pPr indent="0" marL="0">
+              <a:buNone/>
+            </a:pPr>
+            <a:r>
+              <a:rPr b="1" dirty="0" sz="1000" lang="en-US">
+                <a:solidFill>
+                  <a:srgbClr val="2DD4BF"/>
+                </a:solidFill>
+                <a:latin typeface="Calibri" pitchFamily="34" charset="0"/>
+                <a:ea typeface="Calibri" pitchFamily="34" charset="-122"/>
+                <a:cs typeface="Calibri" pitchFamily="34" charset="-120"/>
+              </a:rPr>
+              <a:t>Haptics</a:t>
+            </a:r>
+            <a:endParaRPr dirty="0" sz="1000" lang="en-US"/>
+          </a:p>
+        </p:txBody>
+      </p:sp>
+      <p:sp>
+        <p:nvSpPr>
+          <p:cNvPr id="1048715" name="Shape 20"/>
+          <p:cNvSpPr/>
+          <p:nvPr/>
+        </p:nvSpPr>
+        <p:spPr>
+          <a:xfrm>
+            <a:off x="1783080" y="2798064"/>
+            <a:ext cx="3474720" cy="411480"/>
           </a:xfrm>
           <a:prstGeom prst="rect"/>
           <a:solidFill>
-            <a:srgbClr val="F59E0B"/>
+            <a:srgbClr val="F1F5F9"/>
           </a:solidFill>
           <a:ln w="12700">
             <a:solidFill>
-              <a:srgbClr val="F59E0B"/>
+              <a:srgbClr val="94A3B8"/>
             </a:solidFill>
             <a:prstDash val="solid"/>
           </a:ln>
@@ -7065,153 +8073,49 @@
       </p:sp>
       <p:sp>
         <p:nvSpPr>
-          <p:cNvPr id="1048695" name="Text 24"/>
-          <p:cNvSpPr/>
-          <p:nvPr/>
-        </p:nvSpPr>
-        <p:spPr>
-          <a:xfrm>
-            <a:off x="7260336" y="1115568"/>
-            <a:ext cx="457200" cy="384048"/>
-          </a:xfrm>
-          <a:prstGeom prst="rect"/>
-          <a:noFill/>
-        </p:spPr>
-        <p:txBody>
-          <a:bodyPr anchor="ctr" bIns="0" lIns="0" rIns="0" rtlCol="0" tIns="0" wrap="square"/>
-          <a:p>
-            <a:pPr indent="0" marL="0">
-              <a:buNone/>
-            </a:pPr>
-            <a:r>
-              <a:rPr b="1" dirty="0" sz="2200" lang="en-US">
-                <a:solidFill>
-                  <a:srgbClr val="FFFFFF"/>
-                </a:solidFill>
-                <a:latin typeface="Calibri" pitchFamily="34" charset="0"/>
-                <a:ea typeface="Calibri" pitchFamily="34" charset="-122"/>
-                <a:cs typeface="Calibri" pitchFamily="34" charset="-120"/>
-              </a:rPr>
-              <a:t>5</a:t>
-            </a:r>
-            <a:endParaRPr dirty="0" sz="2200" lang="en-US"/>
-          </a:p>
-        </p:txBody>
-      </p:sp>
-      <p:sp>
-        <p:nvSpPr>
-          <p:cNvPr id="1048696" name="Text 25"/>
-          <p:cNvSpPr/>
-          <p:nvPr/>
-        </p:nvSpPr>
-        <p:spPr>
-          <a:xfrm>
-            <a:off x="7671816" y="1152144"/>
-            <a:ext cx="1051560" cy="347472"/>
-          </a:xfrm>
-          <a:prstGeom prst="rect"/>
-          <a:noFill/>
-        </p:spPr>
-        <p:txBody>
-          <a:bodyPr anchor="ctr" bIns="0" lIns="0" rIns="0" rtlCol="0" tIns="0" wrap="square"/>
-          <a:p>
-            <a:pPr indent="0" marL="0">
-              <a:buNone/>
-            </a:pPr>
-            <a:r>
-              <a:rPr b="1" dirty="0" sz="1100" lang="en-US">
-                <a:solidFill>
-                  <a:srgbClr val="FFFFFF"/>
-                </a:solidFill>
-                <a:latin typeface="Calibri" pitchFamily="34" charset="0"/>
-                <a:ea typeface="Calibri" pitchFamily="34" charset="-122"/>
-                <a:cs typeface="Calibri" pitchFamily="34" charset="-120"/>
-              </a:rPr>
-              <a:t>Failure Paths</a:t>
-            </a:r>
-            <a:endParaRPr dirty="0" sz="1100" lang="en-US"/>
-          </a:p>
-        </p:txBody>
-      </p:sp>
-      <p:sp>
-        <p:nvSpPr>
-          <p:cNvPr id="1048697" name="Text 26"/>
-          <p:cNvSpPr/>
-          <p:nvPr/>
-        </p:nvSpPr>
-        <p:spPr>
-          <a:xfrm>
-            <a:off x="7306056" y="1664208"/>
-            <a:ext cx="1371600" cy="2286000"/>
-          </a:xfrm>
-          <a:prstGeom prst="rect"/>
-          <a:noFill/>
-        </p:spPr>
-        <p:txBody>
-          <a:bodyPr anchor="ctr" bIns="0" lIns="0" rIns="0" rtlCol="0" tIns="0" wrap="square"/>
-          <a:p>
-            <a:pPr indent="0" marL="0">
-              <a:buNone/>
-            </a:pPr>
-            <a:r>
-              <a:rPr dirty="0" sz="1250" lang="en-US">
-                <a:solidFill>
-                  <a:srgbClr val="A0B8D0"/>
-                </a:solidFill>
-                <a:latin typeface="Calibri" pitchFamily="34" charset="0"/>
-                <a:ea typeface="Calibri" pitchFamily="34" charset="-122"/>
-                <a:cs typeface="Calibri" pitchFamily="34" charset="-120"/>
-              </a:rPr>
-              <a:t>Wrong OTP</a:t>
-            </a:r>
-            <a:endParaRPr dirty="0" sz="1250" lang="en-US"/>
-          </a:p>
-          <a:p>
-            <a:pPr indent="0" marL="0">
-              <a:buNone/>
-            </a:pPr>
-            <a:r>
-              <a:rPr dirty="0" sz="1250" lang="en-US">
-                <a:solidFill>
-                  <a:srgbClr val="A0B8D0"/>
-                </a:solidFill>
-                <a:latin typeface="Calibri" pitchFamily="34" charset="0"/>
-                <a:ea typeface="Calibri" pitchFamily="34" charset="-122"/>
-                <a:cs typeface="Calibri" pitchFamily="34" charset="-120"/>
-              </a:rPr>
-              <a:t>GPS denied</a:t>
-            </a:r>
-            <a:endParaRPr dirty="0" sz="1250" lang="en-US"/>
-          </a:p>
-          <a:p>
-            <a:pPr indent="0" marL="0">
-              <a:buNone/>
-            </a:pPr>
-            <a:r>
-              <a:rPr dirty="0" sz="1250" lang="en-US">
-                <a:solidFill>
-                  <a:srgbClr val="A0B8D0"/>
-                </a:solidFill>
-                <a:latin typeface="Calibri" pitchFamily="34" charset="0"/>
-                <a:ea typeface="Calibri" pitchFamily="34" charset="-122"/>
-                <a:cs typeface="Calibri" pitchFamily="34" charset="-120"/>
-              </a:rPr>
-              <a:t>ETA overdue</a:t>
-            </a:r>
-            <a:endParaRPr dirty="0" sz="1250" lang="en-US"/>
-          </a:p>
-        </p:txBody>
-      </p:sp>
-      <p:sp>
-        <p:nvSpPr>
-          <p:cNvPr id="1048698" name="Shape 27"/>
-          <p:cNvSpPr/>
-          <p:nvPr/>
-        </p:nvSpPr>
-        <p:spPr>
-          <a:xfrm>
-            <a:off x="411480" y="4224528"/>
-            <a:ext cx="8321040" cy="475488"/>
+          <p:cNvPr id="1048716" name="Text 21"/>
+          <p:cNvSpPr/>
+          <p:nvPr/>
+        </p:nvSpPr>
+        <p:spPr>
+          <a:xfrm>
+            <a:off x="1874520" y="2816352"/>
+            <a:ext cx="3383280" cy="374904"/>
+          </a:xfrm>
+          <a:prstGeom prst="rect"/>
+          <a:noFill/>
+        </p:spPr>
+        <p:txBody>
+          <a:bodyPr anchor="ctr" bIns="0" lIns="0" rIns="0" rtlCol="0" tIns="0" wrap="square"/>
+          <a:p>
+            <a:pPr indent="0" marL="0">
+              <a:buNone/>
+            </a:pPr>
+            <a:r>
+              <a:rPr dirty="0" sz="1000" lang="en-US">
+                <a:solidFill>
+                  <a:srgbClr val="334155"/>
+                </a:solidFill>
+                <a:latin typeface="Calibri" pitchFamily="34" charset="0"/>
+                <a:ea typeface="Calibri" pitchFamily="34" charset="-122"/>
+                <a:cs typeface="Calibri" pitchFamily="34" charset="-120"/>
+              </a:rPr>
+              <a:t>navigator.vibrate — [200ms, 100ms, 200ms] on SOS activation</a:t>
+            </a:r>
+            <a:endParaRPr dirty="0" sz="1000" lang="en-US"/>
+          </a:p>
+        </p:txBody>
+      </p:sp>
+      <p:sp>
+        <p:nvSpPr>
+          <p:cNvPr id="1048717" name="Shape 22"/>
+          <p:cNvSpPr/>
+          <p:nvPr/>
+        </p:nvSpPr>
+        <p:spPr>
+          <a:xfrm>
+            <a:off x="411480" y="3227832"/>
+            <a:ext cx="1371600" cy="411480"/>
           </a:xfrm>
           <a:prstGeom prst="rect"/>
           <a:solidFill>
@@ -7227,26 +8131,26 @@
       </p:sp>
       <p:sp>
         <p:nvSpPr>
-          <p:cNvPr id="1048699" name="Text 28"/>
-          <p:cNvSpPr/>
-          <p:nvPr/>
-        </p:nvSpPr>
-        <p:spPr>
-          <a:xfrm>
-            <a:off x="594360" y="4270248"/>
-            <a:ext cx="1097280" cy="384048"/>
-          </a:xfrm>
-          <a:prstGeom prst="rect"/>
-          <a:noFill/>
-        </p:spPr>
-        <p:txBody>
-          <a:bodyPr anchor="ctr" bIns="0" lIns="0" rIns="0" rtlCol="0" tIns="0" wrap="square"/>
-          <a:p>
-            <a:pPr indent="0" marL="0">
-              <a:buNone/>
-            </a:pPr>
-            <a:r>
-              <a:rPr b="1" dirty="0" sz="1100" lang="en-US">
+          <p:cNvPr id="1048718" name="Text 23"/>
+          <p:cNvSpPr/>
+          <p:nvPr/>
+        </p:nvSpPr>
+        <p:spPr>
+          <a:xfrm>
+            <a:off x="502920" y="3246120"/>
+            <a:ext cx="1280160" cy="374904"/>
+          </a:xfrm>
+          <a:prstGeom prst="rect"/>
+          <a:noFill/>
+        </p:spPr>
+        <p:txBody>
+          <a:bodyPr anchor="ctr" bIns="0" lIns="0" rIns="0" rtlCol="0" tIns="0" wrap="square"/>
+          <a:p>
+            <a:pPr indent="0" marL="0">
+              <a:buNone/>
+            </a:pPr>
+            <a:r>
+              <a:rPr b="1" dirty="0" sz="1000" lang="en-US">
                 <a:solidFill>
                   <a:srgbClr val="2DD4BF"/>
                 </a:solidFill>
@@ -7254,180 +8158,79 @@
                 <a:ea typeface="Calibri" pitchFamily="34" charset="-122"/>
                 <a:cs typeface="Calibri" pitchFamily="34" charset="-120"/>
               </a:rPr>
-              <a:t>Demo URL:</a:t>
-            </a:r>
-            <a:endParaRPr dirty="0" sz="1100" lang="en-US"/>
-          </a:p>
-        </p:txBody>
-      </p:sp>
-      <p:sp>
-        <p:nvSpPr>
-          <p:cNvPr id="1048700" name="Text 29"/>
-          <p:cNvSpPr/>
-          <p:nvPr/>
-        </p:nvSpPr>
-        <p:spPr>
-          <a:xfrm>
-            <a:off x="1645920" y="4270248"/>
-            <a:ext cx="6858000" cy="384048"/>
-          </a:xfrm>
-          <a:prstGeom prst="rect"/>
-          <a:noFill/>
-        </p:spPr>
-        <p:txBody>
-          <a:bodyPr anchor="ctr" bIns="0" lIns="0" rIns="0" rtlCol="0" tIns="0" wrap="square"/>
-          <a:p>
-            <a:pPr indent="0" marL="0">
-              <a:buNone/>
-            </a:pPr>
-            <a:r>
-              <a:rPr dirty="0" sz="1100" lang="en-US">
-                <a:solidFill>
-                  <a:srgbClr val="FFFFFF"/>
-                </a:solidFill>
-                <a:latin typeface="Calibri" pitchFamily="34" charset="0"/>
-                <a:ea typeface="Calibri" pitchFamily="34" charset="-122"/>
-                <a:cs typeface="Calibri" pitchFamily="34" charset="-120"/>
-              </a:rPr>
-              <a:t>tsa-phoenix-safetytech-39.github.io/lifeline/lifelineapp  ·  Works on any phone  ·  Nigerian 3G tested  ·  No install required</a:t>
-            </a:r>
-            <a:endParaRPr dirty="0" sz="1100" lang="en-US"/>
-          </a:p>
-        </p:txBody>
-      </p:sp>
-    </p:spTree>
-  </p:cSld>
-  <p:clrMapOvr>
-    <a:masterClrMapping/>
-  </p:clrMapOvr>
-</p:sld>
-</file>
-
-<file path=ppt/slides/slide7.xml><?xml version="1.0" encoding="utf-8"?>
-<p:sld xmlns:a="http://schemas.openxmlformats.org/drawingml/2006/main" xmlns:r="http://schemas.openxmlformats.org/officeDocument/2006/relationships" xmlns:p="http://schemas.openxmlformats.org/presentationml/2006/main">
-  <p:cSld name="Slide 7">
-    <p:bg>
-      <p:bgPr>
-        <a:solidFill>
-          <a:srgbClr val="F8FAFC"/>
-        </a:solidFill>
-      </p:bgPr>
-    </p:bg>
-    <p:spTree>
-      <p:nvGrpSpPr>
-        <p:cNvPr id="33" name=""/>
-        <p:cNvGrpSpPr/>
-        <p:nvPr/>
-      </p:nvGrpSpPr>
-      <p:grpSpPr>
-        <a:xfrm>
-          <a:off x="0" y="0"/>
-          <a:ext cx="0" cy="0"/>
-          <a:chOff x="0" y="0"/>
-          <a:chExt cx="0" cy="0"/>
-        </a:xfrm>
-      </p:grpSpPr>
-      <p:pic>
-        <p:nvPicPr>
-          <p:cNvPr id="2097158" name="Image 0" descr="/mnt/user-data/uploads/IMG-20260517-WA0000.jpg"/>
-          <p:cNvPicPr>
-            <a:picLocks noChangeAspect="1"/>
-          </p:cNvPicPr>
-          <p:nvPr/>
-        </p:nvPicPr>
-        <p:blipFill>
-          <a:blip xmlns:r="http://schemas.openxmlformats.org/officeDocument/2006/relationships" r:embed="rId1"/>
-          <a:stretch>
-            <a:fillRect/>
-          </a:stretch>
-        </p:blipFill>
-        <p:spPr>
-          <a:xfrm>
-            <a:off x="7955280" y="91440"/>
-            <a:ext cx="1005840" cy="1005840"/>
-          </a:xfrm>
-          <a:prstGeom prst="rect"/>
-        </p:spPr>
-      </p:pic>
-      <p:sp>
-        <p:nvSpPr>
-          <p:cNvPr id="1048704" name="Text 0"/>
-          <p:cNvSpPr/>
-          <p:nvPr/>
-        </p:nvSpPr>
-        <p:spPr>
-          <a:xfrm>
-            <a:off x="411480" y="201168"/>
-            <a:ext cx="4572000" cy="228600"/>
-          </a:xfrm>
-          <a:prstGeom prst="rect"/>
-          <a:noFill/>
-        </p:spPr>
-        <p:txBody>
-          <a:bodyPr anchor="ctr" bIns="0" lIns="0" rIns="0" rtlCol="0" tIns="0" wrap="square"/>
-          <a:p>
-            <a:pPr indent="0" marL="0">
-              <a:buNone/>
-            </a:pPr>
-            <a:r>
-              <a:rPr dirty="0" sz="900" kern="0" lang="en-US" spc="400">
-                <a:solidFill>
-                  <a:srgbClr val="94A3B8"/>
-                </a:solidFill>
-                <a:latin typeface="Calibri" pitchFamily="34" charset="0"/>
-                <a:ea typeface="Calibri" pitchFamily="34" charset="-122"/>
-                <a:cs typeface="Calibri" pitchFamily="34" charset="-120"/>
-              </a:rPr>
-              <a:t>ARCHITECTURE &amp; TECH</a:t>
-            </a:r>
-            <a:endParaRPr dirty="0" sz="900" lang="en-US"/>
-          </a:p>
-        </p:txBody>
-      </p:sp>
-      <p:sp>
-        <p:nvSpPr>
-          <p:cNvPr id="1048705" name="Text 1"/>
-          <p:cNvSpPr/>
-          <p:nvPr/>
-        </p:nvSpPr>
-        <p:spPr>
-          <a:xfrm>
-            <a:off x="411480" y="438912"/>
-            <a:ext cx="7772400" cy="475488"/>
-          </a:xfrm>
-          <a:prstGeom prst="rect"/>
-          <a:noFill/>
-        </p:spPr>
-        <p:txBody>
-          <a:bodyPr anchor="ctr" bIns="0" lIns="0" rIns="0" rtlCol="0" tIns="0" wrap="square"/>
-          <a:p>
-            <a:pPr indent="0" marL="0">
-              <a:buNone/>
-            </a:pPr>
-            <a:r>
-              <a:rPr b="1" dirty="0" sz="2400" lang="en-US">
-                <a:solidFill>
-                  <a:srgbClr val="0A1E3F"/>
-                </a:solidFill>
-                <a:latin typeface="Calibri" pitchFamily="34" charset="0"/>
-                <a:ea typeface="Calibri" pitchFamily="34" charset="-122"/>
-                <a:cs typeface="Calibri" pitchFamily="34" charset="-120"/>
-              </a:rPr>
-              <a:t>Built for Nigerian networks, not California ones.</a:t>
-            </a:r>
-            <a:endParaRPr dirty="0" sz="2400" lang="en-US"/>
-          </a:p>
-        </p:txBody>
-      </p:sp>
-      <p:sp>
-        <p:nvSpPr>
-          <p:cNvPr id="1048706" name="Shape 2"/>
-          <p:cNvSpPr/>
-          <p:nvPr/>
-        </p:nvSpPr>
-        <p:spPr>
-          <a:xfrm>
-            <a:off x="411480" y="1078992"/>
+              <a:t>Deployment</a:t>
+            </a:r>
+            <a:endParaRPr dirty="0" sz="1000" lang="en-US"/>
+          </a:p>
+        </p:txBody>
+      </p:sp>
+      <p:sp>
+        <p:nvSpPr>
+          <p:cNvPr id="1048719" name="Shape 24"/>
+          <p:cNvSpPr/>
+          <p:nvPr/>
+        </p:nvSpPr>
+        <p:spPr>
+          <a:xfrm>
+            <a:off x="1783080" y="3227832"/>
+            <a:ext cx="3474720" cy="411480"/>
+          </a:xfrm>
+          <a:prstGeom prst="rect"/>
+          <a:solidFill>
+            <a:srgbClr val="FFFFFF"/>
+          </a:solidFill>
+          <a:ln w="12700">
+            <a:solidFill>
+              <a:srgbClr val="94A3B8"/>
+            </a:solidFill>
+            <a:prstDash val="solid"/>
+          </a:ln>
+        </p:spPr>
+      </p:sp>
+      <p:sp>
+        <p:nvSpPr>
+          <p:cNvPr id="1048720" name="Text 25"/>
+          <p:cNvSpPr/>
+          <p:nvPr/>
+        </p:nvSpPr>
+        <p:spPr>
+          <a:xfrm>
+            <a:off x="1874520" y="3246120"/>
+            <a:ext cx="3383280" cy="374904"/>
+          </a:xfrm>
+          <a:prstGeom prst="rect"/>
+          <a:noFill/>
+        </p:spPr>
+        <p:txBody>
+          <a:bodyPr anchor="ctr" bIns="0" lIns="0" rIns="0" rtlCol="0" tIns="0" wrap="square"/>
+          <a:p>
+            <a:pPr indent="0" marL="0">
+              <a:buNone/>
+            </a:pPr>
+            <a:r>
+              <a:rPr dirty="0" sz="1000" lang="en-US">
+                <a:solidFill>
+                  <a:srgbClr val="334155"/>
+                </a:solidFill>
+                <a:latin typeface="Calibri" pitchFamily="34" charset="0"/>
+                <a:ea typeface="Calibri" pitchFamily="34" charset="-122"/>
+                <a:cs typeface="Calibri" pitchFamily="34" charset="-120"/>
+              </a:rPr>
+              <a:t>GitHub Pages — single file, ~210KB total</a:t>
+            </a:r>
+            <a:endParaRPr dirty="0" sz="1000" lang="en-US"/>
+          </a:p>
+        </p:txBody>
+      </p:sp>
+      <p:sp>
+        <p:nvSpPr>
+          <p:cNvPr id="1048721" name="Shape 26"/>
+          <p:cNvSpPr/>
+          <p:nvPr/>
+        </p:nvSpPr>
+        <p:spPr>
+          <a:xfrm>
+            <a:off x="411480" y="3657600"/>
             <a:ext cx="1371600" cy="411480"/>
           </a:xfrm>
           <a:prstGeom prst="rect"/>
@@ -7444,13 +8247,13 @@
       </p:sp>
       <p:sp>
         <p:nvSpPr>
-          <p:cNvPr id="1048707" name="Text 3"/>
-          <p:cNvSpPr/>
-          <p:nvPr/>
-        </p:nvSpPr>
-        <p:spPr>
-          <a:xfrm>
-            <a:off x="502920" y="1097280"/>
+          <p:cNvPr id="1048722" name="Text 27"/>
+          <p:cNvSpPr/>
+          <p:nvPr/>
+        </p:nvSpPr>
+        <p:spPr>
+          <a:xfrm>
+            <a:off x="502920" y="3675888"/>
             <a:ext cx="1280160" cy="374904"/>
           </a:xfrm>
           <a:prstGeom prst="rect"/>
@@ -7471,7 +8274,7 @@
                 <a:ea typeface="Calibri" pitchFamily="34" charset="-122"/>
                 <a:cs typeface="Calibri" pitchFamily="34" charset="-120"/>
               </a:rPr>
-              <a:t>Frontend</a:t>
+              <a:t>Backend (V2)</a:t>
             </a:r>
             <a:endParaRPr dirty="0" sz="1000" lang="en-US"/>
           </a:p>
@@ -7479,13 +8282,13 @@
       </p:sp>
       <p:sp>
         <p:nvSpPr>
-          <p:cNvPr id="1048708" name="Shape 4"/>
-          <p:cNvSpPr/>
-          <p:nvPr/>
-        </p:nvSpPr>
-        <p:spPr>
-          <a:xfrm>
-            <a:off x="1783080" y="1078992"/>
+          <p:cNvPr id="1048723" name="Shape 28"/>
+          <p:cNvSpPr/>
+          <p:nvPr/>
+        </p:nvSpPr>
+        <p:spPr>
+          <a:xfrm>
+            <a:off x="1783080" y="3657600"/>
             <a:ext cx="3474720" cy="411480"/>
           </a:xfrm>
           <a:prstGeom prst="rect"/>
@@ -7502,13 +8305,13 @@
       </p:sp>
       <p:sp>
         <p:nvSpPr>
-          <p:cNvPr id="1048709" name="Text 5"/>
-          <p:cNvSpPr/>
-          <p:nvPr/>
-        </p:nvSpPr>
-        <p:spPr>
-          <a:xfrm>
-            <a:off x="1874520" y="1097280"/>
+          <p:cNvPr id="1048724" name="Text 29"/>
+          <p:cNvSpPr/>
+          <p:nvPr/>
+        </p:nvSpPr>
+        <p:spPr>
+          <a:xfrm>
+            <a:off x="1874520" y="3675888"/>
             <a:ext cx="3383280" cy="374904"/>
           </a:xfrm>
           <a:prstGeom prst="rect"/>
@@ -7529,7 +8332,7 @@
                 <a:ea typeface="Calibri" pitchFamily="34" charset="-122"/>
                 <a:cs typeface="Calibri" pitchFamily="34" charset="-120"/>
               </a:rPr>
-              <a:t>Vanilla HTML + CSS + JavaScript. No framework. No build step.</a:t>
+              <a:t>Supabase (Postgres + Auth + Realtime)</a:t>
             </a:r>
             <a:endParaRPr dirty="0" sz="1000" lang="en-US"/>
           </a:p>
@@ -7537,13 +8340,13 @@
       </p:sp>
       <p:sp>
         <p:nvSpPr>
-          <p:cNvPr id="1048710" name="Shape 6"/>
-          <p:cNvSpPr/>
-          <p:nvPr/>
-        </p:nvSpPr>
-        <p:spPr>
-          <a:xfrm>
-            <a:off x="411480" y="1508760"/>
+          <p:cNvPr id="1048725" name="Shape 30"/>
+          <p:cNvSpPr/>
+          <p:nvPr/>
+        </p:nvSpPr>
+        <p:spPr>
+          <a:xfrm>
+            <a:off x="411480" y="4087368"/>
             <a:ext cx="1371600" cy="411480"/>
           </a:xfrm>
           <a:prstGeom prst="rect"/>
@@ -7560,13 +8363,13 @@
       </p:sp>
       <p:sp>
         <p:nvSpPr>
-          <p:cNvPr id="1048711" name="Text 7"/>
-          <p:cNvSpPr/>
-          <p:nvPr/>
-        </p:nvSpPr>
-        <p:spPr>
-          <a:xfrm>
-            <a:off x="502920" y="1527048"/>
+          <p:cNvPr id="1048726" name="Text 31"/>
+          <p:cNvSpPr/>
+          <p:nvPr/>
+        </p:nvSpPr>
+        <p:spPr>
+          <a:xfrm>
+            <a:off x="502920" y="4105656"/>
             <a:ext cx="1280160" cy="374904"/>
           </a:xfrm>
           <a:prstGeom prst="rect"/>
@@ -7587,7 +8390,7 @@
                 <a:ea typeface="Calibri" pitchFamily="34" charset="-122"/>
                 <a:cs typeface="Calibri" pitchFamily="34" charset="-120"/>
               </a:rPr>
-              <a:t>Map</a:t>
+              <a:t>SMS (V2)</a:t>
             </a:r>
             <a:endParaRPr dirty="0" sz="1000" lang="en-US"/>
           </a:p>
@@ -7595,13 +8398,13 @@
       </p:sp>
       <p:sp>
         <p:nvSpPr>
-          <p:cNvPr id="1048712" name="Shape 8"/>
-          <p:cNvSpPr/>
-          <p:nvPr/>
-        </p:nvSpPr>
-        <p:spPr>
-          <a:xfrm>
-            <a:off x="1783080" y="1508760"/>
+          <p:cNvPr id="1048727" name="Shape 32"/>
+          <p:cNvSpPr/>
+          <p:nvPr/>
+        </p:nvSpPr>
+        <p:spPr>
+          <a:xfrm>
+            <a:off x="1783080" y="4087368"/>
             <a:ext cx="3474720" cy="411480"/>
           </a:xfrm>
           <a:prstGeom prst="rect"/>
@@ -7618,13 +8421,13 @@
       </p:sp>
       <p:sp>
         <p:nvSpPr>
-          <p:cNvPr id="1048713" name="Text 9"/>
-          <p:cNvSpPr/>
-          <p:nvPr/>
-        </p:nvSpPr>
-        <p:spPr>
-          <a:xfrm>
-            <a:off x="1874520" y="1527048"/>
+          <p:cNvPr id="1048728" name="Text 33"/>
+          <p:cNvSpPr/>
+          <p:nvPr/>
+        </p:nvSpPr>
+        <p:spPr>
+          <a:xfrm>
+            <a:off x="1874520" y="4105656"/>
             <a:ext cx="3383280" cy="374904"/>
           </a:xfrm>
           <a:prstGeom prst="rect"/>
@@ -7645,7 +8448,7 @@
                 <a:ea typeface="Calibri" pitchFamily="34" charset="-122"/>
                 <a:cs typeface="Calibri" pitchFamily="34" charset="-120"/>
               </a:rPr>
-              <a:t>Leaflet 1.9.4 — embedded inline (~147KB). Zero CDN dependency.</a:t>
+              <a:t>Termii / Africa's Talking</a:t>
             </a:r>
             <a:endParaRPr dirty="0" sz="1000" lang="en-US"/>
           </a:p>
@@ -7653,14 +8456,14 @@
       </p:sp>
       <p:sp>
         <p:nvSpPr>
-          <p:cNvPr id="1048714" name="Shape 10"/>
-          <p:cNvSpPr/>
-          <p:nvPr/>
-        </p:nvSpPr>
-        <p:spPr>
-          <a:xfrm>
-            <a:off x="411480" y="1938528"/>
-            <a:ext cx="1371600" cy="411480"/>
+          <p:cNvPr id="1048729" name="Shape 34"/>
+          <p:cNvSpPr/>
+          <p:nvPr/>
+        </p:nvSpPr>
+        <p:spPr>
+          <a:xfrm>
+            <a:off x="5577840" y="1078992"/>
+            <a:ext cx="3154680" cy="1828800"/>
           </a:xfrm>
           <a:prstGeom prst="rect"/>
           <a:solidFill>
@@ -7676,703 +8479,7 @@
       </p:sp>
       <p:sp>
         <p:nvSpPr>
-          <p:cNvPr id="1048715" name="Text 11"/>
-          <p:cNvSpPr/>
-          <p:nvPr/>
-        </p:nvSpPr>
-        <p:spPr>
-          <a:xfrm>
-            <a:off x="502920" y="1956816"/>
-            <a:ext cx="1280160" cy="374904"/>
-          </a:xfrm>
-          <a:prstGeom prst="rect"/>
-          <a:noFill/>
-        </p:spPr>
-        <p:txBody>
-          <a:bodyPr anchor="ctr" bIns="0" lIns="0" rIns="0" rtlCol="0" tIns="0" wrap="square"/>
-          <a:p>
-            <a:pPr indent="0" marL="0">
-              <a:buNone/>
-            </a:pPr>
-            <a:r>
-              <a:rPr b="1" dirty="0" sz="1000" lang="en-US">
-                <a:solidFill>
-                  <a:srgbClr val="2DD4BF"/>
-                </a:solidFill>
-                <a:latin typeface="Calibri" pitchFamily="34" charset="0"/>
-                <a:ea typeface="Calibri" pitchFamily="34" charset="-122"/>
-                <a:cs typeface="Calibri" pitchFamily="34" charset="-120"/>
-              </a:rPr>
-              <a:t>Map tiles</a:t>
-            </a:r>
-            <a:endParaRPr dirty="0" sz="1000" lang="en-US"/>
-          </a:p>
-        </p:txBody>
-      </p:sp>
-      <p:sp>
-        <p:nvSpPr>
-          <p:cNvPr id="1048716" name="Shape 12"/>
-          <p:cNvSpPr/>
-          <p:nvPr/>
-        </p:nvSpPr>
-        <p:spPr>
-          <a:xfrm>
-            <a:off x="1783080" y="1938528"/>
-            <a:ext cx="3474720" cy="411480"/>
-          </a:xfrm>
-          <a:prstGeom prst="rect"/>
-          <a:solidFill>
-            <a:srgbClr val="F1F5F9"/>
-          </a:solidFill>
-          <a:ln w="12700">
-            <a:solidFill>
-              <a:srgbClr val="94A3B8"/>
-            </a:solidFill>
-            <a:prstDash val="solid"/>
-          </a:ln>
-        </p:spPr>
-      </p:sp>
-      <p:sp>
-        <p:nvSpPr>
-          <p:cNvPr id="1048717" name="Text 13"/>
-          <p:cNvSpPr/>
-          <p:nvPr/>
-        </p:nvSpPr>
-        <p:spPr>
-          <a:xfrm>
-            <a:off x="1874520" y="1956816"/>
-            <a:ext cx="3383280" cy="374904"/>
-          </a:xfrm>
-          <a:prstGeom prst="rect"/>
-          <a:noFill/>
-        </p:spPr>
-        <p:txBody>
-          <a:bodyPr anchor="ctr" bIns="0" lIns="0" rIns="0" rtlCol="0" tIns="0" wrap="square"/>
-          <a:p>
-            <a:pPr indent="0" marL="0">
-              <a:buNone/>
-            </a:pPr>
-            <a:r>
-              <a:rPr dirty="0" sz="1000" lang="en-US">
-                <a:solidFill>
-                  <a:srgbClr val="334155"/>
-                </a:solidFill>
-                <a:latin typeface="Calibri" pitchFamily="34" charset="0"/>
-                <a:ea typeface="Calibri" pitchFamily="34" charset="-122"/>
-                <a:cs typeface="Calibri" pitchFamily="34" charset="-120"/>
-              </a:rPr>
-              <a:t>OpenStreetMap (free, no API key). Fails gracefully to grey.</a:t>
-            </a:r>
-            <a:endParaRPr dirty="0" sz="1000" lang="en-US"/>
-          </a:p>
-        </p:txBody>
-      </p:sp>
-      <p:sp>
-        <p:nvSpPr>
-          <p:cNvPr id="1048718" name="Shape 14"/>
-          <p:cNvSpPr/>
-          <p:nvPr/>
-        </p:nvSpPr>
-        <p:spPr>
-          <a:xfrm>
-            <a:off x="411480" y="2368296"/>
-            <a:ext cx="1371600" cy="411480"/>
-          </a:xfrm>
-          <a:prstGeom prst="rect"/>
-          <a:solidFill>
-            <a:srgbClr val="0A1E3F"/>
-          </a:solidFill>
-          <a:ln w="12700">
-            <a:solidFill>
-              <a:srgbClr val="0A1E3F"/>
-            </a:solidFill>
-            <a:prstDash val="solid"/>
-          </a:ln>
-        </p:spPr>
-      </p:sp>
-      <p:sp>
-        <p:nvSpPr>
-          <p:cNvPr id="1048719" name="Text 15"/>
-          <p:cNvSpPr/>
-          <p:nvPr/>
-        </p:nvSpPr>
-        <p:spPr>
-          <a:xfrm>
-            <a:off x="502920" y="2386584"/>
-            <a:ext cx="1280160" cy="374904"/>
-          </a:xfrm>
-          <a:prstGeom prst="rect"/>
-          <a:noFill/>
-        </p:spPr>
-        <p:txBody>
-          <a:bodyPr anchor="ctr" bIns="0" lIns="0" rIns="0" rtlCol="0" tIns="0" wrap="square"/>
-          <a:p>
-            <a:pPr indent="0" marL="0">
-              <a:buNone/>
-            </a:pPr>
-            <a:r>
-              <a:rPr b="1" dirty="0" sz="1000" lang="en-US">
-                <a:solidFill>
-                  <a:srgbClr val="2DD4BF"/>
-                </a:solidFill>
-                <a:latin typeface="Calibri" pitchFamily="34" charset="0"/>
-                <a:ea typeface="Calibri" pitchFamily="34" charset="-122"/>
-                <a:cs typeface="Calibri" pitchFamily="34" charset="-120"/>
-              </a:rPr>
-              <a:t>Location</a:t>
-            </a:r>
-            <a:endParaRPr dirty="0" sz="1000" lang="en-US"/>
-          </a:p>
-        </p:txBody>
-      </p:sp>
-      <p:sp>
-        <p:nvSpPr>
-          <p:cNvPr id="1048720" name="Shape 16"/>
-          <p:cNvSpPr/>
-          <p:nvPr/>
-        </p:nvSpPr>
-        <p:spPr>
-          <a:xfrm>
-            <a:off x="1783080" y="2368296"/>
-            <a:ext cx="3474720" cy="411480"/>
-          </a:xfrm>
-          <a:prstGeom prst="rect"/>
-          <a:solidFill>
-            <a:srgbClr val="FFFFFF"/>
-          </a:solidFill>
-          <a:ln w="12700">
-            <a:solidFill>
-              <a:srgbClr val="94A3B8"/>
-            </a:solidFill>
-            <a:prstDash val="solid"/>
-          </a:ln>
-        </p:spPr>
-      </p:sp>
-      <p:sp>
-        <p:nvSpPr>
-          <p:cNvPr id="1048721" name="Text 17"/>
-          <p:cNvSpPr/>
-          <p:nvPr/>
-        </p:nvSpPr>
-        <p:spPr>
-          <a:xfrm>
-            <a:off x="1874520" y="2386584"/>
-            <a:ext cx="3383280" cy="374904"/>
-          </a:xfrm>
-          <a:prstGeom prst="rect"/>
-          <a:noFill/>
-        </p:spPr>
-        <p:txBody>
-          <a:bodyPr anchor="ctr" bIns="0" lIns="0" rIns="0" rtlCol="0" tIns="0" wrap="square"/>
-          <a:p>
-            <a:pPr indent="0" marL="0">
-              <a:buNone/>
-            </a:pPr>
-            <a:r>
-              <a:rPr dirty="0" sz="1000" lang="en-US">
-                <a:solidFill>
-                  <a:srgbClr val="334155"/>
-                </a:solidFill>
-                <a:latin typeface="Calibri" pitchFamily="34" charset="0"/>
-                <a:ea typeface="Calibri" pitchFamily="34" charset="-122"/>
-                <a:cs typeface="Calibri" pitchFamily="34" charset="-120"/>
-              </a:rPr>
-              <a:t>Browser navigator.geolocation (GPS)</a:t>
-            </a:r>
-            <a:endParaRPr dirty="0" sz="1000" lang="en-US"/>
-          </a:p>
-        </p:txBody>
-      </p:sp>
-      <p:sp>
-        <p:nvSpPr>
-          <p:cNvPr id="1048722" name="Shape 18"/>
-          <p:cNvSpPr/>
-          <p:nvPr/>
-        </p:nvSpPr>
-        <p:spPr>
-          <a:xfrm>
-            <a:off x="411480" y="2798064"/>
-            <a:ext cx="1371600" cy="411480"/>
-          </a:xfrm>
-          <a:prstGeom prst="rect"/>
-          <a:solidFill>
-            <a:srgbClr val="0A1E3F"/>
-          </a:solidFill>
-          <a:ln w="12700">
-            <a:solidFill>
-              <a:srgbClr val="0A1E3F"/>
-            </a:solidFill>
-            <a:prstDash val="solid"/>
-          </a:ln>
-        </p:spPr>
-      </p:sp>
-      <p:sp>
-        <p:nvSpPr>
-          <p:cNvPr id="1048723" name="Text 19"/>
-          <p:cNvSpPr/>
-          <p:nvPr/>
-        </p:nvSpPr>
-        <p:spPr>
-          <a:xfrm>
-            <a:off x="502920" y="2816352"/>
-            <a:ext cx="1280160" cy="374904"/>
-          </a:xfrm>
-          <a:prstGeom prst="rect"/>
-          <a:noFill/>
-        </p:spPr>
-        <p:txBody>
-          <a:bodyPr anchor="ctr" bIns="0" lIns="0" rIns="0" rtlCol="0" tIns="0" wrap="square"/>
-          <a:p>
-            <a:pPr indent="0" marL="0">
-              <a:buNone/>
-            </a:pPr>
-            <a:r>
-              <a:rPr b="1" dirty="0" sz="1000" lang="en-US">
-                <a:solidFill>
-                  <a:srgbClr val="2DD4BF"/>
-                </a:solidFill>
-                <a:latin typeface="Calibri" pitchFamily="34" charset="0"/>
-                <a:ea typeface="Calibri" pitchFamily="34" charset="-122"/>
-                <a:cs typeface="Calibri" pitchFamily="34" charset="-120"/>
-              </a:rPr>
-              <a:t>Haptics</a:t>
-            </a:r>
-            <a:endParaRPr dirty="0" sz="1000" lang="en-US"/>
-          </a:p>
-        </p:txBody>
-      </p:sp>
-      <p:sp>
-        <p:nvSpPr>
-          <p:cNvPr id="1048724" name="Shape 20"/>
-          <p:cNvSpPr/>
-          <p:nvPr/>
-        </p:nvSpPr>
-        <p:spPr>
-          <a:xfrm>
-            <a:off x="1783080" y="2798064"/>
-            <a:ext cx="3474720" cy="411480"/>
-          </a:xfrm>
-          <a:prstGeom prst="rect"/>
-          <a:solidFill>
-            <a:srgbClr val="F1F5F9"/>
-          </a:solidFill>
-          <a:ln w="12700">
-            <a:solidFill>
-              <a:srgbClr val="94A3B8"/>
-            </a:solidFill>
-            <a:prstDash val="solid"/>
-          </a:ln>
-        </p:spPr>
-      </p:sp>
-      <p:sp>
-        <p:nvSpPr>
-          <p:cNvPr id="1048725" name="Text 21"/>
-          <p:cNvSpPr/>
-          <p:nvPr/>
-        </p:nvSpPr>
-        <p:spPr>
-          <a:xfrm>
-            <a:off x="1874520" y="2816352"/>
-            <a:ext cx="3383280" cy="374904"/>
-          </a:xfrm>
-          <a:prstGeom prst="rect"/>
-          <a:noFill/>
-        </p:spPr>
-        <p:txBody>
-          <a:bodyPr anchor="ctr" bIns="0" lIns="0" rIns="0" rtlCol="0" tIns="0" wrap="square"/>
-          <a:p>
-            <a:pPr indent="0" marL="0">
-              <a:buNone/>
-            </a:pPr>
-            <a:r>
-              <a:rPr dirty="0" sz="1000" lang="en-US">
-                <a:solidFill>
-                  <a:srgbClr val="334155"/>
-                </a:solidFill>
-                <a:latin typeface="Calibri" pitchFamily="34" charset="0"/>
-                <a:ea typeface="Calibri" pitchFamily="34" charset="-122"/>
-                <a:cs typeface="Calibri" pitchFamily="34" charset="-120"/>
-              </a:rPr>
-              <a:t>navigator.vibrate — [200ms, 100ms, 200ms] on SOS activation</a:t>
-            </a:r>
-            <a:endParaRPr dirty="0" sz="1000" lang="en-US"/>
-          </a:p>
-        </p:txBody>
-      </p:sp>
-      <p:sp>
-        <p:nvSpPr>
-          <p:cNvPr id="1048726" name="Shape 22"/>
-          <p:cNvSpPr/>
-          <p:nvPr/>
-        </p:nvSpPr>
-        <p:spPr>
-          <a:xfrm>
-            <a:off x="411480" y="3227832"/>
-            <a:ext cx="1371600" cy="411480"/>
-          </a:xfrm>
-          <a:prstGeom prst="rect"/>
-          <a:solidFill>
-            <a:srgbClr val="0A1E3F"/>
-          </a:solidFill>
-          <a:ln w="12700">
-            <a:solidFill>
-              <a:srgbClr val="0A1E3F"/>
-            </a:solidFill>
-            <a:prstDash val="solid"/>
-          </a:ln>
-        </p:spPr>
-      </p:sp>
-      <p:sp>
-        <p:nvSpPr>
-          <p:cNvPr id="1048727" name="Text 23"/>
-          <p:cNvSpPr/>
-          <p:nvPr/>
-        </p:nvSpPr>
-        <p:spPr>
-          <a:xfrm>
-            <a:off x="502920" y="3246120"/>
-            <a:ext cx="1280160" cy="374904"/>
-          </a:xfrm>
-          <a:prstGeom prst="rect"/>
-          <a:noFill/>
-        </p:spPr>
-        <p:txBody>
-          <a:bodyPr anchor="ctr" bIns="0" lIns="0" rIns="0" rtlCol="0" tIns="0" wrap="square"/>
-          <a:p>
-            <a:pPr indent="0" marL="0">
-              <a:buNone/>
-            </a:pPr>
-            <a:r>
-              <a:rPr b="1" dirty="0" sz="1000" lang="en-US">
-                <a:solidFill>
-                  <a:srgbClr val="2DD4BF"/>
-                </a:solidFill>
-                <a:latin typeface="Calibri" pitchFamily="34" charset="0"/>
-                <a:ea typeface="Calibri" pitchFamily="34" charset="-122"/>
-                <a:cs typeface="Calibri" pitchFamily="34" charset="-120"/>
-              </a:rPr>
-              <a:t>Deployment</a:t>
-            </a:r>
-            <a:endParaRPr dirty="0" sz="1000" lang="en-US"/>
-          </a:p>
-        </p:txBody>
-      </p:sp>
-      <p:sp>
-        <p:nvSpPr>
-          <p:cNvPr id="1048728" name="Shape 24"/>
-          <p:cNvSpPr/>
-          <p:nvPr/>
-        </p:nvSpPr>
-        <p:spPr>
-          <a:xfrm>
-            <a:off x="1783080" y="3227832"/>
-            <a:ext cx="3474720" cy="411480"/>
-          </a:xfrm>
-          <a:prstGeom prst="rect"/>
-          <a:solidFill>
-            <a:srgbClr val="FFFFFF"/>
-          </a:solidFill>
-          <a:ln w="12700">
-            <a:solidFill>
-              <a:srgbClr val="94A3B8"/>
-            </a:solidFill>
-            <a:prstDash val="solid"/>
-          </a:ln>
-        </p:spPr>
-      </p:sp>
-      <p:sp>
-        <p:nvSpPr>
-          <p:cNvPr id="1048729" name="Text 25"/>
-          <p:cNvSpPr/>
-          <p:nvPr/>
-        </p:nvSpPr>
-        <p:spPr>
-          <a:xfrm>
-            <a:off x="1874520" y="3246120"/>
-            <a:ext cx="3383280" cy="374904"/>
-          </a:xfrm>
-          <a:prstGeom prst="rect"/>
-          <a:noFill/>
-        </p:spPr>
-        <p:txBody>
-          <a:bodyPr anchor="ctr" bIns="0" lIns="0" rIns="0" rtlCol="0" tIns="0" wrap="square"/>
-          <a:p>
-            <a:pPr indent="0" marL="0">
-              <a:buNone/>
-            </a:pPr>
-            <a:r>
-              <a:rPr dirty="0" sz="1000" lang="en-US">
-                <a:solidFill>
-                  <a:srgbClr val="334155"/>
-                </a:solidFill>
-                <a:latin typeface="Calibri" pitchFamily="34" charset="0"/>
-                <a:ea typeface="Calibri" pitchFamily="34" charset="-122"/>
-                <a:cs typeface="Calibri" pitchFamily="34" charset="-120"/>
-              </a:rPr>
-              <a:t>GitHub Pages — single file, ~210KB total</a:t>
-            </a:r>
-            <a:endParaRPr dirty="0" sz="1000" lang="en-US"/>
-          </a:p>
-        </p:txBody>
-      </p:sp>
-      <p:sp>
-        <p:nvSpPr>
-          <p:cNvPr id="1048730" name="Shape 26"/>
-          <p:cNvSpPr/>
-          <p:nvPr/>
-        </p:nvSpPr>
-        <p:spPr>
-          <a:xfrm>
-            <a:off x="411480" y="3657600"/>
-            <a:ext cx="1371600" cy="411480"/>
-          </a:xfrm>
-          <a:prstGeom prst="rect"/>
-          <a:solidFill>
-            <a:srgbClr val="0A1E3F"/>
-          </a:solidFill>
-          <a:ln w="12700">
-            <a:solidFill>
-              <a:srgbClr val="0A1E3F"/>
-            </a:solidFill>
-            <a:prstDash val="solid"/>
-          </a:ln>
-        </p:spPr>
-      </p:sp>
-      <p:sp>
-        <p:nvSpPr>
-          <p:cNvPr id="1048731" name="Text 27"/>
-          <p:cNvSpPr/>
-          <p:nvPr/>
-        </p:nvSpPr>
-        <p:spPr>
-          <a:xfrm>
-            <a:off x="502920" y="3675888"/>
-            <a:ext cx="1280160" cy="374904"/>
-          </a:xfrm>
-          <a:prstGeom prst="rect"/>
-          <a:noFill/>
-        </p:spPr>
-        <p:txBody>
-          <a:bodyPr anchor="ctr" bIns="0" lIns="0" rIns="0" rtlCol="0" tIns="0" wrap="square"/>
-          <a:p>
-            <a:pPr indent="0" marL="0">
-              <a:buNone/>
-            </a:pPr>
-            <a:r>
-              <a:rPr b="1" dirty="0" sz="1000" lang="en-US">
-                <a:solidFill>
-                  <a:srgbClr val="2DD4BF"/>
-                </a:solidFill>
-                <a:latin typeface="Calibri" pitchFamily="34" charset="0"/>
-                <a:ea typeface="Calibri" pitchFamily="34" charset="-122"/>
-                <a:cs typeface="Calibri" pitchFamily="34" charset="-120"/>
-              </a:rPr>
-              <a:t>Backend (V2)</a:t>
-            </a:r>
-            <a:endParaRPr dirty="0" sz="1000" lang="en-US"/>
-          </a:p>
-        </p:txBody>
-      </p:sp>
-      <p:sp>
-        <p:nvSpPr>
-          <p:cNvPr id="1048732" name="Shape 28"/>
-          <p:cNvSpPr/>
-          <p:nvPr/>
-        </p:nvSpPr>
-        <p:spPr>
-          <a:xfrm>
-            <a:off x="1783080" y="3657600"/>
-            <a:ext cx="3474720" cy="411480"/>
-          </a:xfrm>
-          <a:prstGeom prst="rect"/>
-          <a:solidFill>
-            <a:srgbClr val="F1F5F9"/>
-          </a:solidFill>
-          <a:ln w="12700">
-            <a:solidFill>
-              <a:srgbClr val="94A3B8"/>
-            </a:solidFill>
-            <a:prstDash val="solid"/>
-          </a:ln>
-        </p:spPr>
-      </p:sp>
-      <p:sp>
-        <p:nvSpPr>
-          <p:cNvPr id="1048733" name="Text 29"/>
-          <p:cNvSpPr/>
-          <p:nvPr/>
-        </p:nvSpPr>
-        <p:spPr>
-          <a:xfrm>
-            <a:off x="1874520" y="3675888"/>
-            <a:ext cx="3383280" cy="374904"/>
-          </a:xfrm>
-          <a:prstGeom prst="rect"/>
-          <a:noFill/>
-        </p:spPr>
-        <p:txBody>
-          <a:bodyPr anchor="ctr" bIns="0" lIns="0" rIns="0" rtlCol="0" tIns="0" wrap="square"/>
-          <a:p>
-            <a:pPr indent="0" marL="0">
-              <a:buNone/>
-            </a:pPr>
-            <a:r>
-              <a:rPr dirty="0" sz="1000" lang="en-US">
-                <a:solidFill>
-                  <a:srgbClr val="334155"/>
-                </a:solidFill>
-                <a:latin typeface="Calibri" pitchFamily="34" charset="0"/>
-                <a:ea typeface="Calibri" pitchFamily="34" charset="-122"/>
-                <a:cs typeface="Calibri" pitchFamily="34" charset="-120"/>
-              </a:rPr>
-              <a:t>Supabase (Postgres + Auth + Realtime)</a:t>
-            </a:r>
-            <a:endParaRPr dirty="0" sz="1000" lang="en-US"/>
-          </a:p>
-        </p:txBody>
-      </p:sp>
-      <p:sp>
-        <p:nvSpPr>
-          <p:cNvPr id="1048734" name="Shape 30"/>
-          <p:cNvSpPr/>
-          <p:nvPr/>
-        </p:nvSpPr>
-        <p:spPr>
-          <a:xfrm>
-            <a:off x="411480" y="4087368"/>
-            <a:ext cx="1371600" cy="411480"/>
-          </a:xfrm>
-          <a:prstGeom prst="rect"/>
-          <a:solidFill>
-            <a:srgbClr val="0A1E3F"/>
-          </a:solidFill>
-          <a:ln w="12700">
-            <a:solidFill>
-              <a:srgbClr val="0A1E3F"/>
-            </a:solidFill>
-            <a:prstDash val="solid"/>
-          </a:ln>
-        </p:spPr>
-      </p:sp>
-      <p:sp>
-        <p:nvSpPr>
-          <p:cNvPr id="1048735" name="Text 31"/>
-          <p:cNvSpPr/>
-          <p:nvPr/>
-        </p:nvSpPr>
-        <p:spPr>
-          <a:xfrm>
-            <a:off x="502920" y="4105656"/>
-            <a:ext cx="1280160" cy="374904"/>
-          </a:xfrm>
-          <a:prstGeom prst="rect"/>
-          <a:noFill/>
-        </p:spPr>
-        <p:txBody>
-          <a:bodyPr anchor="ctr" bIns="0" lIns="0" rIns="0" rtlCol="0" tIns="0" wrap="square"/>
-          <a:p>
-            <a:pPr indent="0" marL="0">
-              <a:buNone/>
-            </a:pPr>
-            <a:r>
-              <a:rPr b="1" dirty="0" sz="1000" lang="en-US">
-                <a:solidFill>
-                  <a:srgbClr val="2DD4BF"/>
-                </a:solidFill>
-                <a:latin typeface="Calibri" pitchFamily="34" charset="0"/>
-                <a:ea typeface="Calibri" pitchFamily="34" charset="-122"/>
-                <a:cs typeface="Calibri" pitchFamily="34" charset="-120"/>
-              </a:rPr>
-              <a:t>SMS (V2)</a:t>
-            </a:r>
-            <a:endParaRPr dirty="0" sz="1000" lang="en-US"/>
-          </a:p>
-        </p:txBody>
-      </p:sp>
-      <p:sp>
-        <p:nvSpPr>
-          <p:cNvPr id="1048736" name="Shape 32"/>
-          <p:cNvSpPr/>
-          <p:nvPr/>
-        </p:nvSpPr>
-        <p:spPr>
-          <a:xfrm>
-            <a:off x="1783080" y="4087368"/>
-            <a:ext cx="3474720" cy="411480"/>
-          </a:xfrm>
-          <a:prstGeom prst="rect"/>
-          <a:solidFill>
-            <a:srgbClr val="FFFFFF"/>
-          </a:solidFill>
-          <a:ln w="12700">
-            <a:solidFill>
-              <a:srgbClr val="94A3B8"/>
-            </a:solidFill>
-            <a:prstDash val="solid"/>
-          </a:ln>
-        </p:spPr>
-      </p:sp>
-      <p:sp>
-        <p:nvSpPr>
-          <p:cNvPr id="1048737" name="Text 33"/>
-          <p:cNvSpPr/>
-          <p:nvPr/>
-        </p:nvSpPr>
-        <p:spPr>
-          <a:xfrm>
-            <a:off x="1874520" y="4105656"/>
-            <a:ext cx="3383280" cy="374904"/>
-          </a:xfrm>
-          <a:prstGeom prst="rect"/>
-          <a:noFill/>
-        </p:spPr>
-        <p:txBody>
-          <a:bodyPr anchor="ctr" bIns="0" lIns="0" rIns="0" rtlCol="0" tIns="0" wrap="square"/>
-          <a:p>
-            <a:pPr indent="0" marL="0">
-              <a:buNone/>
-            </a:pPr>
-            <a:r>
-              <a:rPr dirty="0" sz="1000" lang="en-US">
-                <a:solidFill>
-                  <a:srgbClr val="334155"/>
-                </a:solidFill>
-                <a:latin typeface="Calibri" pitchFamily="34" charset="0"/>
-                <a:ea typeface="Calibri" pitchFamily="34" charset="-122"/>
-                <a:cs typeface="Calibri" pitchFamily="34" charset="-120"/>
-              </a:rPr>
-              <a:t>Termii / Africa's Talking</a:t>
-            </a:r>
-            <a:endParaRPr dirty="0" sz="1000" lang="en-US"/>
-          </a:p>
-        </p:txBody>
-      </p:sp>
-      <p:sp>
-        <p:nvSpPr>
-          <p:cNvPr id="1048738" name="Shape 34"/>
-          <p:cNvSpPr/>
-          <p:nvPr/>
-        </p:nvSpPr>
-        <p:spPr>
-          <a:xfrm>
-            <a:off x="5577840" y="1078992"/>
-            <a:ext cx="3154680" cy="1828800"/>
-          </a:xfrm>
-          <a:prstGeom prst="rect"/>
-          <a:solidFill>
-            <a:srgbClr val="0A1E3F"/>
-          </a:solidFill>
-          <a:ln w="12700">
-            <a:solidFill>
-              <a:srgbClr val="0A1E3F"/>
-            </a:solidFill>
-            <a:prstDash val="solid"/>
-          </a:ln>
-        </p:spPr>
-      </p:sp>
-      <p:sp>
-        <p:nvSpPr>
-          <p:cNvPr id="1048739" name="Text 35"/>
+          <p:cNvPr id="1048730" name="Text 35"/>
           <p:cNvSpPr/>
           <p:nvPr/>
         </p:nvSpPr>
@@ -8407,7 +8514,7 @@
       </p:sp>
       <p:sp>
         <p:nvSpPr>
-          <p:cNvPr id="1048740" name="Text 36"/>
+          <p:cNvPr id="1048731" name="Text 36"/>
           <p:cNvSpPr/>
           <p:nvPr/>
         </p:nvSpPr>
@@ -8442,7 +8549,7 @@
       </p:sp>
       <p:sp>
         <p:nvSpPr>
-          <p:cNvPr id="1048741" name="Shape 37"/>
+          <p:cNvPr id="1048732" name="Shape 37"/>
           <p:cNvSpPr/>
           <p:nvPr/>
         </p:nvSpPr>
@@ -8465,7 +8572,7 @@
       </p:sp>
       <p:sp>
         <p:nvSpPr>
-          <p:cNvPr id="1048742" name="Text 38"/>
+          <p:cNvPr id="1048733" name="Text 38"/>
           <p:cNvSpPr/>
           <p:nvPr/>
         </p:nvSpPr>
@@ -8500,7 +8607,7 @@
       </p:sp>
       <p:sp>
         <p:nvSpPr>
-          <p:cNvPr id="1048743" name="Text 39"/>
+          <p:cNvPr id="1048734" name="Text 39"/>
           <p:cNvSpPr/>
           <p:nvPr/>
         </p:nvSpPr>
@@ -8546,7 +8653,7 @@
       </p:sp>
       <p:sp>
         <p:nvSpPr>
-          <p:cNvPr id="1048744" name="Text 40"/>
+          <p:cNvPr id="1048735" name="Text 40"/>
           <p:cNvSpPr/>
           <p:nvPr/>
         </p:nvSpPr>
@@ -8592,7 +8699,7 @@
       </p:sp>
       <p:sp>
         <p:nvSpPr>
-          <p:cNvPr id="1048745" name="Text 41"/>
+          <p:cNvPr id="1048736" name="Text 41"/>
           <p:cNvSpPr/>
           <p:nvPr/>
         </p:nvSpPr>
